--- a/ai_engineering/AI_Engineering_Intro.pptx
+++ b/ai_engineering/AI_Engineering_Intro.pptx
@@ -17,11 +17,10 @@
     <p:sldId id="265" r:id="rId11"/>
     <p:sldId id="266" r:id="rId12"/>
     <p:sldId id="267" r:id="rId13"/>
+    <p:sldId id="269" r:id="rId15"/>
     <p:sldId id="268" r:id="rId14"/>
-    <p:sldId id="269" r:id="rId15"/>
     <p:sldId id="270" r:id="rId16"/>
     <p:sldId id="271" r:id="rId17"/>
-    <p:sldId id="272" r:id="rId18"/>
     <p:sldId id="273" r:id="rId19"/>
     <p:sldId id="274" r:id="rId20"/>
     <p:sldId id="275" r:id="rId21"/>
@@ -1162,94 +1161,6 @@
             <a:fld id="{F7021451-1387-4CA6-816F-3879F97B5CBC}" type="slidenum">
               <a:rPr lang="en-US"/>
               <a:t>16</a:t>
-            </a:fld>
-            <a:endParaRPr lang="en-US"/>
-          </a:p>
-        </p:txBody>
-      </p:sp>
-    </p:spTree>
-    <p:extLst>
-      <p:ext uri="{BB962C8B-B14F-4D97-AF65-F5344CB8AC3E}">
-        <p14:creationId xmlns:p14="http://schemas.microsoft.com/office/powerpoint/2010/main" val="1024086991"/>
-      </p:ext>
-    </p:extLst>
-  </p:cSld>
-  <p:clrMapOvr>
-    <a:masterClrMapping/>
-  </p:clrMapOvr>
-</p:notes>
-</file>
-
-<file path=ppt/notesSlides/notesSlide17.xml><?xml version="1.0" encoding="utf-8"?>
-<p:notes xmlns:a="http://schemas.openxmlformats.org/drawingml/2006/main" xmlns:r="http://schemas.openxmlformats.org/officeDocument/2006/relationships" xmlns:p="http://schemas.openxmlformats.org/presentationml/2006/main">
-  <p:cSld>
-    <p:spTree>
-      <p:nvGrpSpPr>
-        <p:cNvPr id="1" name=""/>
-        <p:cNvGrpSpPr/>
-        <p:nvPr/>
-      </p:nvGrpSpPr>
-      <p:grpSpPr>
-        <a:xfrm>
-          <a:off x="0" y="0"/>
-          <a:ext cx="0" cy="0"/>
-          <a:chOff x="0" y="0"/>
-          <a:chExt cx="0" cy="0"/>
-        </a:xfrm>
-      </p:grpSpPr>
-      <p:sp>
-        <p:nvSpPr>
-          <p:cNvPr id="2" name="Slide Image Placeholder 1"/>
-          <p:cNvSpPr>
-            <a:spLocks noGrp="1" noRot="1" noChangeAspect="1"/>
-          </p:cNvSpPr>
-          <p:nvPr>
-            <p:ph type="sldImg"/>
-          </p:nvPr>
-        </p:nvSpPr>
-        <p:spPr/>
-      </p:sp>
-      <p:sp>
-        <p:nvSpPr>
-          <p:cNvPr id="3" name="Notes Placeholder 2"/>
-          <p:cNvSpPr>
-            <a:spLocks noGrp="1"/>
-          </p:cNvSpPr>
-          <p:nvPr>
-            <p:ph type="body" idx="1"/>
-          </p:nvPr>
-        </p:nvSpPr>
-        <p:spPr/>
-        <p:txBody>
-          <a:bodyPr/>
-          <a:lstStyle/>
-          <a:p>
-            <a:r>
-              <a:rPr lang="en-US" dirty="0"/>
-              <a:t/>
-            </a:r>
-            <a:endParaRPr lang="en-US" dirty="0"/>
-          </a:p>
-        </p:txBody>
-      </p:sp>
-      <p:sp>
-        <p:nvSpPr>
-          <p:cNvPr id="4" name="Slide Number Placeholder 3"/>
-          <p:cNvSpPr>
-            <a:spLocks noGrp="1"/>
-          </p:cNvSpPr>
-          <p:nvPr>
-            <p:ph type="sldNum" sz="quarter" idx="10"/>
-          </p:nvPr>
-        </p:nvSpPr>
-        <p:spPr/>
-        <p:txBody>
-          <a:bodyPr/>
-          <a:lstStyle/>
-          <a:p>
-            <a:fld id="{F7021451-1387-4CA6-816F-3879F97B5CBC}" type="slidenum">
-              <a:rPr lang="en-US"/>
-              <a:t>17</a:t>
             </a:fld>
             <a:endParaRPr lang="en-US"/>
           </a:p>
@@ -3095,6 +3006,10 @@
             <a:prstDash val="solid"/>
           </a:ln>
         </p:spPr>
+        <p:txBody>
+          <a:bodyPr/>
+          <a:p/>
+        </p:txBody>
       </p:sp>
       <p:sp>
         <p:nvSpPr>
@@ -3129,7 +3044,7 @@
                 <a:ea typeface="Trebuchet MS" pitchFamily="34" charset="-122"/>
                 <a:cs typeface="Trebuchet MS" pitchFamily="34" charset="-120"/>
               </a:rPr>
-              <a:t>How Agents Think</a:t>
+              <a:t>How Models Reason</a:t>
             </a:r>
             <a:endParaRPr lang="en-US" sz="3200" dirty="0"/>
           </a:p>
@@ -3260,6 +3175,10 @@
             <a:prstDash val="solid"/>
           </a:ln>
         </p:spPr>
+        <p:txBody>
+          <a:bodyPr/>
+          <a:p/>
+        </p:txBody>
       </p:sp>
       <p:sp>
         <p:nvSpPr>
@@ -3477,6 +3396,10 @@
             <a:prstDash val="solid"/>
           </a:ln>
         </p:spPr>
+        <p:txBody>
+          <a:bodyPr/>
+          <a:p/>
+        </p:txBody>
       </p:sp>
       <p:sp>
         <p:nvSpPr>
@@ -3577,6 +3500,10 @@
             <a:prstDash val="solid"/>
           </a:ln>
         </p:spPr>
+        <p:txBody>
+          <a:bodyPr/>
+          <a:p/>
+        </p:txBody>
       </p:sp>
       <p:sp>
         <p:nvSpPr>
@@ -3677,6 +3604,10 @@
             <a:prstDash val="solid"/>
           </a:ln>
         </p:spPr>
+        <p:txBody>
+          <a:bodyPr/>
+          <a:p/>
+        </p:txBody>
       </p:sp>
       <p:sp>
         <p:nvSpPr>
@@ -3777,6 +3708,10 @@
             <a:prstDash val="solid"/>
           </a:ln>
         </p:spPr>
+        <p:txBody>
+          <a:bodyPr/>
+          <a:p/>
+        </p:txBody>
       </p:sp>
       <p:sp>
         <p:nvSpPr>
@@ -6169,6 +6104,1122 @@
 
 <file path=ppt/slides/slide13.xml><?xml version="1.0" encoding="utf-8"?>
 <p:sld xmlns:a="http://schemas.openxmlformats.org/drawingml/2006/main" xmlns:r="http://schemas.openxmlformats.org/officeDocument/2006/relationships" xmlns:p="http://schemas.openxmlformats.org/presentationml/2006/main">
+  <p:cSld name="Slide 14">
+    <p:bg>
+      <p:bgPr>
+        <a:solidFill>
+          <a:srgbClr val="F5F9FF"/>
+        </a:solidFill>
+      </p:bgPr>
+    </p:bg>
+    <p:spTree>
+      <p:nvGrpSpPr>
+        <p:cNvPr id="1" name=""/>
+        <p:cNvGrpSpPr/>
+        <p:nvPr/>
+      </p:nvGrpSpPr>
+      <p:grpSpPr>
+        <a:xfrm>
+          <a:off x="0" y="0"/>
+          <a:ext cx="0" cy="0"/>
+          <a:chOff x="0" y="0"/>
+          <a:chExt cx="0" cy="0"/>
+        </a:xfrm>
+      </p:grpSpPr>
+      <p:sp>
+        <p:nvSpPr>
+          <p:cNvPr id="2" name="Shape 0"/>
+          <p:cNvSpPr/>
+          <p:nvPr/>
+        </p:nvSpPr>
+        <p:spPr>
+          <a:xfrm>
+            <a:off x="0" y="0"/>
+            <a:ext cx="9144000" cy="64008"/>
+          </a:xfrm>
+          <a:prstGeom prst="rect">
+            <a:avLst/>
+          </a:prstGeom>
+          <a:solidFill>
+            <a:srgbClr val="0891B2"/>
+          </a:solidFill>
+          <a:ln w="12700">
+            <a:solidFill>
+              <a:srgbClr val="0891B2"/>
+            </a:solidFill>
+            <a:prstDash val="solid"/>
+          </a:ln>
+        </p:spPr>
+      </p:sp>
+      <p:sp>
+        <p:nvSpPr>
+          <p:cNvPr id="3" name="Text 1"/>
+          <p:cNvSpPr/>
+          <p:nvPr/>
+        </p:nvSpPr>
+        <p:spPr>
+          <a:xfrm>
+            <a:off x="457200" y="228600"/>
+            <a:ext cx="8229600" cy="502920"/>
+          </a:xfrm>
+          <a:prstGeom prst="rect">
+            <a:avLst/>
+          </a:prstGeom>
+          <a:noFill/>
+          <a:ln/>
+        </p:spPr>
+        <p:txBody>
+          <a:bodyPr wrap="square" rtlCol="0" anchor="ctr"/>
+          <a:lstStyle/>
+          <a:p>
+            <a:pPr indent="0" marL="0">
+              <a:buNone/>
+            </a:pPr>
+            <a:r>
+              <a:rPr lang="en-US" sz="3200" b="1" dirty="0">
+                <a:solidFill>
+                  <a:srgbClr val="0F172A"/>
+                </a:solidFill>
+                <a:latin typeface="Trebuchet MS" pitchFamily="34" charset="0"/>
+                <a:ea typeface="Trebuchet MS" pitchFamily="34" charset="-122"/>
+                <a:cs typeface="Trebuchet MS" pitchFamily="34" charset="-120"/>
+              </a:rPr>
+              <a:t>Building a Simple Agent</a:t>
+            </a:r>
+            <a:endParaRPr lang="en-US" sz="3200" dirty="0"/>
+          </a:p>
+        </p:txBody>
+      </p:sp>
+      <p:sp>
+        <p:nvSpPr>
+          <p:cNvPr id="4" name="Shape 2"/>
+          <p:cNvSpPr/>
+          <p:nvPr/>
+        </p:nvSpPr>
+        <p:spPr>
+          <a:xfrm>
+            <a:off x="365760" y="1234440"/>
+            <a:ext cx="1554480" cy="685800"/>
+          </a:xfrm>
+          <a:prstGeom prst="rect">
+            <a:avLst/>
+          </a:prstGeom>
+          <a:solidFill>
+            <a:srgbClr val="E8F5E9"/>
+          </a:solidFill>
+          <a:ln w="25400">
+            <a:solidFill>
+              <a:srgbClr val="43A047"/>
+            </a:solidFill>
+            <a:prstDash val="solid"/>
+          </a:ln>
+        </p:spPr>
+      </p:sp>
+      <p:sp>
+        <p:nvSpPr>
+          <p:cNvPr id="5" name="Text 3"/>
+          <p:cNvSpPr/>
+          <p:nvPr/>
+        </p:nvSpPr>
+        <p:spPr>
+          <a:xfrm>
+            <a:off x="365760" y="1234440"/>
+            <a:ext cx="1554480" cy="685800"/>
+          </a:xfrm>
+          <a:prstGeom prst="rect">
+            <a:avLst/>
+          </a:prstGeom>
+          <a:noFill/>
+          <a:ln/>
+        </p:spPr>
+        <p:txBody>
+          <a:bodyPr wrap="square" rtlCol="0" anchor="ctr"/>
+          <a:lstStyle/>
+          <a:p>
+            <a:pPr algn="ctr" indent="0" marL="0">
+              <a:buNone/>
+            </a:pPr>
+            <a:r>
+              <a:rPr lang="en-US" sz="1200" b="1" dirty="0">
+                <a:solidFill>
+                  <a:srgbClr val="2E7D32"/>
+                </a:solidFill>
+                <a:latin typeface="Trebuchet MS" pitchFamily="34" charset="0"/>
+                <a:ea typeface="Trebuchet MS" pitchFamily="34" charset="-122"/>
+                <a:cs typeface="Trebuchet MS" pitchFamily="34" charset="-120"/>
+              </a:rPr>
+              <a:t>User Input</a:t>
+            </a:r>
+            <a:endParaRPr lang="en-US" sz="1200" dirty="0"/>
+          </a:p>
+        </p:txBody>
+      </p:sp>
+      <p:sp>
+        <p:nvSpPr>
+          <p:cNvPr id="6" name="Text 4"/>
+          <p:cNvSpPr/>
+          <p:nvPr/>
+        </p:nvSpPr>
+        <p:spPr>
+          <a:xfrm>
+            <a:off x="1965960" y="1389888"/>
+            <a:ext cx="365760" cy="384048"/>
+          </a:xfrm>
+          <a:prstGeom prst="rect">
+            <a:avLst/>
+          </a:prstGeom>
+          <a:noFill/>
+          <a:ln/>
+        </p:spPr>
+        <p:txBody>
+          <a:bodyPr wrap="square" rtlCol="0" anchor="ctr"/>
+          <a:lstStyle/>
+          <a:p>
+            <a:pPr algn="ctr" indent="0" marL="0">
+              <a:buNone/>
+            </a:pPr>
+            <a:r>
+              <a:rPr lang="en-US" sz="2200" dirty="0">
+                <a:solidFill>
+                  <a:srgbClr val="0891B2"/>
+                </a:solidFill>
+              </a:rPr>
+              <a:t>→</a:t>
+            </a:r>
+            <a:endParaRPr lang="en-US" sz="2200" dirty="0"/>
+          </a:p>
+        </p:txBody>
+      </p:sp>
+      <p:sp>
+        <p:nvSpPr>
+          <p:cNvPr id="7" name="Shape 5"/>
+          <p:cNvSpPr/>
+          <p:nvPr/>
+        </p:nvSpPr>
+        <p:spPr>
+          <a:xfrm>
+            <a:off x="2377440" y="1051560"/>
+            <a:ext cx="2011680" cy="1280160"/>
+          </a:xfrm>
+          <a:prstGeom prst="rect">
+            <a:avLst/>
+          </a:prstGeom>
+          <a:solidFill>
+            <a:srgbClr val="0D1B2A"/>
+          </a:solidFill>
+          <a:ln w="25400">
+            <a:solidFill>
+              <a:srgbClr val="06B6D4"/>
+            </a:solidFill>
+            <a:prstDash val="solid"/>
+          </a:ln>
+        </p:spPr>
+      </p:sp>
+      <p:sp>
+        <p:nvSpPr>
+          <p:cNvPr id="8" name="Text 6"/>
+          <p:cNvSpPr/>
+          <p:nvPr/>
+        </p:nvSpPr>
+        <p:spPr>
+          <a:xfrm>
+            <a:off x="2377440" y="1143000"/>
+            <a:ext cx="2011680" cy="411480"/>
+          </a:xfrm>
+          <a:prstGeom prst="rect">
+            <a:avLst/>
+          </a:prstGeom>
+          <a:noFill/>
+          <a:ln/>
+        </p:spPr>
+        <p:txBody>
+          <a:bodyPr wrap="square" rtlCol="0" anchor="ctr"/>
+          <a:lstStyle/>
+          <a:p>
+            <a:pPr algn="ctr" indent="0" marL="0">
+              <a:buNone/>
+            </a:pPr>
+            <a:r>
+              <a:rPr lang="en-US" sz="2200" b="1" dirty="0">
+                <a:solidFill>
+                  <a:srgbClr val="06B6D4"/>
+                </a:solidFill>
+                <a:latin typeface="Trebuchet MS" pitchFamily="34" charset="0"/>
+                <a:ea typeface="Trebuchet MS" pitchFamily="34" charset="-122"/>
+                <a:cs typeface="Trebuchet MS" pitchFamily="34" charset="-120"/>
+              </a:rPr>
+              <a:t>LLM</a:t>
+            </a:r>
+            <a:endParaRPr lang="en-US" sz="2200" dirty="0"/>
+          </a:p>
+        </p:txBody>
+      </p:sp>
+      <p:sp>
+        <p:nvSpPr>
+          <p:cNvPr id="9" name="Text 7"/>
+          <p:cNvSpPr/>
+          <p:nvPr/>
+        </p:nvSpPr>
+        <p:spPr>
+          <a:xfrm>
+            <a:off x="2377440" y="1572768"/>
+            <a:ext cx="2011680" cy="658368"/>
+          </a:xfrm>
+          <a:prstGeom prst="rect">
+            <a:avLst/>
+          </a:prstGeom>
+          <a:noFill/>
+          <a:ln/>
+        </p:spPr>
+        <p:txBody>
+          <a:bodyPr wrap="square" rtlCol="0" anchor="ctr"/>
+          <a:lstStyle/>
+          <a:p>
+            <a:pPr algn="ctr" indent="0" marL="0">
+              <a:buNone/>
+            </a:pPr>
+            <a:r>
+              <a:rPr lang="en-US" sz="1000" dirty="0">
+                <a:solidFill>
+                  <a:srgbClr val="94A3B8"/>
+                </a:solidFill>
+                <a:latin typeface="Calibri" pitchFamily="34" charset="0"/>
+                <a:ea typeface="Calibri" pitchFamily="34" charset="-122"/>
+                <a:cs typeface="Calibri" pitchFamily="34" charset="-120"/>
+              </a:rPr>
+              <a:t>Prompt + History</a:t>
+            </a:r>
+            <a:endParaRPr lang="en-US" sz="1000" dirty="0"/>
+          </a:p>
+          <a:p>
+            <a:pPr algn="ctr" indent="0" marL="0">
+              <a:buNone/>
+            </a:pPr>
+            <a:r>
+              <a:rPr lang="en-US" sz="1000" dirty="0">
+                <a:solidFill>
+                  <a:srgbClr val="94A3B8"/>
+                </a:solidFill>
+                <a:latin typeface="Calibri" pitchFamily="34" charset="0"/>
+                <a:ea typeface="Calibri" pitchFamily="34" charset="-122"/>
+                <a:cs typeface="Calibri" pitchFamily="34" charset="-120"/>
+              </a:rPr>
+              <a:t>+ Tools</a:t>
+            </a:r>
+            <a:endParaRPr lang="en-US" sz="1000" dirty="0"/>
+          </a:p>
+        </p:txBody>
+      </p:sp>
+      <p:sp>
+        <p:nvSpPr>
+          <p:cNvPr id="10" name="Text 8"/>
+          <p:cNvSpPr/>
+          <p:nvPr/>
+        </p:nvSpPr>
+        <p:spPr>
+          <a:xfrm>
+            <a:off x="4425696" y="1389888"/>
+            <a:ext cx="365760" cy="384048"/>
+          </a:xfrm>
+          <a:prstGeom prst="rect">
+            <a:avLst/>
+          </a:prstGeom>
+          <a:noFill/>
+          <a:ln/>
+        </p:spPr>
+        <p:txBody>
+          <a:bodyPr wrap="square" rtlCol="0" anchor="ctr"/>
+          <a:lstStyle/>
+          <a:p>
+            <a:pPr algn="ctr" indent="0" marL="0">
+              <a:buNone/>
+            </a:pPr>
+            <a:r>
+              <a:rPr lang="en-US" sz="2200" dirty="0">
+                <a:solidFill>
+                  <a:srgbClr val="0891B2"/>
+                </a:solidFill>
+              </a:rPr>
+              <a:t>→</a:t>
+            </a:r>
+            <a:endParaRPr lang="en-US" sz="2200" dirty="0"/>
+          </a:p>
+        </p:txBody>
+      </p:sp>
+      <p:sp>
+        <p:nvSpPr>
+          <p:cNvPr id="11" name="Shape 9"/>
+          <p:cNvSpPr/>
+          <p:nvPr/>
+        </p:nvSpPr>
+        <p:spPr>
+          <a:xfrm>
+            <a:off x="4828032" y="1234440"/>
+            <a:ext cx="1691640" cy="804672"/>
+          </a:xfrm>
+          <a:prstGeom prst="rect">
+            <a:avLst/>
+          </a:prstGeom>
+          <a:solidFill>
+            <a:srgbClr val="FFF8E1"/>
+          </a:solidFill>
+          <a:ln w="25400">
+            <a:solidFill>
+              <a:srgbClr val="FFB300"/>
+            </a:solidFill>
+            <a:prstDash val="solid"/>
+          </a:ln>
+        </p:spPr>
+      </p:sp>
+      <p:sp>
+        <p:nvSpPr>
+          <p:cNvPr id="12" name="Text 10"/>
+          <p:cNvSpPr/>
+          <p:nvPr/>
+        </p:nvSpPr>
+        <p:spPr>
+          <a:xfrm>
+            <a:off x="4828032" y="1234440"/>
+            <a:ext cx="1691640" cy="804672"/>
+          </a:xfrm>
+          <a:prstGeom prst="rect">
+            <a:avLst/>
+          </a:prstGeom>
+          <a:noFill/>
+          <a:ln/>
+        </p:spPr>
+        <p:txBody>
+          <a:bodyPr wrap="square" rtlCol="0" anchor="ctr"/>
+          <a:lstStyle/>
+          <a:p>
+            <a:pPr algn="ctr" indent="0" marL="0">
+              <a:buNone/>
+            </a:pPr>
+            <a:r>
+              <a:rPr lang="en-US" sz="1150" b="1" dirty="0">
+                <a:solidFill>
+                  <a:srgbClr val="E65100"/>
+                </a:solidFill>
+                <a:latin typeface="Trebuchet MS" pitchFamily="34" charset="0"/>
+                <a:ea typeface="Trebuchet MS" pitchFamily="34" charset="-122"/>
+                <a:cs typeface="Trebuchet MS" pitchFamily="34" charset="-120"/>
+              </a:rPr>
+              <a:t>Tool call</a:t>
+            </a:r>
+            <a:endParaRPr lang="en-US" sz="1150" dirty="0"/>
+          </a:p>
+          <a:p>
+            <a:pPr algn="ctr" indent="0" marL="0">
+              <a:buNone/>
+            </a:pPr>
+            <a:r>
+              <a:rPr lang="en-US" sz="1150" b="1" dirty="0">
+                <a:solidFill>
+                  <a:srgbClr val="E65100"/>
+                </a:solidFill>
+                <a:latin typeface="Trebuchet MS" pitchFamily="34" charset="0"/>
+                <a:ea typeface="Trebuchet MS" pitchFamily="34" charset="-122"/>
+                <a:cs typeface="Trebuchet MS" pitchFamily="34" charset="-120"/>
+              </a:rPr>
+              <a:t>needed?</a:t>
+            </a:r>
+            <a:endParaRPr lang="en-US" sz="1150" dirty="0"/>
+          </a:p>
+        </p:txBody>
+      </p:sp>
+      <p:sp>
+        <p:nvSpPr>
+          <p:cNvPr id="13" name="Text 11"/>
+          <p:cNvSpPr/>
+          <p:nvPr/>
+        </p:nvSpPr>
+        <p:spPr>
+          <a:xfrm>
+            <a:off x="6556248" y="1325880"/>
+            <a:ext cx="640080" cy="320040"/>
+          </a:xfrm>
+          <a:prstGeom prst="rect">
+            <a:avLst/>
+          </a:prstGeom>
+          <a:noFill/>
+          <a:ln/>
+        </p:spPr>
+        <p:txBody>
+          <a:bodyPr wrap="square" rtlCol="0" anchor="ctr"/>
+          <a:lstStyle/>
+          <a:p>
+            <a:pPr indent="0" marL="0">
+              <a:buNone/>
+            </a:pPr>
+            <a:r>
+              <a:rPr lang="en-US" sz="1100" dirty="0">
+                <a:solidFill>
+                  <a:srgbClr val="1E88E5"/>
+                </a:solidFill>
+                <a:latin typeface="Calibri" pitchFamily="34" charset="0"/>
+                <a:ea typeface="Calibri" pitchFamily="34" charset="-122"/>
+                <a:cs typeface="Calibri" pitchFamily="34" charset="-120"/>
+              </a:rPr>
+              <a:t>YES →</a:t>
+            </a:r>
+            <a:endParaRPr lang="en-US" sz="1100" dirty="0"/>
+          </a:p>
+        </p:txBody>
+      </p:sp>
+      <p:sp>
+        <p:nvSpPr>
+          <p:cNvPr id="14" name="Shape 12"/>
+          <p:cNvSpPr/>
+          <p:nvPr/>
+        </p:nvSpPr>
+        <p:spPr>
+          <a:xfrm>
+            <a:off x="7205472" y="1051560"/>
+            <a:ext cx="1737360" cy="1143000"/>
+          </a:xfrm>
+          <a:prstGeom prst="rect">
+            <a:avLst/>
+          </a:prstGeom>
+          <a:solidFill>
+            <a:srgbClr val="E3F2FD"/>
+          </a:solidFill>
+          <a:ln w="25400">
+            <a:solidFill>
+              <a:srgbClr val="1E88E5"/>
+            </a:solidFill>
+            <a:prstDash val="solid"/>
+          </a:ln>
+        </p:spPr>
+      </p:sp>
+      <p:sp>
+        <p:nvSpPr>
+          <p:cNvPr id="15" name="Text 13"/>
+          <p:cNvSpPr/>
+          <p:nvPr/>
+        </p:nvSpPr>
+        <p:spPr>
+          <a:xfrm>
+            <a:off x="7205472" y="1143000"/>
+            <a:ext cx="1737360" cy="457200"/>
+          </a:xfrm>
+          <a:prstGeom prst="rect">
+            <a:avLst/>
+          </a:prstGeom>
+          <a:noFill/>
+          <a:ln/>
+        </p:spPr>
+        <p:txBody>
+          <a:bodyPr wrap="square" rtlCol="0" anchor="ctr"/>
+          <a:lstStyle/>
+          <a:p>
+            <a:pPr algn="ctr" indent="0" marL="0">
+              <a:buNone/>
+            </a:pPr>
+            <a:r>
+              <a:rPr lang="en-US" sz="1300" b="1" dirty="0">
+                <a:solidFill>
+                  <a:srgbClr val="1565C0"/>
+                </a:solidFill>
+                <a:latin typeface="Trebuchet MS" pitchFamily="34" charset="0"/>
+                <a:ea typeface="Trebuchet MS" pitchFamily="34" charset="-122"/>
+                <a:cs typeface="Trebuchet MS" pitchFamily="34" charset="-120"/>
+              </a:rPr>
+              <a:t>Execute</a:t>
+            </a:r>
+            <a:endParaRPr lang="en-US" sz="1300" dirty="0"/>
+          </a:p>
+          <a:p>
+            <a:pPr algn="ctr" indent="0" marL="0">
+              <a:buNone/>
+            </a:pPr>
+            <a:r>
+              <a:rPr lang="en-US" sz="1300" b="1" dirty="0">
+                <a:solidFill>
+                  <a:srgbClr val="1565C0"/>
+                </a:solidFill>
+                <a:latin typeface="Trebuchet MS" pitchFamily="34" charset="0"/>
+                <a:ea typeface="Trebuchet MS" pitchFamily="34" charset="-122"/>
+                <a:cs typeface="Trebuchet MS" pitchFamily="34" charset="-120"/>
+              </a:rPr>
+              <a:t>Tool(s)</a:t>
+            </a:r>
+            <a:endParaRPr lang="en-US" sz="1300" dirty="0"/>
+          </a:p>
+        </p:txBody>
+      </p:sp>
+      <p:sp>
+        <p:nvSpPr>
+          <p:cNvPr id="16" name="Text 14"/>
+          <p:cNvSpPr/>
+          <p:nvPr/>
+        </p:nvSpPr>
+        <p:spPr>
+          <a:xfrm>
+            <a:off x="7205472" y="1618488"/>
+            <a:ext cx="1737360" cy="457200"/>
+          </a:xfrm>
+          <a:prstGeom prst="rect">
+            <a:avLst/>
+          </a:prstGeom>
+          <a:noFill/>
+          <a:ln/>
+        </p:spPr>
+        <p:txBody>
+          <a:bodyPr wrap="square" rtlCol="0" anchor="ctr"/>
+          <a:lstStyle/>
+          <a:p>
+            <a:pPr algn="ctr" indent="0" marL="0">
+              <a:buNone/>
+            </a:pPr>
+            <a:r>
+              <a:rPr lang="en-US" sz="1000" dirty="0">
+                <a:solidFill>
+                  <a:srgbClr val="334155"/>
+                </a:solidFill>
+                <a:latin typeface="Calibri" pitchFamily="34" charset="0"/>
+                <a:ea typeface="Calibri" pitchFamily="34" charset="-122"/>
+                <a:cs typeface="Calibri" pitchFamily="34" charset="-120"/>
+              </a:rPr>
+              <a:t>Run function</a:t>
+            </a:r>
+            <a:endParaRPr lang="en-US" sz="1000" dirty="0"/>
+          </a:p>
+          <a:p>
+            <a:pPr algn="ctr" indent="0" marL="0">
+              <a:buNone/>
+            </a:pPr>
+            <a:r>
+              <a:rPr lang="en-US" sz="1000" dirty="0">
+                <a:solidFill>
+                  <a:srgbClr val="334155"/>
+                </a:solidFill>
+                <a:latin typeface="Calibri" pitchFamily="34" charset="0"/>
+                <a:ea typeface="Calibri" pitchFamily="34" charset="-122"/>
+                <a:cs typeface="Calibri" pitchFamily="34" charset="-120"/>
+              </a:rPr>
+              <a:t>Append result</a:t>
+            </a:r>
+            <a:endParaRPr lang="en-US" sz="1000" dirty="0"/>
+          </a:p>
+        </p:txBody>
+      </p:sp>
+      <p:sp>
+        <p:nvSpPr>
+          <p:cNvPr id="17" name="Shape 15"/>
+          <p:cNvSpPr/>
+          <p:nvPr/>
+        </p:nvSpPr>
+        <p:spPr>
+          <a:xfrm>
+            <a:off x="8074152" y="914400"/>
+            <a:ext cx="9144" cy="137160"/>
+          </a:xfrm>
+          <a:prstGeom prst="rect">
+            <a:avLst/>
+          </a:prstGeom>
+          <a:solidFill>
+            <a:srgbClr val="64748B"/>
+          </a:solidFill>
+          <a:ln w="15240">
+            <a:solidFill>
+              <a:srgbClr val="64748B"/>
+            </a:solidFill>
+            <a:prstDash val="dash"/>
+          </a:ln>
+        </p:spPr>
+      </p:sp>
+      <p:sp>
+        <p:nvSpPr>
+          <p:cNvPr id="18" name="Shape 16"/>
+          <p:cNvSpPr/>
+          <p:nvPr/>
+        </p:nvSpPr>
+        <p:spPr>
+          <a:xfrm>
+            <a:off x="3383280" y="914400"/>
+            <a:ext cx="4700016" cy="9144"/>
+          </a:xfrm>
+          <a:prstGeom prst="rect">
+            <a:avLst/>
+          </a:prstGeom>
+          <a:solidFill>
+            <a:srgbClr val="64748B"/>
+          </a:solidFill>
+          <a:ln w="15240">
+            <a:solidFill>
+              <a:srgbClr val="64748B"/>
+            </a:solidFill>
+            <a:prstDash val="dash"/>
+          </a:ln>
+        </p:spPr>
+      </p:sp>
+      <p:sp>
+        <p:nvSpPr>
+          <p:cNvPr id="19" name="Shape 17"/>
+          <p:cNvSpPr/>
+          <p:nvPr/>
+        </p:nvSpPr>
+        <p:spPr>
+          <a:xfrm>
+            <a:off x="3383280" y="914400"/>
+            <a:ext cx="9144" cy="137160"/>
+          </a:xfrm>
+          <a:prstGeom prst="rect">
+            <a:avLst/>
+          </a:prstGeom>
+          <a:solidFill>
+            <a:srgbClr val="64748B"/>
+          </a:solidFill>
+          <a:ln w="15240">
+            <a:solidFill>
+              <a:srgbClr val="64748B"/>
+            </a:solidFill>
+            <a:prstDash val="dash"/>
+          </a:ln>
+        </p:spPr>
+      </p:sp>
+      <p:sp>
+        <p:nvSpPr>
+          <p:cNvPr id="20" name="Text 18"/>
+          <p:cNvSpPr/>
+          <p:nvPr/>
+        </p:nvSpPr>
+        <p:spPr>
+          <a:xfrm>
+            <a:off x="4114800" y="768096"/>
+            <a:ext cx="3291840" cy="201168"/>
+          </a:xfrm>
+          <a:prstGeom prst="rect">
+            <a:avLst/>
+          </a:prstGeom>
+          <a:noFill/>
+          <a:ln/>
+        </p:spPr>
+        <p:txBody>
+          <a:bodyPr wrap="square" rtlCol="0" anchor="ctr"/>
+          <a:lstStyle/>
+          <a:p>
+            <a:pPr indent="0" marL="0">
+              <a:buNone/>
+            </a:pPr>
+            <a:r>
+              <a:rPr lang="en-US" sz="900" dirty="0">
+                <a:solidFill>
+                  <a:srgbClr val="64748B"/>
+                </a:solidFill>
+                <a:latin typeface="Calibri italic" pitchFamily="34" charset="0"/>
+                <a:ea typeface="Calibri italic" pitchFamily="34" charset="-122"/>
+                <a:cs typeface="Calibri italic" pitchFamily="34" charset="-120"/>
+              </a:rPr>
+              <a:t>← tool result loops back to LLM</a:t>
+            </a:r>
+            <a:endParaRPr lang="en-US" sz="900" dirty="0"/>
+          </a:p>
+        </p:txBody>
+      </p:sp>
+      <p:sp>
+        <p:nvSpPr>
+          <p:cNvPr id="21" name="Text 19"/>
+          <p:cNvSpPr/>
+          <p:nvPr/>
+        </p:nvSpPr>
+        <p:spPr>
+          <a:xfrm>
+            <a:off x="5623560" y="2066544"/>
+            <a:ext cx="731520" cy="274320"/>
+          </a:xfrm>
+          <a:prstGeom prst="rect">
+            <a:avLst/>
+          </a:prstGeom>
+          <a:noFill/>
+          <a:ln/>
+        </p:spPr>
+        <p:txBody>
+          <a:bodyPr wrap="square" rtlCol="0" anchor="ctr"/>
+          <a:lstStyle/>
+          <a:p>
+            <a:pPr indent="0" marL="0">
+              <a:buNone/>
+            </a:pPr>
+            <a:r>
+              <a:rPr lang="en-US" sz="1100" dirty="0">
+                <a:solidFill>
+                  <a:srgbClr val="43A047"/>
+                </a:solidFill>
+                <a:latin typeface="Calibri" pitchFamily="34" charset="0"/>
+                <a:ea typeface="Calibri" pitchFamily="34" charset="-122"/>
+                <a:cs typeface="Calibri" pitchFamily="34" charset="-120"/>
+              </a:rPr>
+              <a:t>↓ NO</a:t>
+            </a:r>
+            <a:endParaRPr lang="en-US" sz="1100" dirty="0"/>
+          </a:p>
+        </p:txBody>
+      </p:sp>
+      <p:sp>
+        <p:nvSpPr>
+          <p:cNvPr id="22" name="Shape 20"/>
+          <p:cNvSpPr/>
+          <p:nvPr/>
+        </p:nvSpPr>
+        <p:spPr>
+          <a:xfrm>
+            <a:off x="4828032" y="2377440"/>
+            <a:ext cx="1691640" cy="658368"/>
+          </a:xfrm>
+          <a:prstGeom prst="rect">
+            <a:avLst/>
+          </a:prstGeom>
+          <a:solidFill>
+            <a:srgbClr val="E8F5E9"/>
+          </a:solidFill>
+          <a:ln w="25400">
+            <a:solidFill>
+              <a:srgbClr val="43A047"/>
+            </a:solidFill>
+            <a:prstDash val="solid"/>
+          </a:ln>
+        </p:spPr>
+      </p:sp>
+      <p:sp>
+        <p:nvSpPr>
+          <p:cNvPr id="23" name="Text 21"/>
+          <p:cNvSpPr/>
+          <p:nvPr/>
+        </p:nvSpPr>
+        <p:spPr>
+          <a:xfrm>
+            <a:off x="4828032" y="2377440"/>
+            <a:ext cx="1691640" cy="658368"/>
+          </a:xfrm>
+          <a:prstGeom prst="rect">
+            <a:avLst/>
+          </a:prstGeom>
+          <a:noFill/>
+          <a:ln/>
+        </p:spPr>
+        <p:txBody>
+          <a:bodyPr wrap="square" rtlCol="0" anchor="ctr"/>
+          <a:lstStyle/>
+          <a:p>
+            <a:pPr algn="ctr" indent="0" marL="0">
+              <a:buNone/>
+            </a:pPr>
+            <a:r>
+              <a:rPr lang="en-US" sz="1300" b="1" dirty="0">
+                <a:solidFill>
+                  <a:srgbClr val="2E7D32"/>
+                </a:solidFill>
+                <a:latin typeface="Trebuchet MS" pitchFamily="34" charset="0"/>
+                <a:ea typeface="Trebuchet MS" pitchFamily="34" charset="-122"/>
+                <a:cs typeface="Trebuchet MS" pitchFamily="34" charset="-120"/>
+              </a:rPr>
+              <a:t>Final Answer</a:t>
+            </a:r>
+            <a:endParaRPr lang="en-US" sz="1300" dirty="0"/>
+          </a:p>
+        </p:txBody>
+      </p:sp>
+      <p:sp>
+        <p:nvSpPr>
+          <p:cNvPr id="24" name="Shape 22"/>
+          <p:cNvSpPr/>
+          <p:nvPr/>
+        </p:nvSpPr>
+        <p:spPr>
+          <a:xfrm>
+            <a:off x="365760" y="3246120"/>
+            <a:ext cx="8412480" cy="1572768"/>
+          </a:xfrm>
+          <a:prstGeom prst="rect">
+            <a:avLst/>
+          </a:prstGeom>
+          <a:solidFill>
+            <a:srgbClr val="0F172A"/>
+          </a:solidFill>
+          <a:ln w="12700">
+            <a:solidFill>
+              <a:srgbClr val="334155"/>
+            </a:solidFill>
+            <a:prstDash val="solid"/>
+          </a:ln>
+        </p:spPr>
+      </p:sp>
+      <p:sp>
+        <p:nvSpPr>
+          <p:cNvPr id="25" name="Text 23"/>
+          <p:cNvSpPr/>
+          <p:nvPr/>
+        </p:nvSpPr>
+        <p:spPr>
+          <a:xfrm>
+            <a:off x="502920" y="3273552"/>
+            <a:ext cx="4572000" cy="219456"/>
+          </a:xfrm>
+          <a:prstGeom prst="rect">
+            <a:avLst/>
+          </a:prstGeom>
+          <a:noFill/>
+          <a:ln/>
+        </p:spPr>
+        <p:txBody>
+          <a:bodyPr wrap="square" rtlCol="0" anchor="ctr"/>
+          <a:lstStyle/>
+          <a:p>
+            <a:pPr indent="0" marL="0">
+              <a:buNone/>
+            </a:pPr>
+            <a:r>
+              <a:rPr lang="en-US" sz="900" dirty="0">
+                <a:solidFill>
+                  <a:srgbClr val="64748B"/>
+                </a:solidFill>
+                <a:latin typeface="Consolas" pitchFamily="34" charset="0"/>
+                <a:ea typeface="Consolas" pitchFamily="34" charset="-122"/>
+                <a:cs typeface="Consolas" pitchFamily="34" charset="-120"/>
+              </a:rPr>
+              <a:t>Agent loop (simplified Python)</a:t>
+            </a:r>
+            <a:endParaRPr lang="en-US" sz="900" dirty="0"/>
+          </a:p>
+        </p:txBody>
+      </p:sp>
+      <p:sp>
+        <p:nvSpPr>
+          <p:cNvPr id="26" name="Text 24"/>
+          <p:cNvSpPr/>
+          <p:nvPr/>
+        </p:nvSpPr>
+        <p:spPr>
+          <a:xfrm>
+            <a:off x="502920" y="3529584"/>
+            <a:ext cx="8046720" cy="1234440"/>
+          </a:xfrm>
+          <a:prstGeom prst="rect">
+            <a:avLst/>
+          </a:prstGeom>
+          <a:noFill/>
+          <a:ln/>
+        </p:spPr>
+        <p:txBody>
+          <a:bodyPr wrap="square" rtlCol="0" anchor="ctr"/>
+          <a:lstStyle/>
+          <a:p>
+            <a:pPr indent="0" marL="0">
+              <a:buNone/>
+            </a:pPr>
+            <a:r>
+              <a:rPr lang="en-US" sz="1080" b="1" dirty="0">
+                <a:solidFill>
+                  <a:srgbClr val="93C5FD"/>
+                </a:solidFill>
+                <a:latin typeface="Consolas" pitchFamily="34" charset="0"/>
+                <a:ea typeface="Consolas" pitchFamily="34" charset="-122"/>
+                <a:cs typeface="Consolas" pitchFamily="34" charset="-120"/>
+              </a:rPr>
+              <a:t>while</a:t>
+            </a:r>
+            <a:pPr indent="0" marL="0">
+              <a:buNone/>
+            </a:pPr>
+            <a:r>
+              <a:rPr lang="en-US" sz="1080" dirty="0">
+                <a:solidFill>
+                  <a:srgbClr val="E2E8F0"/>
+                </a:solidFill>
+                <a:latin typeface="Consolas" pitchFamily="34" charset="0"/>
+                <a:ea typeface="Consolas" pitchFamily="34" charset="-122"/>
+                <a:cs typeface="Consolas" pitchFamily="34" charset="-120"/>
+              </a:rPr>
+              <a:t> iterations &lt; max_iterations:
+</a:t>
+            </a:r>
+            <a:pPr indent="0" marL="0">
+              <a:buNone/>
+            </a:pPr>
+            <a:r>
+              <a:rPr lang="en-US" sz="1080" dirty="0">
+                <a:solidFill>
+                  <a:srgbClr val="E2E8F0"/>
+                </a:solidFill>
+                <a:latin typeface="Consolas" pitchFamily="34" charset="0"/>
+                <a:ea typeface="Consolas" pitchFamily="34" charset="-122"/>
+                <a:cs typeface="Consolas" pitchFamily="34" charset="-120"/>
+              </a:rPr>
+              <a:t>    response = llm.call(messages, tools)
+</a:t>
+            </a:r>
+            <a:pPr indent="0" marL="0">
+              <a:buNone/>
+            </a:pPr>
+            <a:r>
+              <a:rPr lang="en-US" sz="1080" b="1" dirty="0">
+                <a:solidFill>
+                  <a:srgbClr val="93C5FD"/>
+                </a:solidFill>
+                <a:latin typeface="Consolas" pitchFamily="34" charset="0"/>
+                <a:ea typeface="Consolas" pitchFamily="34" charset="-122"/>
+                <a:cs typeface="Consolas" pitchFamily="34" charset="-120"/>
+              </a:rPr>
+              <a:t>    if</a:t>
+            </a:r>
+            <a:pPr indent="0" marL="0">
+              <a:buNone/>
+            </a:pPr>
+            <a:r>
+              <a:rPr lang="en-US" sz="1080" dirty="0">
+                <a:solidFill>
+                  <a:srgbClr val="E2E8F0"/>
+                </a:solidFill>
+                <a:latin typeface="Consolas" pitchFamily="34" charset="0"/>
+                <a:ea typeface="Consolas" pitchFamily="34" charset="-122"/>
+                <a:cs typeface="Consolas" pitchFamily="34" charset="-120"/>
+              </a:rPr>
+              <a:t> response.stop_reason == </a:t>
+            </a:r>
+            <a:pPr indent="0" marL="0">
+              <a:buNone/>
+            </a:pPr>
+            <a:r>
+              <a:rPr lang="en-US" sz="1080" dirty="0">
+                <a:solidFill>
+                  <a:srgbClr val="FCA5A5"/>
+                </a:solidFill>
+                <a:latin typeface="Consolas" pitchFamily="34" charset="0"/>
+                <a:ea typeface="Consolas" pitchFamily="34" charset="-122"/>
+                <a:cs typeface="Consolas" pitchFamily="34" charset="-120"/>
+              </a:rPr>
+              <a:t>"end_turn"</a:t>
+            </a:r>
+            <a:pPr indent="0" marL="0">
+              <a:buNone/>
+            </a:pPr>
+            <a:r>
+              <a:rPr lang="en-US" sz="1080" dirty="0">
+                <a:solidFill>
+                  <a:srgbClr val="E2E8F0"/>
+                </a:solidFill>
+                <a:latin typeface="Consolas" pitchFamily="34" charset="0"/>
+                <a:ea typeface="Consolas" pitchFamily="34" charset="-122"/>
+                <a:cs typeface="Consolas" pitchFamily="34" charset="-120"/>
+              </a:rPr>
+              <a:t>:  </a:t>
+            </a:r>
+            <a:pPr indent="0" marL="0">
+              <a:buNone/>
+            </a:pPr>
+            <a:r>
+              <a:rPr lang="en-US" sz="1080" dirty="0">
+                <a:solidFill>
+                  <a:srgbClr val="64748B"/>
+                </a:solidFill>
+                <a:latin typeface="Consolas" pitchFamily="34" charset="0"/>
+                <a:ea typeface="Consolas" pitchFamily="34" charset="-122"/>
+                <a:cs typeface="Consolas" pitchFamily="34" charset="-120"/>
+              </a:rPr>
+              <a:t>break  # done!
+</a:t>
+            </a:r>
+            <a:pPr indent="0" marL="0">
+              <a:buNone/>
+            </a:pPr>
+            <a:r>
+              <a:rPr lang="en-US" sz="1080" b="1" dirty="0">
+                <a:solidFill>
+                  <a:srgbClr val="93C5FD"/>
+                </a:solidFill>
+                <a:latin typeface="Consolas" pitchFamily="34" charset="0"/>
+                <a:ea typeface="Consolas" pitchFamily="34" charset="-122"/>
+                <a:cs typeface="Consolas" pitchFamily="34" charset="-120"/>
+              </a:rPr>
+              <a:t>    for</a:t>
+            </a:r>
+            <a:pPr indent="0" marL="0">
+              <a:buNone/>
+            </a:pPr>
+            <a:r>
+              <a:rPr lang="en-US" sz="1080" dirty="0">
+                <a:solidFill>
+                  <a:srgbClr val="E2E8F0"/>
+                </a:solidFill>
+                <a:latin typeface="Consolas" pitchFamily="34" charset="0"/>
+                <a:ea typeface="Consolas" pitchFamily="34" charset="-122"/>
+                <a:cs typeface="Consolas" pitchFamily="34" charset="-120"/>
+              </a:rPr>
+              <a:t> tool_call </a:t>
+            </a:r>
+            <a:pPr indent="0" marL="0">
+              <a:buNone/>
+            </a:pPr>
+            <a:r>
+              <a:rPr lang="en-US" sz="1080" b="1" dirty="0">
+                <a:solidFill>
+                  <a:srgbClr val="93C5FD"/>
+                </a:solidFill>
+                <a:latin typeface="Consolas" pitchFamily="34" charset="0"/>
+                <a:ea typeface="Consolas" pitchFamily="34" charset="-122"/>
+                <a:cs typeface="Consolas" pitchFamily="34" charset="-120"/>
+              </a:rPr>
+              <a:t>in</a:t>
+            </a:r>
+            <a:pPr indent="0" marL="0">
+              <a:buNone/>
+            </a:pPr>
+            <a:r>
+              <a:rPr lang="en-US" sz="1080" dirty="0">
+                <a:solidFill>
+                  <a:srgbClr val="E2E8F0"/>
+                </a:solidFill>
+                <a:latin typeface="Consolas" pitchFamily="34" charset="0"/>
+                <a:ea typeface="Consolas" pitchFamily="34" charset="-122"/>
+                <a:cs typeface="Consolas" pitchFamily="34" charset="-120"/>
+              </a:rPr>
+              <a:t> response.tool_calls:
+</a:t>
+            </a:r>
+            <a:pPr indent="0" marL="0">
+              <a:buNone/>
+            </a:pPr>
+            <a:r>
+              <a:rPr lang="en-US" sz="1080" dirty="0">
+                <a:solidFill>
+                  <a:srgbClr val="E2E8F0"/>
+                </a:solidFill>
+                <a:latin typeface="Consolas" pitchFamily="34" charset="0"/>
+                <a:ea typeface="Consolas" pitchFamily="34" charset="-122"/>
+                <a:cs typeface="Consolas" pitchFamily="34" charset="-120"/>
+              </a:rPr>
+              <a:t>        result = execute_tool(tool_call)  # YOUR code runs
+</a:t>
+            </a:r>
+            <a:pPr indent="0" marL="0">
+              <a:buNone/>
+            </a:pPr>
+            <a:r>
+              <a:rPr lang="en-US" sz="1080" dirty="0">
+                <a:solidFill>
+                  <a:srgbClr val="E2E8F0"/>
+                </a:solidFill>
+                <a:latin typeface="Consolas" pitchFamily="34" charset="0"/>
+                <a:ea typeface="Consolas" pitchFamily="34" charset="-122"/>
+                <a:cs typeface="Consolas" pitchFamily="34" charset="-120"/>
+              </a:rPr>
+              <a:t>        messages.append(tool_result(tool_call.id, result))</a:t>
+            </a:r>
+            <a:endParaRPr lang="en-US" sz="1080" dirty="0"/>
+          </a:p>
+        </p:txBody>
+      </p:sp>
+    </p:spTree>
+  </p:cSld>
+  <p:clrMapOvr>
+    <a:masterClrMapping/>
+  </p:clrMapOvr>
+</p:sld>
+</file>
+
+<file path=ppt/slides/slide14.xml><?xml version="1.0" encoding="utf-8"?>
+<p:sld xmlns:a="http://schemas.openxmlformats.org/drawingml/2006/main" xmlns:r="http://schemas.openxmlformats.org/officeDocument/2006/relationships" xmlns:p="http://schemas.openxmlformats.org/presentationml/2006/main">
   <p:cSld name="Slide 13">
     <p:bg>
       <p:bgPr>
@@ -7240,1122 +8291,6 @@
               <a:t>💡  MCP decouples tool implementation from the agent — any MCP server can plug into any MCP-compatible app. Think of it as USB for AI tools.</a:t>
             </a:r>
             <a:endParaRPr lang="en-US" sz="1150" dirty="0"/>
-          </a:p>
-        </p:txBody>
-      </p:sp>
-    </p:spTree>
-  </p:cSld>
-  <p:clrMapOvr>
-    <a:masterClrMapping/>
-  </p:clrMapOvr>
-</p:sld>
-</file>
-
-<file path=ppt/slides/slide14.xml><?xml version="1.0" encoding="utf-8"?>
-<p:sld xmlns:a="http://schemas.openxmlformats.org/drawingml/2006/main" xmlns:r="http://schemas.openxmlformats.org/officeDocument/2006/relationships" xmlns:p="http://schemas.openxmlformats.org/presentationml/2006/main">
-  <p:cSld name="Slide 14">
-    <p:bg>
-      <p:bgPr>
-        <a:solidFill>
-          <a:srgbClr val="F5F9FF"/>
-        </a:solidFill>
-      </p:bgPr>
-    </p:bg>
-    <p:spTree>
-      <p:nvGrpSpPr>
-        <p:cNvPr id="1" name=""/>
-        <p:cNvGrpSpPr/>
-        <p:nvPr/>
-      </p:nvGrpSpPr>
-      <p:grpSpPr>
-        <a:xfrm>
-          <a:off x="0" y="0"/>
-          <a:ext cx="0" cy="0"/>
-          <a:chOff x="0" y="0"/>
-          <a:chExt cx="0" cy="0"/>
-        </a:xfrm>
-      </p:grpSpPr>
-      <p:sp>
-        <p:nvSpPr>
-          <p:cNvPr id="2" name="Shape 0"/>
-          <p:cNvSpPr/>
-          <p:nvPr/>
-        </p:nvSpPr>
-        <p:spPr>
-          <a:xfrm>
-            <a:off x="0" y="0"/>
-            <a:ext cx="9144000" cy="64008"/>
-          </a:xfrm>
-          <a:prstGeom prst="rect">
-            <a:avLst/>
-          </a:prstGeom>
-          <a:solidFill>
-            <a:srgbClr val="0891B2"/>
-          </a:solidFill>
-          <a:ln w="12700">
-            <a:solidFill>
-              <a:srgbClr val="0891B2"/>
-            </a:solidFill>
-            <a:prstDash val="solid"/>
-          </a:ln>
-        </p:spPr>
-      </p:sp>
-      <p:sp>
-        <p:nvSpPr>
-          <p:cNvPr id="3" name="Text 1"/>
-          <p:cNvSpPr/>
-          <p:nvPr/>
-        </p:nvSpPr>
-        <p:spPr>
-          <a:xfrm>
-            <a:off x="457200" y="228600"/>
-            <a:ext cx="8229600" cy="502920"/>
-          </a:xfrm>
-          <a:prstGeom prst="rect">
-            <a:avLst/>
-          </a:prstGeom>
-          <a:noFill/>
-          <a:ln/>
-        </p:spPr>
-        <p:txBody>
-          <a:bodyPr wrap="square" rtlCol="0" anchor="ctr"/>
-          <a:lstStyle/>
-          <a:p>
-            <a:pPr indent="0" marL="0">
-              <a:buNone/>
-            </a:pPr>
-            <a:r>
-              <a:rPr lang="en-US" sz="3200" b="1" dirty="0">
-                <a:solidFill>
-                  <a:srgbClr val="0F172A"/>
-                </a:solidFill>
-                <a:latin typeface="Trebuchet MS" pitchFamily="34" charset="0"/>
-                <a:ea typeface="Trebuchet MS" pitchFamily="34" charset="-122"/>
-                <a:cs typeface="Trebuchet MS" pitchFamily="34" charset="-120"/>
-              </a:rPr>
-              <a:t>Building a Simple Agent</a:t>
-            </a:r>
-            <a:endParaRPr lang="en-US" sz="3200" dirty="0"/>
-          </a:p>
-        </p:txBody>
-      </p:sp>
-      <p:sp>
-        <p:nvSpPr>
-          <p:cNvPr id="4" name="Shape 2"/>
-          <p:cNvSpPr/>
-          <p:nvPr/>
-        </p:nvSpPr>
-        <p:spPr>
-          <a:xfrm>
-            <a:off x="365760" y="1234440"/>
-            <a:ext cx="1554480" cy="685800"/>
-          </a:xfrm>
-          <a:prstGeom prst="rect">
-            <a:avLst/>
-          </a:prstGeom>
-          <a:solidFill>
-            <a:srgbClr val="E8F5E9"/>
-          </a:solidFill>
-          <a:ln w="25400">
-            <a:solidFill>
-              <a:srgbClr val="43A047"/>
-            </a:solidFill>
-            <a:prstDash val="solid"/>
-          </a:ln>
-        </p:spPr>
-      </p:sp>
-      <p:sp>
-        <p:nvSpPr>
-          <p:cNvPr id="5" name="Text 3"/>
-          <p:cNvSpPr/>
-          <p:nvPr/>
-        </p:nvSpPr>
-        <p:spPr>
-          <a:xfrm>
-            <a:off x="365760" y="1234440"/>
-            <a:ext cx="1554480" cy="685800"/>
-          </a:xfrm>
-          <a:prstGeom prst="rect">
-            <a:avLst/>
-          </a:prstGeom>
-          <a:noFill/>
-          <a:ln/>
-        </p:spPr>
-        <p:txBody>
-          <a:bodyPr wrap="square" rtlCol="0" anchor="ctr"/>
-          <a:lstStyle/>
-          <a:p>
-            <a:pPr algn="ctr" indent="0" marL="0">
-              <a:buNone/>
-            </a:pPr>
-            <a:r>
-              <a:rPr lang="en-US" sz="1200" b="1" dirty="0">
-                <a:solidFill>
-                  <a:srgbClr val="2E7D32"/>
-                </a:solidFill>
-                <a:latin typeface="Trebuchet MS" pitchFamily="34" charset="0"/>
-                <a:ea typeface="Trebuchet MS" pitchFamily="34" charset="-122"/>
-                <a:cs typeface="Trebuchet MS" pitchFamily="34" charset="-120"/>
-              </a:rPr>
-              <a:t>User Input</a:t>
-            </a:r>
-            <a:endParaRPr lang="en-US" sz="1200" dirty="0"/>
-          </a:p>
-        </p:txBody>
-      </p:sp>
-      <p:sp>
-        <p:nvSpPr>
-          <p:cNvPr id="6" name="Text 4"/>
-          <p:cNvSpPr/>
-          <p:nvPr/>
-        </p:nvSpPr>
-        <p:spPr>
-          <a:xfrm>
-            <a:off x="1965960" y="1389888"/>
-            <a:ext cx="365760" cy="384048"/>
-          </a:xfrm>
-          <a:prstGeom prst="rect">
-            <a:avLst/>
-          </a:prstGeom>
-          <a:noFill/>
-          <a:ln/>
-        </p:spPr>
-        <p:txBody>
-          <a:bodyPr wrap="square" rtlCol="0" anchor="ctr"/>
-          <a:lstStyle/>
-          <a:p>
-            <a:pPr algn="ctr" indent="0" marL="0">
-              <a:buNone/>
-            </a:pPr>
-            <a:r>
-              <a:rPr lang="en-US" sz="2200" dirty="0">
-                <a:solidFill>
-                  <a:srgbClr val="0891B2"/>
-                </a:solidFill>
-              </a:rPr>
-              <a:t>→</a:t>
-            </a:r>
-            <a:endParaRPr lang="en-US" sz="2200" dirty="0"/>
-          </a:p>
-        </p:txBody>
-      </p:sp>
-      <p:sp>
-        <p:nvSpPr>
-          <p:cNvPr id="7" name="Shape 5"/>
-          <p:cNvSpPr/>
-          <p:nvPr/>
-        </p:nvSpPr>
-        <p:spPr>
-          <a:xfrm>
-            <a:off x="2377440" y="1051560"/>
-            <a:ext cx="2011680" cy="1280160"/>
-          </a:xfrm>
-          <a:prstGeom prst="rect">
-            <a:avLst/>
-          </a:prstGeom>
-          <a:solidFill>
-            <a:srgbClr val="0D1B2A"/>
-          </a:solidFill>
-          <a:ln w="25400">
-            <a:solidFill>
-              <a:srgbClr val="06B6D4"/>
-            </a:solidFill>
-            <a:prstDash val="solid"/>
-          </a:ln>
-        </p:spPr>
-      </p:sp>
-      <p:sp>
-        <p:nvSpPr>
-          <p:cNvPr id="8" name="Text 6"/>
-          <p:cNvSpPr/>
-          <p:nvPr/>
-        </p:nvSpPr>
-        <p:spPr>
-          <a:xfrm>
-            <a:off x="2377440" y="1143000"/>
-            <a:ext cx="2011680" cy="411480"/>
-          </a:xfrm>
-          <a:prstGeom prst="rect">
-            <a:avLst/>
-          </a:prstGeom>
-          <a:noFill/>
-          <a:ln/>
-        </p:spPr>
-        <p:txBody>
-          <a:bodyPr wrap="square" rtlCol="0" anchor="ctr"/>
-          <a:lstStyle/>
-          <a:p>
-            <a:pPr algn="ctr" indent="0" marL="0">
-              <a:buNone/>
-            </a:pPr>
-            <a:r>
-              <a:rPr lang="en-US" sz="2200" b="1" dirty="0">
-                <a:solidFill>
-                  <a:srgbClr val="06B6D4"/>
-                </a:solidFill>
-                <a:latin typeface="Trebuchet MS" pitchFamily="34" charset="0"/>
-                <a:ea typeface="Trebuchet MS" pitchFamily="34" charset="-122"/>
-                <a:cs typeface="Trebuchet MS" pitchFamily="34" charset="-120"/>
-              </a:rPr>
-              <a:t>LLM</a:t>
-            </a:r>
-            <a:endParaRPr lang="en-US" sz="2200" dirty="0"/>
-          </a:p>
-        </p:txBody>
-      </p:sp>
-      <p:sp>
-        <p:nvSpPr>
-          <p:cNvPr id="9" name="Text 7"/>
-          <p:cNvSpPr/>
-          <p:nvPr/>
-        </p:nvSpPr>
-        <p:spPr>
-          <a:xfrm>
-            <a:off x="2377440" y="1572768"/>
-            <a:ext cx="2011680" cy="658368"/>
-          </a:xfrm>
-          <a:prstGeom prst="rect">
-            <a:avLst/>
-          </a:prstGeom>
-          <a:noFill/>
-          <a:ln/>
-        </p:spPr>
-        <p:txBody>
-          <a:bodyPr wrap="square" rtlCol="0" anchor="ctr"/>
-          <a:lstStyle/>
-          <a:p>
-            <a:pPr algn="ctr" indent="0" marL="0">
-              <a:buNone/>
-            </a:pPr>
-            <a:r>
-              <a:rPr lang="en-US" sz="1000" dirty="0">
-                <a:solidFill>
-                  <a:srgbClr val="94A3B8"/>
-                </a:solidFill>
-                <a:latin typeface="Calibri" pitchFamily="34" charset="0"/>
-                <a:ea typeface="Calibri" pitchFamily="34" charset="-122"/>
-                <a:cs typeface="Calibri" pitchFamily="34" charset="-120"/>
-              </a:rPr>
-              <a:t>Prompt + History</a:t>
-            </a:r>
-            <a:endParaRPr lang="en-US" sz="1000" dirty="0"/>
-          </a:p>
-          <a:p>
-            <a:pPr algn="ctr" indent="0" marL="0">
-              <a:buNone/>
-            </a:pPr>
-            <a:r>
-              <a:rPr lang="en-US" sz="1000" dirty="0">
-                <a:solidFill>
-                  <a:srgbClr val="94A3B8"/>
-                </a:solidFill>
-                <a:latin typeface="Calibri" pitchFamily="34" charset="0"/>
-                <a:ea typeface="Calibri" pitchFamily="34" charset="-122"/>
-                <a:cs typeface="Calibri" pitchFamily="34" charset="-120"/>
-              </a:rPr>
-              <a:t>+ Tools</a:t>
-            </a:r>
-            <a:endParaRPr lang="en-US" sz="1000" dirty="0"/>
-          </a:p>
-        </p:txBody>
-      </p:sp>
-      <p:sp>
-        <p:nvSpPr>
-          <p:cNvPr id="10" name="Text 8"/>
-          <p:cNvSpPr/>
-          <p:nvPr/>
-        </p:nvSpPr>
-        <p:spPr>
-          <a:xfrm>
-            <a:off x="4425696" y="1389888"/>
-            <a:ext cx="365760" cy="384048"/>
-          </a:xfrm>
-          <a:prstGeom prst="rect">
-            <a:avLst/>
-          </a:prstGeom>
-          <a:noFill/>
-          <a:ln/>
-        </p:spPr>
-        <p:txBody>
-          <a:bodyPr wrap="square" rtlCol="0" anchor="ctr"/>
-          <a:lstStyle/>
-          <a:p>
-            <a:pPr algn="ctr" indent="0" marL="0">
-              <a:buNone/>
-            </a:pPr>
-            <a:r>
-              <a:rPr lang="en-US" sz="2200" dirty="0">
-                <a:solidFill>
-                  <a:srgbClr val="0891B2"/>
-                </a:solidFill>
-              </a:rPr>
-              <a:t>→</a:t>
-            </a:r>
-            <a:endParaRPr lang="en-US" sz="2200" dirty="0"/>
-          </a:p>
-        </p:txBody>
-      </p:sp>
-      <p:sp>
-        <p:nvSpPr>
-          <p:cNvPr id="11" name="Shape 9"/>
-          <p:cNvSpPr/>
-          <p:nvPr/>
-        </p:nvSpPr>
-        <p:spPr>
-          <a:xfrm>
-            <a:off x="4828032" y="1234440"/>
-            <a:ext cx="1691640" cy="804672"/>
-          </a:xfrm>
-          <a:prstGeom prst="rect">
-            <a:avLst/>
-          </a:prstGeom>
-          <a:solidFill>
-            <a:srgbClr val="FFF8E1"/>
-          </a:solidFill>
-          <a:ln w="25400">
-            <a:solidFill>
-              <a:srgbClr val="FFB300"/>
-            </a:solidFill>
-            <a:prstDash val="solid"/>
-          </a:ln>
-        </p:spPr>
-      </p:sp>
-      <p:sp>
-        <p:nvSpPr>
-          <p:cNvPr id="12" name="Text 10"/>
-          <p:cNvSpPr/>
-          <p:nvPr/>
-        </p:nvSpPr>
-        <p:spPr>
-          <a:xfrm>
-            <a:off x="4828032" y="1234440"/>
-            <a:ext cx="1691640" cy="804672"/>
-          </a:xfrm>
-          <a:prstGeom prst="rect">
-            <a:avLst/>
-          </a:prstGeom>
-          <a:noFill/>
-          <a:ln/>
-        </p:spPr>
-        <p:txBody>
-          <a:bodyPr wrap="square" rtlCol="0" anchor="ctr"/>
-          <a:lstStyle/>
-          <a:p>
-            <a:pPr algn="ctr" indent="0" marL="0">
-              <a:buNone/>
-            </a:pPr>
-            <a:r>
-              <a:rPr lang="en-US" sz="1150" b="1" dirty="0">
-                <a:solidFill>
-                  <a:srgbClr val="E65100"/>
-                </a:solidFill>
-                <a:latin typeface="Trebuchet MS" pitchFamily="34" charset="0"/>
-                <a:ea typeface="Trebuchet MS" pitchFamily="34" charset="-122"/>
-                <a:cs typeface="Trebuchet MS" pitchFamily="34" charset="-120"/>
-              </a:rPr>
-              <a:t>Tool call</a:t>
-            </a:r>
-            <a:endParaRPr lang="en-US" sz="1150" dirty="0"/>
-          </a:p>
-          <a:p>
-            <a:pPr algn="ctr" indent="0" marL="0">
-              <a:buNone/>
-            </a:pPr>
-            <a:r>
-              <a:rPr lang="en-US" sz="1150" b="1" dirty="0">
-                <a:solidFill>
-                  <a:srgbClr val="E65100"/>
-                </a:solidFill>
-                <a:latin typeface="Trebuchet MS" pitchFamily="34" charset="0"/>
-                <a:ea typeface="Trebuchet MS" pitchFamily="34" charset="-122"/>
-                <a:cs typeface="Trebuchet MS" pitchFamily="34" charset="-120"/>
-              </a:rPr>
-              <a:t>needed?</a:t>
-            </a:r>
-            <a:endParaRPr lang="en-US" sz="1150" dirty="0"/>
-          </a:p>
-        </p:txBody>
-      </p:sp>
-      <p:sp>
-        <p:nvSpPr>
-          <p:cNvPr id="13" name="Text 11"/>
-          <p:cNvSpPr/>
-          <p:nvPr/>
-        </p:nvSpPr>
-        <p:spPr>
-          <a:xfrm>
-            <a:off x="6556248" y="1325880"/>
-            <a:ext cx="640080" cy="320040"/>
-          </a:xfrm>
-          <a:prstGeom prst="rect">
-            <a:avLst/>
-          </a:prstGeom>
-          <a:noFill/>
-          <a:ln/>
-        </p:spPr>
-        <p:txBody>
-          <a:bodyPr wrap="square" rtlCol="0" anchor="ctr"/>
-          <a:lstStyle/>
-          <a:p>
-            <a:pPr indent="0" marL="0">
-              <a:buNone/>
-            </a:pPr>
-            <a:r>
-              <a:rPr lang="en-US" sz="1100" dirty="0">
-                <a:solidFill>
-                  <a:srgbClr val="1E88E5"/>
-                </a:solidFill>
-                <a:latin typeface="Calibri" pitchFamily="34" charset="0"/>
-                <a:ea typeface="Calibri" pitchFamily="34" charset="-122"/>
-                <a:cs typeface="Calibri" pitchFamily="34" charset="-120"/>
-              </a:rPr>
-              <a:t>YES →</a:t>
-            </a:r>
-            <a:endParaRPr lang="en-US" sz="1100" dirty="0"/>
-          </a:p>
-        </p:txBody>
-      </p:sp>
-      <p:sp>
-        <p:nvSpPr>
-          <p:cNvPr id="14" name="Shape 12"/>
-          <p:cNvSpPr/>
-          <p:nvPr/>
-        </p:nvSpPr>
-        <p:spPr>
-          <a:xfrm>
-            <a:off x="7205472" y="1051560"/>
-            <a:ext cx="1737360" cy="1143000"/>
-          </a:xfrm>
-          <a:prstGeom prst="rect">
-            <a:avLst/>
-          </a:prstGeom>
-          <a:solidFill>
-            <a:srgbClr val="E3F2FD"/>
-          </a:solidFill>
-          <a:ln w="25400">
-            <a:solidFill>
-              <a:srgbClr val="1E88E5"/>
-            </a:solidFill>
-            <a:prstDash val="solid"/>
-          </a:ln>
-        </p:spPr>
-      </p:sp>
-      <p:sp>
-        <p:nvSpPr>
-          <p:cNvPr id="15" name="Text 13"/>
-          <p:cNvSpPr/>
-          <p:nvPr/>
-        </p:nvSpPr>
-        <p:spPr>
-          <a:xfrm>
-            <a:off x="7205472" y="1143000"/>
-            <a:ext cx="1737360" cy="457200"/>
-          </a:xfrm>
-          <a:prstGeom prst="rect">
-            <a:avLst/>
-          </a:prstGeom>
-          <a:noFill/>
-          <a:ln/>
-        </p:spPr>
-        <p:txBody>
-          <a:bodyPr wrap="square" rtlCol="0" anchor="ctr"/>
-          <a:lstStyle/>
-          <a:p>
-            <a:pPr algn="ctr" indent="0" marL="0">
-              <a:buNone/>
-            </a:pPr>
-            <a:r>
-              <a:rPr lang="en-US" sz="1300" b="1" dirty="0">
-                <a:solidFill>
-                  <a:srgbClr val="1565C0"/>
-                </a:solidFill>
-                <a:latin typeface="Trebuchet MS" pitchFamily="34" charset="0"/>
-                <a:ea typeface="Trebuchet MS" pitchFamily="34" charset="-122"/>
-                <a:cs typeface="Trebuchet MS" pitchFamily="34" charset="-120"/>
-              </a:rPr>
-              <a:t>Execute</a:t>
-            </a:r>
-            <a:endParaRPr lang="en-US" sz="1300" dirty="0"/>
-          </a:p>
-          <a:p>
-            <a:pPr algn="ctr" indent="0" marL="0">
-              <a:buNone/>
-            </a:pPr>
-            <a:r>
-              <a:rPr lang="en-US" sz="1300" b="1" dirty="0">
-                <a:solidFill>
-                  <a:srgbClr val="1565C0"/>
-                </a:solidFill>
-                <a:latin typeface="Trebuchet MS" pitchFamily="34" charset="0"/>
-                <a:ea typeface="Trebuchet MS" pitchFamily="34" charset="-122"/>
-                <a:cs typeface="Trebuchet MS" pitchFamily="34" charset="-120"/>
-              </a:rPr>
-              <a:t>Tool(s)</a:t>
-            </a:r>
-            <a:endParaRPr lang="en-US" sz="1300" dirty="0"/>
-          </a:p>
-        </p:txBody>
-      </p:sp>
-      <p:sp>
-        <p:nvSpPr>
-          <p:cNvPr id="16" name="Text 14"/>
-          <p:cNvSpPr/>
-          <p:nvPr/>
-        </p:nvSpPr>
-        <p:spPr>
-          <a:xfrm>
-            <a:off x="7205472" y="1618488"/>
-            <a:ext cx="1737360" cy="457200"/>
-          </a:xfrm>
-          <a:prstGeom prst="rect">
-            <a:avLst/>
-          </a:prstGeom>
-          <a:noFill/>
-          <a:ln/>
-        </p:spPr>
-        <p:txBody>
-          <a:bodyPr wrap="square" rtlCol="0" anchor="ctr"/>
-          <a:lstStyle/>
-          <a:p>
-            <a:pPr algn="ctr" indent="0" marL="0">
-              <a:buNone/>
-            </a:pPr>
-            <a:r>
-              <a:rPr lang="en-US" sz="1000" dirty="0">
-                <a:solidFill>
-                  <a:srgbClr val="334155"/>
-                </a:solidFill>
-                <a:latin typeface="Calibri" pitchFamily="34" charset="0"/>
-                <a:ea typeface="Calibri" pitchFamily="34" charset="-122"/>
-                <a:cs typeface="Calibri" pitchFamily="34" charset="-120"/>
-              </a:rPr>
-              <a:t>Run function</a:t>
-            </a:r>
-            <a:endParaRPr lang="en-US" sz="1000" dirty="0"/>
-          </a:p>
-          <a:p>
-            <a:pPr algn="ctr" indent="0" marL="0">
-              <a:buNone/>
-            </a:pPr>
-            <a:r>
-              <a:rPr lang="en-US" sz="1000" dirty="0">
-                <a:solidFill>
-                  <a:srgbClr val="334155"/>
-                </a:solidFill>
-                <a:latin typeface="Calibri" pitchFamily="34" charset="0"/>
-                <a:ea typeface="Calibri" pitchFamily="34" charset="-122"/>
-                <a:cs typeface="Calibri" pitchFamily="34" charset="-120"/>
-              </a:rPr>
-              <a:t>Append result</a:t>
-            </a:r>
-            <a:endParaRPr lang="en-US" sz="1000" dirty="0"/>
-          </a:p>
-        </p:txBody>
-      </p:sp>
-      <p:sp>
-        <p:nvSpPr>
-          <p:cNvPr id="17" name="Shape 15"/>
-          <p:cNvSpPr/>
-          <p:nvPr/>
-        </p:nvSpPr>
-        <p:spPr>
-          <a:xfrm>
-            <a:off x="8074152" y="914400"/>
-            <a:ext cx="9144" cy="137160"/>
-          </a:xfrm>
-          <a:prstGeom prst="rect">
-            <a:avLst/>
-          </a:prstGeom>
-          <a:solidFill>
-            <a:srgbClr val="64748B"/>
-          </a:solidFill>
-          <a:ln w="15240">
-            <a:solidFill>
-              <a:srgbClr val="64748B"/>
-            </a:solidFill>
-            <a:prstDash val="dash"/>
-          </a:ln>
-        </p:spPr>
-      </p:sp>
-      <p:sp>
-        <p:nvSpPr>
-          <p:cNvPr id="18" name="Shape 16"/>
-          <p:cNvSpPr/>
-          <p:nvPr/>
-        </p:nvSpPr>
-        <p:spPr>
-          <a:xfrm>
-            <a:off x="3383280" y="914400"/>
-            <a:ext cx="4700016" cy="9144"/>
-          </a:xfrm>
-          <a:prstGeom prst="rect">
-            <a:avLst/>
-          </a:prstGeom>
-          <a:solidFill>
-            <a:srgbClr val="64748B"/>
-          </a:solidFill>
-          <a:ln w="15240">
-            <a:solidFill>
-              <a:srgbClr val="64748B"/>
-            </a:solidFill>
-            <a:prstDash val="dash"/>
-          </a:ln>
-        </p:spPr>
-      </p:sp>
-      <p:sp>
-        <p:nvSpPr>
-          <p:cNvPr id="19" name="Shape 17"/>
-          <p:cNvSpPr/>
-          <p:nvPr/>
-        </p:nvSpPr>
-        <p:spPr>
-          <a:xfrm>
-            <a:off x="3383280" y="914400"/>
-            <a:ext cx="9144" cy="137160"/>
-          </a:xfrm>
-          <a:prstGeom prst="rect">
-            <a:avLst/>
-          </a:prstGeom>
-          <a:solidFill>
-            <a:srgbClr val="64748B"/>
-          </a:solidFill>
-          <a:ln w="15240">
-            <a:solidFill>
-              <a:srgbClr val="64748B"/>
-            </a:solidFill>
-            <a:prstDash val="dash"/>
-          </a:ln>
-        </p:spPr>
-      </p:sp>
-      <p:sp>
-        <p:nvSpPr>
-          <p:cNvPr id="20" name="Text 18"/>
-          <p:cNvSpPr/>
-          <p:nvPr/>
-        </p:nvSpPr>
-        <p:spPr>
-          <a:xfrm>
-            <a:off x="4114800" y="768096"/>
-            <a:ext cx="3291840" cy="201168"/>
-          </a:xfrm>
-          <a:prstGeom prst="rect">
-            <a:avLst/>
-          </a:prstGeom>
-          <a:noFill/>
-          <a:ln/>
-        </p:spPr>
-        <p:txBody>
-          <a:bodyPr wrap="square" rtlCol="0" anchor="ctr"/>
-          <a:lstStyle/>
-          <a:p>
-            <a:pPr indent="0" marL="0">
-              <a:buNone/>
-            </a:pPr>
-            <a:r>
-              <a:rPr lang="en-US" sz="900" dirty="0">
-                <a:solidFill>
-                  <a:srgbClr val="64748B"/>
-                </a:solidFill>
-                <a:latin typeface="Calibri italic" pitchFamily="34" charset="0"/>
-                <a:ea typeface="Calibri italic" pitchFamily="34" charset="-122"/>
-                <a:cs typeface="Calibri italic" pitchFamily="34" charset="-120"/>
-              </a:rPr>
-              <a:t>← tool result loops back to LLM</a:t>
-            </a:r>
-            <a:endParaRPr lang="en-US" sz="900" dirty="0"/>
-          </a:p>
-        </p:txBody>
-      </p:sp>
-      <p:sp>
-        <p:nvSpPr>
-          <p:cNvPr id="21" name="Text 19"/>
-          <p:cNvSpPr/>
-          <p:nvPr/>
-        </p:nvSpPr>
-        <p:spPr>
-          <a:xfrm>
-            <a:off x="5623560" y="2066544"/>
-            <a:ext cx="731520" cy="274320"/>
-          </a:xfrm>
-          <a:prstGeom prst="rect">
-            <a:avLst/>
-          </a:prstGeom>
-          <a:noFill/>
-          <a:ln/>
-        </p:spPr>
-        <p:txBody>
-          <a:bodyPr wrap="square" rtlCol="0" anchor="ctr"/>
-          <a:lstStyle/>
-          <a:p>
-            <a:pPr indent="0" marL="0">
-              <a:buNone/>
-            </a:pPr>
-            <a:r>
-              <a:rPr lang="en-US" sz="1100" dirty="0">
-                <a:solidFill>
-                  <a:srgbClr val="43A047"/>
-                </a:solidFill>
-                <a:latin typeface="Calibri" pitchFamily="34" charset="0"/>
-                <a:ea typeface="Calibri" pitchFamily="34" charset="-122"/>
-                <a:cs typeface="Calibri" pitchFamily="34" charset="-120"/>
-              </a:rPr>
-              <a:t>↓ NO</a:t>
-            </a:r>
-            <a:endParaRPr lang="en-US" sz="1100" dirty="0"/>
-          </a:p>
-        </p:txBody>
-      </p:sp>
-      <p:sp>
-        <p:nvSpPr>
-          <p:cNvPr id="22" name="Shape 20"/>
-          <p:cNvSpPr/>
-          <p:nvPr/>
-        </p:nvSpPr>
-        <p:spPr>
-          <a:xfrm>
-            <a:off x="4828032" y="2377440"/>
-            <a:ext cx="1691640" cy="658368"/>
-          </a:xfrm>
-          <a:prstGeom prst="rect">
-            <a:avLst/>
-          </a:prstGeom>
-          <a:solidFill>
-            <a:srgbClr val="E8F5E9"/>
-          </a:solidFill>
-          <a:ln w="25400">
-            <a:solidFill>
-              <a:srgbClr val="43A047"/>
-            </a:solidFill>
-            <a:prstDash val="solid"/>
-          </a:ln>
-        </p:spPr>
-      </p:sp>
-      <p:sp>
-        <p:nvSpPr>
-          <p:cNvPr id="23" name="Text 21"/>
-          <p:cNvSpPr/>
-          <p:nvPr/>
-        </p:nvSpPr>
-        <p:spPr>
-          <a:xfrm>
-            <a:off x="4828032" y="2377440"/>
-            <a:ext cx="1691640" cy="658368"/>
-          </a:xfrm>
-          <a:prstGeom prst="rect">
-            <a:avLst/>
-          </a:prstGeom>
-          <a:noFill/>
-          <a:ln/>
-        </p:spPr>
-        <p:txBody>
-          <a:bodyPr wrap="square" rtlCol="0" anchor="ctr"/>
-          <a:lstStyle/>
-          <a:p>
-            <a:pPr algn="ctr" indent="0" marL="0">
-              <a:buNone/>
-            </a:pPr>
-            <a:r>
-              <a:rPr lang="en-US" sz="1300" b="1" dirty="0">
-                <a:solidFill>
-                  <a:srgbClr val="2E7D32"/>
-                </a:solidFill>
-                <a:latin typeface="Trebuchet MS" pitchFamily="34" charset="0"/>
-                <a:ea typeface="Trebuchet MS" pitchFamily="34" charset="-122"/>
-                <a:cs typeface="Trebuchet MS" pitchFamily="34" charset="-120"/>
-              </a:rPr>
-              <a:t>Final Answer</a:t>
-            </a:r>
-            <a:endParaRPr lang="en-US" sz="1300" dirty="0"/>
-          </a:p>
-        </p:txBody>
-      </p:sp>
-      <p:sp>
-        <p:nvSpPr>
-          <p:cNvPr id="24" name="Shape 22"/>
-          <p:cNvSpPr/>
-          <p:nvPr/>
-        </p:nvSpPr>
-        <p:spPr>
-          <a:xfrm>
-            <a:off x="365760" y="3246120"/>
-            <a:ext cx="8412480" cy="1572768"/>
-          </a:xfrm>
-          <a:prstGeom prst="rect">
-            <a:avLst/>
-          </a:prstGeom>
-          <a:solidFill>
-            <a:srgbClr val="0F172A"/>
-          </a:solidFill>
-          <a:ln w="12700">
-            <a:solidFill>
-              <a:srgbClr val="334155"/>
-            </a:solidFill>
-            <a:prstDash val="solid"/>
-          </a:ln>
-        </p:spPr>
-      </p:sp>
-      <p:sp>
-        <p:nvSpPr>
-          <p:cNvPr id="25" name="Text 23"/>
-          <p:cNvSpPr/>
-          <p:nvPr/>
-        </p:nvSpPr>
-        <p:spPr>
-          <a:xfrm>
-            <a:off x="502920" y="3273552"/>
-            <a:ext cx="4572000" cy="219456"/>
-          </a:xfrm>
-          <a:prstGeom prst="rect">
-            <a:avLst/>
-          </a:prstGeom>
-          <a:noFill/>
-          <a:ln/>
-        </p:spPr>
-        <p:txBody>
-          <a:bodyPr wrap="square" rtlCol="0" anchor="ctr"/>
-          <a:lstStyle/>
-          <a:p>
-            <a:pPr indent="0" marL="0">
-              <a:buNone/>
-            </a:pPr>
-            <a:r>
-              <a:rPr lang="en-US" sz="900" dirty="0">
-                <a:solidFill>
-                  <a:srgbClr val="64748B"/>
-                </a:solidFill>
-                <a:latin typeface="Consolas" pitchFamily="34" charset="0"/>
-                <a:ea typeface="Consolas" pitchFamily="34" charset="-122"/>
-                <a:cs typeface="Consolas" pitchFamily="34" charset="-120"/>
-              </a:rPr>
-              <a:t>Agent loop (simplified Python)</a:t>
-            </a:r>
-            <a:endParaRPr lang="en-US" sz="900" dirty="0"/>
-          </a:p>
-        </p:txBody>
-      </p:sp>
-      <p:sp>
-        <p:nvSpPr>
-          <p:cNvPr id="26" name="Text 24"/>
-          <p:cNvSpPr/>
-          <p:nvPr/>
-        </p:nvSpPr>
-        <p:spPr>
-          <a:xfrm>
-            <a:off x="502920" y="3529584"/>
-            <a:ext cx="8046720" cy="1234440"/>
-          </a:xfrm>
-          <a:prstGeom prst="rect">
-            <a:avLst/>
-          </a:prstGeom>
-          <a:noFill/>
-          <a:ln/>
-        </p:spPr>
-        <p:txBody>
-          <a:bodyPr wrap="square" rtlCol="0" anchor="ctr"/>
-          <a:lstStyle/>
-          <a:p>
-            <a:pPr indent="0" marL="0">
-              <a:buNone/>
-            </a:pPr>
-            <a:r>
-              <a:rPr lang="en-US" sz="1080" b="1" dirty="0">
-                <a:solidFill>
-                  <a:srgbClr val="93C5FD"/>
-                </a:solidFill>
-                <a:latin typeface="Consolas" pitchFamily="34" charset="0"/>
-                <a:ea typeface="Consolas" pitchFamily="34" charset="-122"/>
-                <a:cs typeface="Consolas" pitchFamily="34" charset="-120"/>
-              </a:rPr>
-              <a:t>while</a:t>
-            </a:r>
-            <a:pPr indent="0" marL="0">
-              <a:buNone/>
-            </a:pPr>
-            <a:r>
-              <a:rPr lang="en-US" sz="1080" dirty="0">
-                <a:solidFill>
-                  <a:srgbClr val="E2E8F0"/>
-                </a:solidFill>
-                <a:latin typeface="Consolas" pitchFamily="34" charset="0"/>
-                <a:ea typeface="Consolas" pitchFamily="34" charset="-122"/>
-                <a:cs typeface="Consolas" pitchFamily="34" charset="-120"/>
-              </a:rPr>
-              <a:t> iterations &lt; max_iterations:
-</a:t>
-            </a:r>
-            <a:pPr indent="0" marL="0">
-              <a:buNone/>
-            </a:pPr>
-            <a:r>
-              <a:rPr lang="en-US" sz="1080" dirty="0">
-                <a:solidFill>
-                  <a:srgbClr val="E2E8F0"/>
-                </a:solidFill>
-                <a:latin typeface="Consolas" pitchFamily="34" charset="0"/>
-                <a:ea typeface="Consolas" pitchFamily="34" charset="-122"/>
-                <a:cs typeface="Consolas" pitchFamily="34" charset="-120"/>
-              </a:rPr>
-              <a:t>    response = llm.call(messages, tools)
-</a:t>
-            </a:r>
-            <a:pPr indent="0" marL="0">
-              <a:buNone/>
-            </a:pPr>
-            <a:r>
-              <a:rPr lang="en-US" sz="1080" b="1" dirty="0">
-                <a:solidFill>
-                  <a:srgbClr val="93C5FD"/>
-                </a:solidFill>
-                <a:latin typeface="Consolas" pitchFamily="34" charset="0"/>
-                <a:ea typeface="Consolas" pitchFamily="34" charset="-122"/>
-                <a:cs typeface="Consolas" pitchFamily="34" charset="-120"/>
-              </a:rPr>
-              <a:t>    if</a:t>
-            </a:r>
-            <a:pPr indent="0" marL="0">
-              <a:buNone/>
-            </a:pPr>
-            <a:r>
-              <a:rPr lang="en-US" sz="1080" dirty="0">
-                <a:solidFill>
-                  <a:srgbClr val="E2E8F0"/>
-                </a:solidFill>
-                <a:latin typeface="Consolas" pitchFamily="34" charset="0"/>
-                <a:ea typeface="Consolas" pitchFamily="34" charset="-122"/>
-                <a:cs typeface="Consolas" pitchFamily="34" charset="-120"/>
-              </a:rPr>
-              <a:t> response.stop_reason == </a:t>
-            </a:r>
-            <a:pPr indent="0" marL="0">
-              <a:buNone/>
-            </a:pPr>
-            <a:r>
-              <a:rPr lang="en-US" sz="1080" dirty="0">
-                <a:solidFill>
-                  <a:srgbClr val="FCA5A5"/>
-                </a:solidFill>
-                <a:latin typeface="Consolas" pitchFamily="34" charset="0"/>
-                <a:ea typeface="Consolas" pitchFamily="34" charset="-122"/>
-                <a:cs typeface="Consolas" pitchFamily="34" charset="-120"/>
-              </a:rPr>
-              <a:t>"end_turn"</a:t>
-            </a:r>
-            <a:pPr indent="0" marL="0">
-              <a:buNone/>
-            </a:pPr>
-            <a:r>
-              <a:rPr lang="en-US" sz="1080" dirty="0">
-                <a:solidFill>
-                  <a:srgbClr val="E2E8F0"/>
-                </a:solidFill>
-                <a:latin typeface="Consolas" pitchFamily="34" charset="0"/>
-                <a:ea typeface="Consolas" pitchFamily="34" charset="-122"/>
-                <a:cs typeface="Consolas" pitchFamily="34" charset="-120"/>
-              </a:rPr>
-              <a:t>:  </a:t>
-            </a:r>
-            <a:pPr indent="0" marL="0">
-              <a:buNone/>
-            </a:pPr>
-            <a:r>
-              <a:rPr lang="en-US" sz="1080" dirty="0">
-                <a:solidFill>
-                  <a:srgbClr val="64748B"/>
-                </a:solidFill>
-                <a:latin typeface="Consolas" pitchFamily="34" charset="0"/>
-                <a:ea typeface="Consolas" pitchFamily="34" charset="-122"/>
-                <a:cs typeface="Consolas" pitchFamily="34" charset="-120"/>
-              </a:rPr>
-              <a:t>break  # done!
-</a:t>
-            </a:r>
-            <a:pPr indent="0" marL="0">
-              <a:buNone/>
-            </a:pPr>
-            <a:r>
-              <a:rPr lang="en-US" sz="1080" b="1" dirty="0">
-                <a:solidFill>
-                  <a:srgbClr val="93C5FD"/>
-                </a:solidFill>
-                <a:latin typeface="Consolas" pitchFamily="34" charset="0"/>
-                <a:ea typeface="Consolas" pitchFamily="34" charset="-122"/>
-                <a:cs typeface="Consolas" pitchFamily="34" charset="-120"/>
-              </a:rPr>
-              <a:t>    for</a:t>
-            </a:r>
-            <a:pPr indent="0" marL="0">
-              <a:buNone/>
-            </a:pPr>
-            <a:r>
-              <a:rPr lang="en-US" sz="1080" dirty="0">
-                <a:solidFill>
-                  <a:srgbClr val="E2E8F0"/>
-                </a:solidFill>
-                <a:latin typeface="Consolas" pitchFamily="34" charset="0"/>
-                <a:ea typeface="Consolas" pitchFamily="34" charset="-122"/>
-                <a:cs typeface="Consolas" pitchFamily="34" charset="-120"/>
-              </a:rPr>
-              <a:t> tool_call </a:t>
-            </a:r>
-            <a:pPr indent="0" marL="0">
-              <a:buNone/>
-            </a:pPr>
-            <a:r>
-              <a:rPr lang="en-US" sz="1080" b="1" dirty="0">
-                <a:solidFill>
-                  <a:srgbClr val="93C5FD"/>
-                </a:solidFill>
-                <a:latin typeface="Consolas" pitchFamily="34" charset="0"/>
-                <a:ea typeface="Consolas" pitchFamily="34" charset="-122"/>
-                <a:cs typeface="Consolas" pitchFamily="34" charset="-120"/>
-              </a:rPr>
-              <a:t>in</a:t>
-            </a:r>
-            <a:pPr indent="0" marL="0">
-              <a:buNone/>
-            </a:pPr>
-            <a:r>
-              <a:rPr lang="en-US" sz="1080" dirty="0">
-                <a:solidFill>
-                  <a:srgbClr val="E2E8F0"/>
-                </a:solidFill>
-                <a:latin typeface="Consolas" pitchFamily="34" charset="0"/>
-                <a:ea typeface="Consolas" pitchFamily="34" charset="-122"/>
-                <a:cs typeface="Consolas" pitchFamily="34" charset="-120"/>
-              </a:rPr>
-              <a:t> response.tool_calls:
-</a:t>
-            </a:r>
-            <a:pPr indent="0" marL="0">
-              <a:buNone/>
-            </a:pPr>
-            <a:r>
-              <a:rPr lang="en-US" sz="1080" dirty="0">
-                <a:solidFill>
-                  <a:srgbClr val="E2E8F0"/>
-                </a:solidFill>
-                <a:latin typeface="Consolas" pitchFamily="34" charset="0"/>
-                <a:ea typeface="Consolas" pitchFamily="34" charset="-122"/>
-                <a:cs typeface="Consolas" pitchFamily="34" charset="-120"/>
-              </a:rPr>
-              <a:t>        result = execute_tool(tool_call)  # YOUR code runs
-</a:t>
-            </a:r>
-            <a:pPr indent="0" marL="0">
-              <a:buNone/>
-            </a:pPr>
-            <a:r>
-              <a:rPr lang="en-US" sz="1080" dirty="0">
-                <a:solidFill>
-                  <a:srgbClr val="E2E8F0"/>
-                </a:solidFill>
-                <a:latin typeface="Consolas" pitchFamily="34" charset="0"/>
-                <a:ea typeface="Consolas" pitchFamily="34" charset="-122"/>
-                <a:cs typeface="Consolas" pitchFamily="34" charset="-120"/>
-              </a:rPr>
-              <a:t>        messages.append(tool_result(tool_call.id, result))</a:t>
-            </a:r>
-            <a:endParaRPr lang="en-US" sz="1080" dirty="0"/>
           </a:p>
         </p:txBody>
       </p:sp>
@@ -10431,1752 +10366,6 @@
 
 <file path=ppt/slides/slide17.xml><?xml version="1.0" encoding="utf-8"?>
 <p:sld xmlns:a="http://schemas.openxmlformats.org/drawingml/2006/main" xmlns:r="http://schemas.openxmlformats.org/officeDocument/2006/relationships" xmlns:p="http://schemas.openxmlformats.org/presentationml/2006/main">
-  <p:cSld name="Slide 17">
-    <p:bg>
-      <p:bgPr>
-        <a:solidFill>
-          <a:srgbClr val="F5F9FF"/>
-        </a:solidFill>
-      </p:bgPr>
-    </p:bg>
-    <p:spTree>
-      <p:nvGrpSpPr>
-        <p:cNvPr id="1" name=""/>
-        <p:cNvGrpSpPr/>
-        <p:nvPr/>
-      </p:nvGrpSpPr>
-      <p:grpSpPr>
-        <a:xfrm>
-          <a:off x="0" y="0"/>
-          <a:ext cx="0" cy="0"/>
-          <a:chOff x="0" y="0"/>
-          <a:chExt cx="0" cy="0"/>
-        </a:xfrm>
-      </p:grpSpPr>
-      <p:sp>
-        <p:nvSpPr>
-          <p:cNvPr id="2" name="Shape 0"/>
-          <p:cNvSpPr/>
-          <p:nvPr/>
-        </p:nvSpPr>
-        <p:spPr>
-          <a:xfrm>
-            <a:off x="0" y="0"/>
-            <a:ext cx="9144000" cy="64008"/>
-          </a:xfrm>
-          <a:prstGeom prst="rect">
-            <a:avLst/>
-          </a:prstGeom>
-          <a:solidFill>
-            <a:srgbClr val="0891B2"/>
-          </a:solidFill>
-          <a:ln w="12700">
-            <a:solidFill>
-              <a:srgbClr val="0891B2"/>
-            </a:solidFill>
-            <a:prstDash val="solid"/>
-          </a:ln>
-        </p:spPr>
-      </p:sp>
-      <p:sp>
-        <p:nvSpPr>
-          <p:cNvPr id="3" name="Text 1"/>
-          <p:cNvSpPr/>
-          <p:nvPr/>
-        </p:nvSpPr>
-        <p:spPr>
-          <a:xfrm>
-            <a:off x="457200" y="201168"/>
-            <a:ext cx="6858000" cy="502920"/>
-          </a:xfrm>
-          <a:prstGeom prst="rect">
-            <a:avLst/>
-          </a:prstGeom>
-          <a:noFill/>
-          <a:ln/>
-        </p:spPr>
-        <p:txBody>
-          <a:bodyPr wrap="square" rtlCol="0" anchor="ctr"/>
-          <a:lstStyle/>
-          <a:p>
-            <a:pPr indent="0" marL="0">
-              <a:buNone/>
-            </a:pPr>
-            <a:r>
-              <a:rPr lang="en-US" sz="2600" b="1" dirty="0">
-                <a:solidFill>
-                  <a:srgbClr val="0F172A"/>
-                </a:solidFill>
-                <a:latin typeface="Trebuchet MS" pitchFamily="34" charset="0"/>
-                <a:ea typeface="Trebuchet MS" pitchFamily="34" charset="-122"/>
-                <a:cs typeface="Trebuchet MS" pitchFamily="34" charset="-120"/>
-              </a:rPr>
-              <a:t>LiteLLM  —  Our Model Gateway</a:t>
-            </a:r>
-            <a:endParaRPr lang="en-US" sz="2600" dirty="0"/>
-          </a:p>
-        </p:txBody>
-      </p:sp>
-      <p:sp>
-        <p:nvSpPr>
-          <p:cNvPr id="4" name="Shape 2"/>
-          <p:cNvSpPr/>
-          <p:nvPr/>
-        </p:nvSpPr>
-        <p:spPr>
-          <a:xfrm>
-            <a:off x="7452360" y="246888"/>
-            <a:ext cx="1417320" cy="347472"/>
-          </a:xfrm>
-          <a:prstGeom prst="rect">
-            <a:avLst/>
-          </a:prstGeom>
-          <a:solidFill>
-            <a:srgbClr val="0891B2"/>
-          </a:solidFill>
-          <a:ln w="12700">
-            <a:solidFill>
-              <a:srgbClr val="0891B2"/>
-            </a:solidFill>
-            <a:prstDash val="solid"/>
-          </a:ln>
-        </p:spPr>
-      </p:sp>
-      <p:sp>
-        <p:nvSpPr>
-          <p:cNvPr id="5" name="Text 3"/>
-          <p:cNvSpPr/>
-          <p:nvPr/>
-        </p:nvSpPr>
-        <p:spPr>
-          <a:xfrm>
-            <a:off x="7452360" y="246888"/>
-            <a:ext cx="1417320" cy="347472"/>
-          </a:xfrm>
-          <a:prstGeom prst="rect">
-            <a:avLst/>
-          </a:prstGeom>
-          <a:noFill/>
-          <a:ln/>
-        </p:spPr>
-        <p:txBody>
-          <a:bodyPr wrap="square" rtlCol="0" anchor="ctr"/>
-          <a:lstStyle/>
-          <a:p>
-            <a:pPr algn="ctr" indent="0" marL="0">
-              <a:buNone/>
-            </a:pPr>
-            <a:r>
-              <a:rPr lang="en-US" sz="1000" b="1" dirty="0">
-                <a:solidFill>
-                  <a:srgbClr val="FFFFFF"/>
-                </a:solidFill>
-                <a:latin typeface="Trebuchet MS" pitchFamily="34" charset="0"/>
-                <a:ea typeface="Trebuchet MS" pitchFamily="34" charset="-122"/>
-                <a:cs typeface="Trebuchet MS" pitchFamily="34" charset="-120"/>
-              </a:rPr>
-              <a:t>Used in our Org</a:t>
-            </a:r>
-            <a:endParaRPr lang="en-US" sz="1000" dirty="0"/>
-          </a:p>
-        </p:txBody>
-      </p:sp>
-      <p:sp>
-        <p:nvSpPr>
-          <p:cNvPr id="6" name="Text 4"/>
-          <p:cNvSpPr/>
-          <p:nvPr/>
-        </p:nvSpPr>
-        <p:spPr>
-          <a:xfrm>
-            <a:off x="457200" y="749808"/>
-            <a:ext cx="8229600" cy="274320"/>
-          </a:xfrm>
-          <a:prstGeom prst="rect">
-            <a:avLst/>
-          </a:prstGeom>
-          <a:noFill/>
-          <a:ln/>
-        </p:spPr>
-        <p:txBody>
-          <a:bodyPr wrap="square" rtlCol="0" anchor="ctr"/>
-          <a:lstStyle/>
-          <a:p>
-            <a:pPr indent="0" marL="0">
-              <a:buNone/>
-            </a:pPr>
-            <a:r>
-              <a:rPr lang="en-US" sz="1250" dirty="0">
-                <a:solidFill>
-                  <a:srgbClr val="64748B"/>
-                </a:solidFill>
-                <a:latin typeface="Calibri" pitchFamily="34" charset="0"/>
-                <a:ea typeface="Calibri" pitchFamily="34" charset="-122"/>
-                <a:cs typeface="Calibri" pitchFamily="34" charset="-120"/>
-              </a:rPr>
-              <a:t>An open-source proxy that gives every team a single, consistent API to any LLM — no matter the provider.</a:t>
-            </a:r>
-            <a:endParaRPr lang="en-US" sz="1250" dirty="0"/>
-          </a:p>
-        </p:txBody>
-      </p:sp>
-      <p:sp>
-        <p:nvSpPr>
-          <p:cNvPr id="7" name="Text 5"/>
-          <p:cNvSpPr/>
-          <p:nvPr/>
-        </p:nvSpPr>
-        <p:spPr>
-          <a:xfrm>
-            <a:off x="457200" y="1170432"/>
-            <a:ext cx="4023360" cy="347472"/>
-          </a:xfrm>
-          <a:prstGeom prst="rect">
-            <a:avLst/>
-          </a:prstGeom>
-          <a:noFill/>
-          <a:ln/>
-        </p:spPr>
-        <p:txBody>
-          <a:bodyPr wrap="square" rtlCol="0" anchor="ctr"/>
-          <a:lstStyle/>
-          <a:p>
-            <a:pPr indent="0" marL="0">
-              <a:buNone/>
-            </a:pPr>
-            <a:r>
-              <a:rPr lang="en-US" sz="1600" b="1" dirty="0">
-                <a:solidFill>
-                  <a:srgbClr val="0891B2"/>
-                </a:solidFill>
-                <a:latin typeface="Trebuchet MS" pitchFamily="34" charset="0"/>
-                <a:ea typeface="Trebuchet MS" pitchFamily="34" charset="-122"/>
-                <a:cs typeface="Trebuchet MS" pitchFamily="34" charset="-120"/>
-              </a:rPr>
-              <a:t>Why We Use It</a:t>
-            </a:r>
-            <a:endParaRPr lang="en-US" sz="1600" dirty="0"/>
-          </a:p>
-        </p:txBody>
-      </p:sp>
-      <p:sp>
-        <p:nvSpPr>
-          <p:cNvPr id="8" name="Shape 6"/>
-          <p:cNvSpPr/>
-          <p:nvPr/>
-        </p:nvSpPr>
-        <p:spPr>
-          <a:xfrm>
-            <a:off x="457200" y="1600200"/>
-            <a:ext cx="4023360" cy="566928"/>
-          </a:xfrm>
-          <a:prstGeom prst="rect">
-            <a:avLst/>
-          </a:prstGeom>
-          <a:solidFill>
-            <a:srgbClr val="FFFFFF"/>
-          </a:solidFill>
-          <a:ln w="12700">
-            <a:solidFill>
-              <a:srgbClr val="E2E8F0"/>
-            </a:solidFill>
-            <a:prstDash val="solid"/>
-          </a:ln>
-          <a:effectLst>
-            <a:outerShdw sx="100000" sy="100000" kx="0" ky="0" algn="bl" rotWithShape="0" blurRad="76200" dist="25400" dir="8100000">
-              <a:srgbClr val="000000">
-                <a:alpha val="10000"/>
-              </a:srgbClr>
-            </a:outerShdw>
-          </a:effectLst>
-        </p:spPr>
-      </p:sp>
-      <p:sp>
-        <p:nvSpPr>
-          <p:cNvPr id="9" name="Text 7"/>
-          <p:cNvSpPr/>
-          <p:nvPr/>
-        </p:nvSpPr>
-        <p:spPr>
-          <a:xfrm>
-            <a:off x="594360" y="1655064"/>
-            <a:ext cx="1737360" cy="237744"/>
-          </a:xfrm>
-          <a:prstGeom prst="rect">
-            <a:avLst/>
-          </a:prstGeom>
-          <a:noFill/>
-          <a:ln/>
-        </p:spPr>
-        <p:txBody>
-          <a:bodyPr wrap="square" rtlCol="0" anchor="ctr"/>
-          <a:lstStyle/>
-          <a:p>
-            <a:pPr indent="0" marL="0">
-              <a:buNone/>
-            </a:pPr>
-            <a:r>
-              <a:rPr lang="en-US" sz="1200" b="1" dirty="0">
-                <a:solidFill>
-                  <a:srgbClr val="0F172A"/>
-                </a:solidFill>
-                <a:latin typeface="Trebuchet MS" pitchFamily="34" charset="0"/>
-                <a:ea typeface="Trebuchet MS" pitchFamily="34" charset="-122"/>
-                <a:cs typeface="Trebuchet MS" pitchFamily="34" charset="-120"/>
-              </a:rPr>
-              <a:t>🔌  Single Endpoint</a:t>
-            </a:r>
-            <a:endParaRPr lang="en-US" sz="1200" dirty="0"/>
-          </a:p>
-        </p:txBody>
-      </p:sp>
-      <p:sp>
-        <p:nvSpPr>
-          <p:cNvPr id="10" name="Text 8"/>
-          <p:cNvSpPr/>
-          <p:nvPr/>
-        </p:nvSpPr>
-        <p:spPr>
-          <a:xfrm>
-            <a:off x="2377440" y="1636776"/>
-            <a:ext cx="2011680" cy="493776"/>
-          </a:xfrm>
-          <a:prstGeom prst="rect">
-            <a:avLst/>
-          </a:prstGeom>
-          <a:noFill/>
-          <a:ln/>
-        </p:spPr>
-        <p:txBody>
-          <a:bodyPr wrap="square" rtlCol="0" anchor="ctr"/>
-          <a:lstStyle/>
-          <a:p>
-            <a:pPr indent="0" marL="0">
-              <a:buNone/>
-            </a:pPr>
-            <a:r>
-              <a:rPr lang="en-US" sz="1000" dirty="0">
-                <a:solidFill>
-                  <a:srgbClr val="334155"/>
-                </a:solidFill>
-                <a:latin typeface="Calibri" pitchFamily="34" charset="0"/>
-                <a:ea typeface="Calibri" pitchFamily="34" charset="-122"/>
-                <a:cs typeface="Calibri" pitchFamily="34" charset="-120"/>
-              </a:rPr>
-              <a:t>All models behind one URL. Your code uses OpenAI-compatible format regardless of whether it's Claude, GPT-4o, or Gemini.</a:t>
-            </a:r>
-            <a:endParaRPr lang="en-US" sz="1000" dirty="0"/>
-          </a:p>
-        </p:txBody>
-      </p:sp>
-      <p:sp>
-        <p:nvSpPr>
-          <p:cNvPr id="11" name="Shape 9"/>
-          <p:cNvSpPr/>
-          <p:nvPr/>
-        </p:nvSpPr>
-        <p:spPr>
-          <a:xfrm>
-            <a:off x="2286000" y="1691640"/>
-            <a:ext cx="9144" cy="365760"/>
-          </a:xfrm>
-          <a:prstGeom prst="rect">
-            <a:avLst/>
-          </a:prstGeom>
-          <a:solidFill>
-            <a:srgbClr val="E2E8F0"/>
-          </a:solidFill>
-          <a:ln w="12700">
-            <a:solidFill>
-              <a:srgbClr val="E2E8F0"/>
-            </a:solidFill>
-            <a:prstDash val="solid"/>
-          </a:ln>
-        </p:spPr>
-      </p:sp>
-      <p:sp>
-        <p:nvSpPr>
-          <p:cNvPr id="12" name="Shape 10"/>
-          <p:cNvSpPr/>
-          <p:nvPr/>
-        </p:nvSpPr>
-        <p:spPr>
-          <a:xfrm>
-            <a:off x="457200" y="2249424"/>
-            <a:ext cx="4023360" cy="566928"/>
-          </a:xfrm>
-          <a:prstGeom prst="rect">
-            <a:avLst/>
-          </a:prstGeom>
-          <a:solidFill>
-            <a:srgbClr val="FFFFFF"/>
-          </a:solidFill>
-          <a:ln w="12700">
-            <a:solidFill>
-              <a:srgbClr val="E2E8F0"/>
-            </a:solidFill>
-            <a:prstDash val="solid"/>
-          </a:ln>
-          <a:effectLst>
-            <a:outerShdw sx="100000" sy="100000" kx="0" ky="0" algn="bl" rotWithShape="0" blurRad="76200" dist="25400" dir="8100000">
-              <a:srgbClr val="000000">
-                <a:alpha val="10000"/>
-              </a:srgbClr>
-            </a:outerShdw>
-          </a:effectLst>
-        </p:spPr>
-      </p:sp>
-      <p:sp>
-        <p:nvSpPr>
-          <p:cNvPr id="13" name="Text 11"/>
-          <p:cNvSpPr/>
-          <p:nvPr/>
-        </p:nvSpPr>
-        <p:spPr>
-          <a:xfrm>
-            <a:off x="594360" y="2304288"/>
-            <a:ext cx="1737360" cy="237744"/>
-          </a:xfrm>
-          <a:prstGeom prst="rect">
-            <a:avLst/>
-          </a:prstGeom>
-          <a:noFill/>
-          <a:ln/>
-        </p:spPr>
-        <p:txBody>
-          <a:bodyPr wrap="square" rtlCol="0" anchor="ctr"/>
-          <a:lstStyle/>
-          <a:p>
-            <a:pPr indent="0" marL="0">
-              <a:buNone/>
-            </a:pPr>
-            <a:r>
-              <a:rPr lang="en-US" sz="1200" b="1" dirty="0">
-                <a:solidFill>
-                  <a:srgbClr val="0F172A"/>
-                </a:solidFill>
-                <a:latin typeface="Trebuchet MS" pitchFamily="34" charset="0"/>
-                <a:ea typeface="Trebuchet MS" pitchFamily="34" charset="-122"/>
-                <a:cs typeface="Trebuchet MS" pitchFamily="34" charset="-120"/>
-              </a:rPr>
-              <a:t>🔑  Centralised API Keys</a:t>
-            </a:r>
-            <a:endParaRPr lang="en-US" sz="1200" dirty="0"/>
-          </a:p>
-        </p:txBody>
-      </p:sp>
-      <p:sp>
-        <p:nvSpPr>
-          <p:cNvPr id="14" name="Text 12"/>
-          <p:cNvSpPr/>
-          <p:nvPr/>
-        </p:nvSpPr>
-        <p:spPr>
-          <a:xfrm>
-            <a:off x="2377440" y="2286000"/>
-            <a:ext cx="2011680" cy="493776"/>
-          </a:xfrm>
-          <a:prstGeom prst="rect">
-            <a:avLst/>
-          </a:prstGeom>
-          <a:noFill/>
-          <a:ln/>
-        </p:spPr>
-        <p:txBody>
-          <a:bodyPr wrap="square" rtlCol="0" anchor="ctr"/>
-          <a:lstStyle/>
-          <a:p>
-            <a:pPr indent="0" marL="0">
-              <a:buNone/>
-            </a:pPr>
-            <a:r>
-              <a:rPr lang="en-US" sz="1000" dirty="0">
-                <a:solidFill>
-                  <a:srgbClr val="334155"/>
-                </a:solidFill>
-                <a:latin typeface="Calibri" pitchFamily="34" charset="0"/>
-                <a:ea typeface="Calibri" pitchFamily="34" charset="-122"/>
-                <a:cs typeface="Calibri" pitchFamily="34" charset="-120"/>
-              </a:rPr>
-              <a:t>No provider keys in your code or repos. The gateway holds all credentials — devs just use their team token.</a:t>
-            </a:r>
-            <a:endParaRPr lang="en-US" sz="1000" dirty="0"/>
-          </a:p>
-        </p:txBody>
-      </p:sp>
-      <p:sp>
-        <p:nvSpPr>
-          <p:cNvPr id="15" name="Shape 13"/>
-          <p:cNvSpPr/>
-          <p:nvPr/>
-        </p:nvSpPr>
-        <p:spPr>
-          <a:xfrm>
-            <a:off x="2286000" y="2340864"/>
-            <a:ext cx="9144" cy="365760"/>
-          </a:xfrm>
-          <a:prstGeom prst="rect">
-            <a:avLst/>
-          </a:prstGeom>
-          <a:solidFill>
-            <a:srgbClr val="E2E8F0"/>
-          </a:solidFill>
-          <a:ln w="12700">
-            <a:solidFill>
-              <a:srgbClr val="E2E8F0"/>
-            </a:solidFill>
-            <a:prstDash val="solid"/>
-          </a:ln>
-        </p:spPr>
-      </p:sp>
-      <p:sp>
-        <p:nvSpPr>
-          <p:cNvPr id="16" name="Shape 14"/>
-          <p:cNvSpPr/>
-          <p:nvPr/>
-        </p:nvSpPr>
-        <p:spPr>
-          <a:xfrm>
-            <a:off x="457200" y="2898648"/>
-            <a:ext cx="4023360" cy="566928"/>
-          </a:xfrm>
-          <a:prstGeom prst="rect">
-            <a:avLst/>
-          </a:prstGeom>
-          <a:solidFill>
-            <a:srgbClr val="FFFFFF"/>
-          </a:solidFill>
-          <a:ln w="12700">
-            <a:solidFill>
-              <a:srgbClr val="E2E8F0"/>
-            </a:solidFill>
-            <a:prstDash val="solid"/>
-          </a:ln>
-          <a:effectLst>
-            <a:outerShdw sx="100000" sy="100000" kx="0" ky="0" algn="bl" rotWithShape="0" blurRad="76200" dist="25400" dir="8100000">
-              <a:srgbClr val="000000">
-                <a:alpha val="10000"/>
-              </a:srgbClr>
-            </a:outerShdw>
-          </a:effectLst>
-        </p:spPr>
-      </p:sp>
-      <p:sp>
-        <p:nvSpPr>
-          <p:cNvPr id="17" name="Text 15"/>
-          <p:cNvSpPr/>
-          <p:nvPr/>
-        </p:nvSpPr>
-        <p:spPr>
-          <a:xfrm>
-            <a:off x="594360" y="2953512"/>
-            <a:ext cx="1737360" cy="237744"/>
-          </a:xfrm>
-          <a:prstGeom prst="rect">
-            <a:avLst/>
-          </a:prstGeom>
-          <a:noFill/>
-          <a:ln/>
-        </p:spPr>
-        <p:txBody>
-          <a:bodyPr wrap="square" rtlCol="0" anchor="ctr"/>
-          <a:lstStyle/>
-          <a:p>
-            <a:pPr indent="0" marL="0">
-              <a:buNone/>
-            </a:pPr>
-            <a:r>
-              <a:rPr lang="en-US" sz="1200" b="1" dirty="0">
-                <a:solidFill>
-                  <a:srgbClr val="0F172A"/>
-                </a:solidFill>
-                <a:latin typeface="Trebuchet MS" pitchFamily="34" charset="0"/>
-                <a:ea typeface="Trebuchet MS" pitchFamily="34" charset="-122"/>
-                <a:cs typeface="Trebuchet MS" pitchFamily="34" charset="-120"/>
-              </a:rPr>
-              <a:t>💰  Cost &amp; Usage Tracking</a:t>
-            </a:r>
-            <a:endParaRPr lang="en-US" sz="1200" dirty="0"/>
-          </a:p>
-        </p:txBody>
-      </p:sp>
-      <p:sp>
-        <p:nvSpPr>
-          <p:cNvPr id="18" name="Text 16"/>
-          <p:cNvSpPr/>
-          <p:nvPr/>
-        </p:nvSpPr>
-        <p:spPr>
-          <a:xfrm>
-            <a:off x="2377440" y="2935224"/>
-            <a:ext cx="2011680" cy="493776"/>
-          </a:xfrm>
-          <a:prstGeom prst="rect">
-            <a:avLst/>
-          </a:prstGeom>
-          <a:noFill/>
-          <a:ln/>
-        </p:spPr>
-        <p:txBody>
-          <a:bodyPr wrap="square" rtlCol="0" anchor="ctr"/>
-          <a:lstStyle/>
-          <a:p>
-            <a:pPr indent="0" marL="0">
-              <a:buNone/>
-            </a:pPr>
-            <a:r>
-              <a:rPr lang="en-US" sz="1000" dirty="0">
-                <a:solidFill>
-                  <a:srgbClr val="334155"/>
-                </a:solidFill>
-                <a:latin typeface="Calibri" pitchFamily="34" charset="0"/>
-                <a:ea typeface="Calibri" pitchFamily="34" charset="-122"/>
-                <a:cs typeface="Calibri" pitchFamily="34" charset="-120"/>
-              </a:rPr>
-              <a:t>Per-team, per-user, per-model spend visibility. Set budgets, get alerts, charge back to projects.</a:t>
-            </a:r>
-            <a:endParaRPr lang="en-US" sz="1000" dirty="0"/>
-          </a:p>
-        </p:txBody>
-      </p:sp>
-      <p:sp>
-        <p:nvSpPr>
-          <p:cNvPr id="19" name="Shape 17"/>
-          <p:cNvSpPr/>
-          <p:nvPr/>
-        </p:nvSpPr>
-        <p:spPr>
-          <a:xfrm>
-            <a:off x="2286000" y="2990088"/>
-            <a:ext cx="9144" cy="365760"/>
-          </a:xfrm>
-          <a:prstGeom prst="rect">
-            <a:avLst/>
-          </a:prstGeom>
-          <a:solidFill>
-            <a:srgbClr val="E2E8F0"/>
-          </a:solidFill>
-          <a:ln w="12700">
-            <a:solidFill>
-              <a:srgbClr val="E2E8F0"/>
-            </a:solidFill>
-            <a:prstDash val="solid"/>
-          </a:ln>
-        </p:spPr>
-      </p:sp>
-      <p:sp>
-        <p:nvSpPr>
-          <p:cNvPr id="20" name="Shape 18"/>
-          <p:cNvSpPr/>
-          <p:nvPr/>
-        </p:nvSpPr>
-        <p:spPr>
-          <a:xfrm>
-            <a:off x="457200" y="3547872"/>
-            <a:ext cx="4023360" cy="566928"/>
-          </a:xfrm>
-          <a:prstGeom prst="rect">
-            <a:avLst/>
-          </a:prstGeom>
-          <a:solidFill>
-            <a:srgbClr val="FFFFFF"/>
-          </a:solidFill>
-          <a:ln w="12700">
-            <a:solidFill>
-              <a:srgbClr val="E2E8F0"/>
-            </a:solidFill>
-            <a:prstDash val="solid"/>
-          </a:ln>
-          <a:effectLst>
-            <a:outerShdw sx="100000" sy="100000" kx="0" ky="0" algn="bl" rotWithShape="0" blurRad="76200" dist="25400" dir="8100000">
-              <a:srgbClr val="000000">
-                <a:alpha val="10000"/>
-              </a:srgbClr>
-            </a:outerShdw>
-          </a:effectLst>
-        </p:spPr>
-      </p:sp>
-      <p:sp>
-        <p:nvSpPr>
-          <p:cNvPr id="21" name="Text 19"/>
-          <p:cNvSpPr/>
-          <p:nvPr/>
-        </p:nvSpPr>
-        <p:spPr>
-          <a:xfrm>
-            <a:off x="594360" y="3602736"/>
-            <a:ext cx="1737360" cy="237744"/>
-          </a:xfrm>
-          <a:prstGeom prst="rect">
-            <a:avLst/>
-          </a:prstGeom>
-          <a:noFill/>
-          <a:ln/>
-        </p:spPr>
-        <p:txBody>
-          <a:bodyPr wrap="square" rtlCol="0" anchor="ctr"/>
-          <a:lstStyle/>
-          <a:p>
-            <a:pPr indent="0" marL="0">
-              <a:buNone/>
-            </a:pPr>
-            <a:r>
-              <a:rPr lang="en-US" sz="1200" b="1" dirty="0">
-                <a:solidFill>
-                  <a:srgbClr val="0F172A"/>
-                </a:solidFill>
-                <a:latin typeface="Trebuchet MS" pitchFamily="34" charset="0"/>
-                <a:ea typeface="Trebuchet MS" pitchFamily="34" charset="-122"/>
-                <a:cs typeface="Trebuchet MS" pitchFamily="34" charset="-120"/>
-              </a:rPr>
-              <a:t>🔄  Fallbacks &amp; Load Balance</a:t>
-            </a:r>
-            <a:endParaRPr lang="en-US" sz="1200" dirty="0"/>
-          </a:p>
-        </p:txBody>
-      </p:sp>
-      <p:sp>
-        <p:nvSpPr>
-          <p:cNvPr id="22" name="Text 20"/>
-          <p:cNvSpPr/>
-          <p:nvPr/>
-        </p:nvSpPr>
-        <p:spPr>
-          <a:xfrm>
-            <a:off x="2377440" y="3584448"/>
-            <a:ext cx="2011680" cy="493776"/>
-          </a:xfrm>
-          <a:prstGeom prst="rect">
-            <a:avLst/>
-          </a:prstGeom>
-          <a:noFill/>
-          <a:ln/>
-        </p:spPr>
-        <p:txBody>
-          <a:bodyPr wrap="square" rtlCol="0" anchor="ctr"/>
-          <a:lstStyle/>
-          <a:p>
-            <a:pPr indent="0" marL="0">
-              <a:buNone/>
-            </a:pPr>
-            <a:r>
-              <a:rPr lang="en-US" sz="1000" dirty="0">
-                <a:solidFill>
-                  <a:srgbClr val="334155"/>
-                </a:solidFill>
-                <a:latin typeface="Calibri" pitchFamily="34" charset="0"/>
-                <a:ea typeface="Calibri" pitchFamily="34" charset="-122"/>
-                <a:cs typeface="Calibri" pitchFamily="34" charset="-120"/>
-              </a:rPr>
-              <a:t>If Claude is slow, automatically retry on GPT-4o or another model. Configurable fallback chains.</a:t>
-            </a:r>
-            <a:endParaRPr lang="en-US" sz="1000" dirty="0"/>
-          </a:p>
-        </p:txBody>
-      </p:sp>
-      <p:sp>
-        <p:nvSpPr>
-          <p:cNvPr id="23" name="Shape 21"/>
-          <p:cNvSpPr/>
-          <p:nvPr/>
-        </p:nvSpPr>
-        <p:spPr>
-          <a:xfrm>
-            <a:off x="2286000" y="3639312"/>
-            <a:ext cx="9144" cy="365760"/>
-          </a:xfrm>
-          <a:prstGeom prst="rect">
-            <a:avLst/>
-          </a:prstGeom>
-          <a:solidFill>
-            <a:srgbClr val="E2E8F0"/>
-          </a:solidFill>
-          <a:ln w="12700">
-            <a:solidFill>
-              <a:srgbClr val="E2E8F0"/>
-            </a:solidFill>
-            <a:prstDash val="solid"/>
-          </a:ln>
-        </p:spPr>
-      </p:sp>
-      <p:sp>
-        <p:nvSpPr>
-          <p:cNvPr id="24" name="Shape 22"/>
-          <p:cNvSpPr/>
-          <p:nvPr/>
-        </p:nvSpPr>
-        <p:spPr>
-          <a:xfrm>
-            <a:off x="457200" y="4197096"/>
-            <a:ext cx="4023360" cy="566928"/>
-          </a:xfrm>
-          <a:prstGeom prst="rect">
-            <a:avLst/>
-          </a:prstGeom>
-          <a:solidFill>
-            <a:srgbClr val="FFFFFF"/>
-          </a:solidFill>
-          <a:ln w="12700">
-            <a:solidFill>
-              <a:srgbClr val="E2E8F0"/>
-            </a:solidFill>
-            <a:prstDash val="solid"/>
-          </a:ln>
-          <a:effectLst>
-            <a:outerShdw sx="100000" sy="100000" kx="0" ky="0" algn="bl" rotWithShape="0" blurRad="76200" dist="25400" dir="8100000">
-              <a:srgbClr val="000000">
-                <a:alpha val="10000"/>
-              </a:srgbClr>
-            </a:outerShdw>
-          </a:effectLst>
-        </p:spPr>
-      </p:sp>
-      <p:sp>
-        <p:nvSpPr>
-          <p:cNvPr id="25" name="Text 23"/>
-          <p:cNvSpPr/>
-          <p:nvPr/>
-        </p:nvSpPr>
-        <p:spPr>
-          <a:xfrm>
-            <a:off x="594360" y="4251960"/>
-            <a:ext cx="1737360" cy="237744"/>
-          </a:xfrm>
-          <a:prstGeom prst="rect">
-            <a:avLst/>
-          </a:prstGeom>
-          <a:noFill/>
-          <a:ln/>
-        </p:spPr>
-        <p:txBody>
-          <a:bodyPr wrap="square" rtlCol="0" anchor="ctr"/>
-          <a:lstStyle/>
-          <a:p>
-            <a:pPr indent="0" marL="0">
-              <a:buNone/>
-            </a:pPr>
-            <a:r>
-              <a:rPr lang="en-US" sz="1200" b="1" dirty="0">
-                <a:solidFill>
-                  <a:srgbClr val="0F172A"/>
-                </a:solidFill>
-                <a:latin typeface="Trebuchet MS" pitchFamily="34" charset="0"/>
-                <a:ea typeface="Trebuchet MS" pitchFamily="34" charset="-122"/>
-                <a:cs typeface="Trebuchet MS" pitchFamily="34" charset="-120"/>
-              </a:rPr>
-              <a:t>⚡  Rate Limiting</a:t>
-            </a:r>
-            <a:endParaRPr lang="en-US" sz="1200" dirty="0"/>
-          </a:p>
-        </p:txBody>
-      </p:sp>
-      <p:sp>
-        <p:nvSpPr>
-          <p:cNvPr id="26" name="Text 24"/>
-          <p:cNvSpPr/>
-          <p:nvPr/>
-        </p:nvSpPr>
-        <p:spPr>
-          <a:xfrm>
-            <a:off x="2377440" y="4233672"/>
-            <a:ext cx="2011680" cy="493776"/>
-          </a:xfrm>
-          <a:prstGeom prst="rect">
-            <a:avLst/>
-          </a:prstGeom>
-          <a:noFill/>
-          <a:ln/>
-        </p:spPr>
-        <p:txBody>
-          <a:bodyPr wrap="square" rtlCol="0" anchor="ctr"/>
-          <a:lstStyle/>
-          <a:p>
-            <a:pPr indent="0" marL="0">
-              <a:buNone/>
-            </a:pPr>
-            <a:r>
-              <a:rPr lang="en-US" sz="1000" dirty="0">
-                <a:solidFill>
-                  <a:srgbClr val="334155"/>
-                </a:solidFill>
-                <a:latin typeface="Calibri" pitchFamily="34" charset="0"/>
-                <a:ea typeface="Calibri" pitchFamily="34" charset="-122"/>
-                <a:cs typeface="Calibri" pitchFamily="34" charset="-120"/>
-              </a:rPr>
-              <a:t>Prevent any team or user from hammering the API. Fine-grained limits by model, user, or team.</a:t>
-            </a:r>
-            <a:endParaRPr lang="en-US" sz="1000" dirty="0"/>
-          </a:p>
-        </p:txBody>
-      </p:sp>
-      <p:sp>
-        <p:nvSpPr>
-          <p:cNvPr id="27" name="Shape 25"/>
-          <p:cNvSpPr/>
-          <p:nvPr/>
-        </p:nvSpPr>
-        <p:spPr>
-          <a:xfrm>
-            <a:off x="2286000" y="4288536"/>
-            <a:ext cx="9144" cy="365760"/>
-          </a:xfrm>
-          <a:prstGeom prst="rect">
-            <a:avLst/>
-          </a:prstGeom>
-          <a:solidFill>
-            <a:srgbClr val="E2E8F0"/>
-          </a:solidFill>
-          <a:ln w="12700">
-            <a:solidFill>
-              <a:srgbClr val="E2E8F0"/>
-            </a:solidFill>
-            <a:prstDash val="solid"/>
-          </a:ln>
-        </p:spPr>
-      </p:sp>
-      <p:sp>
-        <p:nvSpPr>
-          <p:cNvPr id="28" name="Text 26"/>
-          <p:cNvSpPr/>
-          <p:nvPr/>
-        </p:nvSpPr>
-        <p:spPr>
-          <a:xfrm>
-            <a:off x="4754880" y="1170432"/>
-            <a:ext cx="4114800" cy="347472"/>
-          </a:xfrm>
-          <a:prstGeom prst="rect">
-            <a:avLst/>
-          </a:prstGeom>
-          <a:noFill/>
-          <a:ln/>
-        </p:spPr>
-        <p:txBody>
-          <a:bodyPr wrap="square" rtlCol="0" anchor="ctr"/>
-          <a:lstStyle/>
-          <a:p>
-            <a:pPr indent="0" marL="0">
-              <a:buNone/>
-            </a:pPr>
-            <a:r>
-              <a:rPr lang="en-US" sz="1600" b="1" dirty="0">
-                <a:solidFill>
-                  <a:srgbClr val="0891B2"/>
-                </a:solidFill>
-                <a:latin typeface="Trebuchet MS" pitchFamily="34" charset="0"/>
-                <a:ea typeface="Trebuchet MS" pitchFamily="34" charset="-122"/>
-                <a:cs typeface="Trebuchet MS" pitchFamily="34" charset="-120"/>
-              </a:rPr>
-              <a:t>Gateway Architecture</a:t>
-            </a:r>
-            <a:endParaRPr lang="en-US" sz="1600" dirty="0"/>
-          </a:p>
-        </p:txBody>
-      </p:sp>
-      <p:sp>
-        <p:nvSpPr>
-          <p:cNvPr id="29" name="Shape 27"/>
-          <p:cNvSpPr/>
-          <p:nvPr/>
-        </p:nvSpPr>
-        <p:spPr>
-          <a:xfrm>
-            <a:off x="5303520" y="1600200"/>
-            <a:ext cx="3200400" cy="566928"/>
-          </a:xfrm>
-          <a:prstGeom prst="rect">
-            <a:avLst/>
-          </a:prstGeom>
-          <a:solidFill>
-            <a:srgbClr val="0D1B2A"/>
-          </a:solidFill>
-          <a:ln w="25400">
-            <a:solidFill>
-              <a:srgbClr val="06B6D4"/>
-            </a:solidFill>
-            <a:prstDash val="solid"/>
-          </a:ln>
-        </p:spPr>
-      </p:sp>
-      <p:sp>
-        <p:nvSpPr>
-          <p:cNvPr id="30" name="Text 28"/>
-          <p:cNvSpPr/>
-          <p:nvPr/>
-        </p:nvSpPr>
-        <p:spPr>
-          <a:xfrm>
-            <a:off x="5303520" y="1600200"/>
-            <a:ext cx="3200400" cy="566928"/>
-          </a:xfrm>
-          <a:prstGeom prst="rect">
-            <a:avLst/>
-          </a:prstGeom>
-          <a:noFill/>
-          <a:ln/>
-        </p:spPr>
-        <p:txBody>
-          <a:bodyPr wrap="square" rtlCol="0" anchor="ctr"/>
-          <a:lstStyle/>
-          <a:p>
-            <a:pPr algn="ctr" indent="0" marL="0">
-              <a:buNone/>
-            </a:pPr>
-            <a:r>
-              <a:rPr lang="en-US" sz="1200" b="1" dirty="0">
-                <a:solidFill>
-                  <a:srgbClr val="FFFFFF"/>
-                </a:solidFill>
-                <a:latin typeface="Trebuchet MS" pitchFamily="34" charset="0"/>
-                <a:ea typeface="Trebuchet MS" pitchFamily="34" charset="-122"/>
-                <a:cs typeface="Trebuchet MS" pitchFamily="34" charset="-120"/>
-              </a:rPr>
-              <a:t>Your Code  (any language)</a:t>
-            </a:r>
-            <a:endParaRPr lang="en-US" sz="1200" dirty="0"/>
-          </a:p>
-        </p:txBody>
-      </p:sp>
-      <p:sp>
-        <p:nvSpPr>
-          <p:cNvPr id="31" name="Shape 29"/>
-          <p:cNvSpPr/>
-          <p:nvPr/>
-        </p:nvSpPr>
-        <p:spPr>
-          <a:xfrm>
-            <a:off x="4937760" y="2258568"/>
-            <a:ext cx="3840480" cy="475488"/>
-          </a:xfrm>
-          <a:prstGeom prst="rect">
-            <a:avLst/>
-          </a:prstGeom>
-          <a:solidFill>
-            <a:srgbClr val="0F172A"/>
-          </a:solidFill>
-          <a:ln w="12700">
-            <a:solidFill>
-              <a:srgbClr val="334155"/>
-            </a:solidFill>
-            <a:prstDash val="solid"/>
-          </a:ln>
-        </p:spPr>
-      </p:sp>
-      <p:sp>
-        <p:nvSpPr>
-          <p:cNvPr id="32" name="Text 30"/>
-          <p:cNvSpPr/>
-          <p:nvPr/>
-        </p:nvSpPr>
-        <p:spPr>
-          <a:xfrm>
-            <a:off x="5074920" y="2286000"/>
-            <a:ext cx="3566160" cy="411480"/>
-          </a:xfrm>
-          <a:prstGeom prst="rect">
-            <a:avLst/>
-          </a:prstGeom>
-          <a:noFill/>
-          <a:ln/>
-        </p:spPr>
-        <p:txBody>
-          <a:bodyPr wrap="square" rtlCol="0" anchor="ctr"/>
-          <a:lstStyle/>
-          <a:p>
-            <a:pPr indent="0" marL="0">
-              <a:buNone/>
-            </a:pPr>
-            <a:r>
-              <a:rPr lang="en-US" sz="1000" dirty="0">
-                <a:solidFill>
-                  <a:srgbClr val="93C5FD"/>
-                </a:solidFill>
-                <a:latin typeface="Consolas" pitchFamily="34" charset="0"/>
-                <a:ea typeface="Consolas" pitchFamily="34" charset="-122"/>
-                <a:cs typeface="Consolas" pitchFamily="34" charset="-120"/>
-              </a:rPr>
-              <a:t>openai.chat.completions.</a:t>
-            </a:r>
-            <a:pPr indent="0" marL="0">
-              <a:buNone/>
-            </a:pPr>
-            <a:r>
-              <a:rPr lang="en-US" sz="1000" b="1" dirty="0">
-                <a:solidFill>
-                  <a:srgbClr val="86EFAC"/>
-                </a:solidFill>
-                <a:latin typeface="Consolas" pitchFamily="34" charset="0"/>
-                <a:ea typeface="Consolas" pitchFamily="34" charset="-122"/>
-                <a:cs typeface="Consolas" pitchFamily="34" charset="-120"/>
-              </a:rPr>
-              <a:t>create</a:t>
-            </a:r>
-            <a:pPr indent="0" marL="0">
-              <a:buNone/>
-            </a:pPr>
-            <a:r>
-              <a:rPr lang="en-US" sz="1000" dirty="0">
-                <a:solidFill>
-                  <a:srgbClr val="E2E8F0"/>
-                </a:solidFill>
-                <a:latin typeface="Consolas" pitchFamily="34" charset="0"/>
-                <a:ea typeface="Consolas" pitchFamily="34" charset="-122"/>
-                <a:cs typeface="Consolas" pitchFamily="34" charset="-120"/>
-              </a:rPr>
-              <a:t>(model=</a:t>
-            </a:r>
-            <a:pPr indent="0" marL="0">
-              <a:buNone/>
-            </a:pPr>
-            <a:r>
-              <a:rPr lang="en-US" sz="1000" dirty="0">
-                <a:solidFill>
-                  <a:srgbClr val="FCA5A5"/>
-                </a:solidFill>
-                <a:latin typeface="Consolas" pitchFamily="34" charset="0"/>
-                <a:ea typeface="Consolas" pitchFamily="34" charset="-122"/>
-                <a:cs typeface="Consolas" pitchFamily="34" charset="-120"/>
-              </a:rPr>
-              <a:t>"claude-3-7-sonnet"</a:t>
-            </a:r>
-            <a:pPr indent="0" marL="0">
-              <a:buNone/>
-            </a:pPr>
-            <a:r>
-              <a:rPr lang="en-US" sz="1000" dirty="0">
-                <a:solidFill>
-                  <a:srgbClr val="E2E8F0"/>
-                </a:solidFill>
-                <a:latin typeface="Consolas" pitchFamily="34" charset="0"/>
-                <a:ea typeface="Consolas" pitchFamily="34" charset="-122"/>
-                <a:cs typeface="Consolas" pitchFamily="34" charset="-120"/>
-              </a:rPr>
-              <a:t>, ...)</a:t>
-            </a:r>
-            <a:endParaRPr lang="en-US" sz="1000" dirty="0"/>
-          </a:p>
-        </p:txBody>
-      </p:sp>
-      <p:sp>
-        <p:nvSpPr>
-          <p:cNvPr id="33" name="Text 31"/>
-          <p:cNvSpPr/>
-          <p:nvPr/>
-        </p:nvSpPr>
-        <p:spPr>
-          <a:xfrm>
-            <a:off x="6035040" y="2779776"/>
-            <a:ext cx="1828800" cy="256032"/>
-          </a:xfrm>
-          <a:prstGeom prst="rect">
-            <a:avLst/>
-          </a:prstGeom>
-          <a:noFill/>
-          <a:ln/>
-        </p:spPr>
-        <p:txBody>
-          <a:bodyPr wrap="square" rtlCol="0" anchor="ctr"/>
-          <a:lstStyle/>
-          <a:p>
-            <a:pPr algn="ctr" indent="0" marL="0">
-              <a:buNone/>
-            </a:pPr>
-            <a:r>
-              <a:rPr lang="en-US" sz="1100" dirty="0">
-                <a:solidFill>
-                  <a:srgbClr val="64748B"/>
-                </a:solidFill>
-                <a:latin typeface="Calibri italic" pitchFamily="34" charset="0"/>
-                <a:ea typeface="Calibri italic" pitchFamily="34" charset="-122"/>
-                <a:cs typeface="Calibri italic" pitchFamily="34" charset="-120"/>
-              </a:rPr>
-              <a:t>↓  routes to</a:t>
-            </a:r>
-            <a:endParaRPr lang="en-US" sz="1100" dirty="0"/>
-          </a:p>
-        </p:txBody>
-      </p:sp>
-      <p:sp>
-        <p:nvSpPr>
-          <p:cNvPr id="34" name="Shape 32"/>
-          <p:cNvSpPr/>
-          <p:nvPr/>
-        </p:nvSpPr>
-        <p:spPr>
-          <a:xfrm>
-            <a:off x="5029200" y="3063240"/>
-            <a:ext cx="3749040" cy="658368"/>
-          </a:xfrm>
-          <a:prstGeom prst="rect">
-            <a:avLst/>
-          </a:prstGeom>
-          <a:solidFill>
-            <a:srgbClr val="0C2A3A"/>
-          </a:solidFill>
-          <a:ln w="31750">
-            <a:solidFill>
-              <a:srgbClr val="0891B2"/>
-            </a:solidFill>
-            <a:prstDash val="solid"/>
-          </a:ln>
-        </p:spPr>
-      </p:sp>
-      <p:sp>
-        <p:nvSpPr>
-          <p:cNvPr id="35" name="Text 33"/>
-          <p:cNvSpPr/>
-          <p:nvPr/>
-        </p:nvSpPr>
-        <p:spPr>
-          <a:xfrm>
-            <a:off x="5029200" y="3063240"/>
-            <a:ext cx="2286000" cy="658368"/>
-          </a:xfrm>
-          <a:prstGeom prst="rect">
-            <a:avLst/>
-          </a:prstGeom>
-          <a:noFill/>
-          <a:ln/>
-        </p:spPr>
-        <p:txBody>
-          <a:bodyPr wrap="square" rtlCol="0" anchor="ctr"/>
-          <a:lstStyle/>
-          <a:p>
-            <a:pPr indent="0" marL="0">
-              <a:buNone/>
-            </a:pPr>
-            <a:r>
-              <a:rPr lang="en-US" sz="1500" b="1" dirty="0">
-                <a:solidFill>
-                  <a:srgbClr val="06B6D4"/>
-                </a:solidFill>
-                <a:latin typeface="Trebuchet MS" pitchFamily="34" charset="0"/>
-                <a:ea typeface="Trebuchet MS" pitchFamily="34" charset="-122"/>
-                <a:cs typeface="Trebuchet MS" pitchFamily="34" charset="-120"/>
-              </a:rPr>
-              <a:t>LiteLLM Gateway</a:t>
-            </a:r>
-            <a:endParaRPr lang="en-US" sz="1500" dirty="0"/>
-          </a:p>
-        </p:txBody>
-      </p:sp>
-      <p:sp>
-        <p:nvSpPr>
-          <p:cNvPr id="36" name="Text 34"/>
-          <p:cNvSpPr/>
-          <p:nvPr/>
-        </p:nvSpPr>
-        <p:spPr>
-          <a:xfrm>
-            <a:off x="7315200" y="3090672"/>
-            <a:ext cx="1371600" cy="594360"/>
-          </a:xfrm>
-          <a:prstGeom prst="rect">
-            <a:avLst/>
-          </a:prstGeom>
-          <a:noFill/>
-          <a:ln/>
-        </p:spPr>
-        <p:txBody>
-          <a:bodyPr wrap="square" rtlCol="0" anchor="ctr"/>
-          <a:lstStyle/>
-          <a:p>
-            <a:pPr indent="0" marL="0">
-              <a:buNone/>
-            </a:pPr>
-            <a:r>
-              <a:rPr lang="en-US" sz="950" dirty="0">
-                <a:solidFill>
-                  <a:srgbClr val="94A3B8"/>
-                </a:solidFill>
-                <a:latin typeface="Calibri" pitchFamily="34" charset="0"/>
-                <a:ea typeface="Calibri" pitchFamily="34" charset="-122"/>
-                <a:cs typeface="Calibri" pitchFamily="34" charset="-120"/>
-              </a:rPr>
-              <a:t>Auth · Routing</a:t>
-            </a:r>
-            <a:endParaRPr lang="en-US" sz="950" dirty="0"/>
-          </a:p>
-          <a:p>
-            <a:pPr indent="0" marL="0">
-              <a:buNone/>
-            </a:pPr>
-            <a:r>
-              <a:rPr lang="en-US" sz="950" dirty="0">
-                <a:solidFill>
-                  <a:srgbClr val="94A3B8"/>
-                </a:solidFill>
-                <a:latin typeface="Calibri" pitchFamily="34" charset="0"/>
-                <a:ea typeface="Calibri" pitchFamily="34" charset="-122"/>
-                <a:cs typeface="Calibri" pitchFamily="34" charset="-120"/>
-              </a:rPr>
-              <a:t>Limits · Logging</a:t>
-            </a:r>
-            <a:endParaRPr lang="en-US" sz="950" dirty="0"/>
-          </a:p>
-        </p:txBody>
-      </p:sp>
-      <p:sp>
-        <p:nvSpPr>
-          <p:cNvPr id="37" name="Text 35"/>
-          <p:cNvSpPr/>
-          <p:nvPr/>
-        </p:nvSpPr>
-        <p:spPr>
-          <a:xfrm>
-            <a:off x="6035040" y="3767328"/>
-            <a:ext cx="1828800" cy="256032"/>
-          </a:xfrm>
-          <a:prstGeom prst="rect">
-            <a:avLst/>
-          </a:prstGeom>
-          <a:noFill/>
-          <a:ln/>
-        </p:spPr>
-        <p:txBody>
-          <a:bodyPr wrap="square" rtlCol="0" anchor="ctr"/>
-          <a:lstStyle/>
-          <a:p>
-            <a:pPr algn="ctr" indent="0" marL="0">
-              <a:buNone/>
-            </a:pPr>
-            <a:r>
-              <a:rPr lang="en-US" sz="1100" dirty="0">
-                <a:solidFill>
-                  <a:srgbClr val="64748B"/>
-                </a:solidFill>
-                <a:latin typeface="Calibri italic" pitchFamily="34" charset="0"/>
-                <a:ea typeface="Calibri italic" pitchFamily="34" charset="-122"/>
-                <a:cs typeface="Calibri italic" pitchFamily="34" charset="-120"/>
-              </a:rPr>
-              <a:t>↓  dispatches to</a:t>
-            </a:r>
-            <a:endParaRPr lang="en-US" sz="1100" dirty="0"/>
-          </a:p>
-        </p:txBody>
-      </p:sp>
-      <p:sp>
-        <p:nvSpPr>
-          <p:cNvPr id="38" name="Shape 36"/>
-          <p:cNvSpPr/>
-          <p:nvPr/>
-        </p:nvSpPr>
-        <p:spPr>
-          <a:xfrm>
-            <a:off x="4846320" y="4069080"/>
-            <a:ext cx="868680" cy="658368"/>
-          </a:xfrm>
-          <a:prstGeom prst="rect">
-            <a:avLst/>
-          </a:prstGeom>
-          <a:solidFill>
-            <a:srgbClr val="1C0A2E"/>
-          </a:solidFill>
-          <a:ln w="19050">
-            <a:solidFill>
-              <a:srgbClr val="7C3AED"/>
-            </a:solidFill>
-            <a:prstDash val="solid"/>
-          </a:ln>
-        </p:spPr>
-      </p:sp>
-      <p:sp>
-        <p:nvSpPr>
-          <p:cNvPr id="39" name="Text 37"/>
-          <p:cNvSpPr/>
-          <p:nvPr/>
-        </p:nvSpPr>
-        <p:spPr>
-          <a:xfrm>
-            <a:off x="4846320" y="4114800"/>
-            <a:ext cx="868680" cy="274320"/>
-          </a:xfrm>
-          <a:prstGeom prst="rect">
-            <a:avLst/>
-          </a:prstGeom>
-          <a:noFill/>
-          <a:ln/>
-        </p:spPr>
-        <p:txBody>
-          <a:bodyPr wrap="square" rtlCol="0" anchor="ctr"/>
-          <a:lstStyle/>
-          <a:p>
-            <a:pPr algn="ctr" indent="0" marL="0">
-              <a:buNone/>
-            </a:pPr>
-            <a:r>
-              <a:rPr lang="en-US" sz="1000" b="1" dirty="0">
-                <a:solidFill>
-                  <a:srgbClr val="FFFFFF"/>
-                </a:solidFill>
-                <a:latin typeface="Trebuchet MS" pitchFamily="34" charset="0"/>
-                <a:ea typeface="Trebuchet MS" pitchFamily="34" charset="-122"/>
-                <a:cs typeface="Trebuchet MS" pitchFamily="34" charset="-120"/>
-              </a:rPr>
-              <a:t>Claude</a:t>
-            </a:r>
-            <a:endParaRPr lang="en-US" sz="1000" dirty="0"/>
-          </a:p>
-        </p:txBody>
-      </p:sp>
-      <p:sp>
-        <p:nvSpPr>
-          <p:cNvPr id="40" name="Text 38"/>
-          <p:cNvSpPr/>
-          <p:nvPr/>
-        </p:nvSpPr>
-        <p:spPr>
-          <a:xfrm>
-            <a:off x="4846320" y="4416552"/>
-            <a:ext cx="868680" cy="228600"/>
-          </a:xfrm>
-          <a:prstGeom prst="rect">
-            <a:avLst/>
-          </a:prstGeom>
-          <a:noFill/>
-          <a:ln/>
-        </p:spPr>
-        <p:txBody>
-          <a:bodyPr wrap="square" rtlCol="0" anchor="ctr"/>
-          <a:lstStyle/>
-          <a:p>
-            <a:pPr algn="ctr" indent="0" marL="0">
-              <a:buNone/>
-            </a:pPr>
-            <a:r>
-              <a:rPr lang="en-US" sz="850" dirty="0">
-                <a:solidFill>
-                  <a:srgbClr val="94A3B8"/>
-                </a:solidFill>
-                <a:latin typeface="Calibri" pitchFamily="34" charset="0"/>
-                <a:ea typeface="Calibri" pitchFamily="34" charset="-122"/>
-                <a:cs typeface="Calibri" pitchFamily="34" charset="-120"/>
-              </a:rPr>
-              <a:t>Anthropic</a:t>
-            </a:r>
-            <a:endParaRPr lang="en-US" sz="850" dirty="0"/>
-          </a:p>
-        </p:txBody>
-      </p:sp>
-      <p:sp>
-        <p:nvSpPr>
-          <p:cNvPr id="41" name="Shape 39"/>
-          <p:cNvSpPr/>
-          <p:nvPr/>
-        </p:nvSpPr>
-        <p:spPr>
-          <a:xfrm>
-            <a:off x="5833872" y="4069080"/>
-            <a:ext cx="868680" cy="658368"/>
-          </a:xfrm>
-          <a:prstGeom prst="rect">
-            <a:avLst/>
-          </a:prstGeom>
-          <a:solidFill>
-            <a:srgbClr val="0A1F0A"/>
-          </a:solidFill>
-          <a:ln w="19050">
-            <a:solidFill>
-              <a:srgbClr val="22C55E"/>
-            </a:solidFill>
-            <a:prstDash val="solid"/>
-          </a:ln>
-        </p:spPr>
-      </p:sp>
-      <p:sp>
-        <p:nvSpPr>
-          <p:cNvPr id="42" name="Text 40"/>
-          <p:cNvSpPr/>
-          <p:nvPr/>
-        </p:nvSpPr>
-        <p:spPr>
-          <a:xfrm>
-            <a:off x="5833872" y="4114800"/>
-            <a:ext cx="868680" cy="274320"/>
-          </a:xfrm>
-          <a:prstGeom prst="rect">
-            <a:avLst/>
-          </a:prstGeom>
-          <a:noFill/>
-          <a:ln/>
-        </p:spPr>
-        <p:txBody>
-          <a:bodyPr wrap="square" rtlCol="0" anchor="ctr"/>
-          <a:lstStyle/>
-          <a:p>
-            <a:pPr algn="ctr" indent="0" marL="0">
-              <a:buNone/>
-            </a:pPr>
-            <a:r>
-              <a:rPr lang="en-US" sz="1000" b="1" dirty="0">
-                <a:solidFill>
-                  <a:srgbClr val="FFFFFF"/>
-                </a:solidFill>
-                <a:latin typeface="Trebuchet MS" pitchFamily="34" charset="0"/>
-                <a:ea typeface="Trebuchet MS" pitchFamily="34" charset="-122"/>
-                <a:cs typeface="Trebuchet MS" pitchFamily="34" charset="-120"/>
-              </a:rPr>
-              <a:t>GPT-4o</a:t>
-            </a:r>
-            <a:endParaRPr lang="en-US" sz="1000" dirty="0"/>
-          </a:p>
-        </p:txBody>
-      </p:sp>
-      <p:sp>
-        <p:nvSpPr>
-          <p:cNvPr id="43" name="Text 41"/>
-          <p:cNvSpPr/>
-          <p:nvPr/>
-        </p:nvSpPr>
-        <p:spPr>
-          <a:xfrm>
-            <a:off x="5833872" y="4416552"/>
-            <a:ext cx="868680" cy="228600"/>
-          </a:xfrm>
-          <a:prstGeom prst="rect">
-            <a:avLst/>
-          </a:prstGeom>
-          <a:noFill/>
-          <a:ln/>
-        </p:spPr>
-        <p:txBody>
-          <a:bodyPr wrap="square" rtlCol="0" anchor="ctr"/>
-          <a:lstStyle/>
-          <a:p>
-            <a:pPr algn="ctr" indent="0" marL="0">
-              <a:buNone/>
-            </a:pPr>
-            <a:r>
-              <a:rPr lang="en-US" sz="850" dirty="0">
-                <a:solidFill>
-                  <a:srgbClr val="94A3B8"/>
-                </a:solidFill>
-                <a:latin typeface="Calibri" pitchFamily="34" charset="0"/>
-                <a:ea typeface="Calibri" pitchFamily="34" charset="-122"/>
-                <a:cs typeface="Calibri" pitchFamily="34" charset="-120"/>
-              </a:rPr>
-              <a:t>OpenAI</a:t>
-            </a:r>
-            <a:endParaRPr lang="en-US" sz="850" dirty="0"/>
-          </a:p>
-        </p:txBody>
-      </p:sp>
-      <p:sp>
-        <p:nvSpPr>
-          <p:cNvPr id="44" name="Shape 42"/>
-          <p:cNvSpPr/>
-          <p:nvPr/>
-        </p:nvSpPr>
-        <p:spPr>
-          <a:xfrm>
-            <a:off x="6821424" y="4069080"/>
-            <a:ext cx="868680" cy="658368"/>
-          </a:xfrm>
-          <a:prstGeom prst="rect">
-            <a:avLst/>
-          </a:prstGeom>
-          <a:solidFill>
-            <a:srgbClr val="1A1005"/>
-          </a:solidFill>
-          <a:ln w="19050">
-            <a:solidFill>
-              <a:srgbClr val="F59E0B"/>
-            </a:solidFill>
-            <a:prstDash val="solid"/>
-          </a:ln>
-        </p:spPr>
-      </p:sp>
-      <p:sp>
-        <p:nvSpPr>
-          <p:cNvPr id="45" name="Text 43"/>
-          <p:cNvSpPr/>
-          <p:nvPr/>
-        </p:nvSpPr>
-        <p:spPr>
-          <a:xfrm>
-            <a:off x="6821424" y="4114800"/>
-            <a:ext cx="868680" cy="274320"/>
-          </a:xfrm>
-          <a:prstGeom prst="rect">
-            <a:avLst/>
-          </a:prstGeom>
-          <a:noFill/>
-          <a:ln/>
-        </p:spPr>
-        <p:txBody>
-          <a:bodyPr wrap="square" rtlCol="0" anchor="ctr"/>
-          <a:lstStyle/>
-          <a:p>
-            <a:pPr algn="ctr" indent="0" marL="0">
-              <a:buNone/>
-            </a:pPr>
-            <a:r>
-              <a:rPr lang="en-US" sz="1000" b="1" dirty="0">
-                <a:solidFill>
-                  <a:srgbClr val="FFFFFF"/>
-                </a:solidFill>
-                <a:latin typeface="Trebuchet MS" pitchFamily="34" charset="0"/>
-                <a:ea typeface="Trebuchet MS" pitchFamily="34" charset="-122"/>
-                <a:cs typeface="Trebuchet MS" pitchFamily="34" charset="-120"/>
-              </a:rPr>
-              <a:t>Gemini</a:t>
-            </a:r>
-            <a:endParaRPr lang="en-US" sz="1000" dirty="0"/>
-          </a:p>
-        </p:txBody>
-      </p:sp>
-      <p:sp>
-        <p:nvSpPr>
-          <p:cNvPr id="46" name="Text 44"/>
-          <p:cNvSpPr/>
-          <p:nvPr/>
-        </p:nvSpPr>
-        <p:spPr>
-          <a:xfrm>
-            <a:off x="6821424" y="4416552"/>
-            <a:ext cx="868680" cy="228600"/>
-          </a:xfrm>
-          <a:prstGeom prst="rect">
-            <a:avLst/>
-          </a:prstGeom>
-          <a:noFill/>
-          <a:ln/>
-        </p:spPr>
-        <p:txBody>
-          <a:bodyPr wrap="square" rtlCol="0" anchor="ctr"/>
-          <a:lstStyle/>
-          <a:p>
-            <a:pPr algn="ctr" indent="0" marL="0">
-              <a:buNone/>
-            </a:pPr>
-            <a:r>
-              <a:rPr lang="en-US" sz="850" dirty="0">
-                <a:solidFill>
-                  <a:srgbClr val="94A3B8"/>
-                </a:solidFill>
-                <a:latin typeface="Calibri" pitchFamily="34" charset="0"/>
-                <a:ea typeface="Calibri" pitchFamily="34" charset="-122"/>
-                <a:cs typeface="Calibri" pitchFamily="34" charset="-120"/>
-              </a:rPr>
-              <a:t>Google</a:t>
-            </a:r>
-            <a:endParaRPr lang="en-US" sz="850" dirty="0"/>
-          </a:p>
-        </p:txBody>
-      </p:sp>
-      <p:sp>
-        <p:nvSpPr>
-          <p:cNvPr id="47" name="Shape 45"/>
-          <p:cNvSpPr/>
-          <p:nvPr/>
-        </p:nvSpPr>
-        <p:spPr>
-          <a:xfrm>
-            <a:off x="7808976" y="4069080"/>
-            <a:ext cx="868680" cy="658368"/>
-          </a:xfrm>
-          <a:prstGeom prst="rect">
-            <a:avLst/>
-          </a:prstGeom>
-          <a:solidFill>
-            <a:srgbClr val="0A1A2A"/>
-          </a:solidFill>
-          <a:ln w="19050">
-            <a:solidFill>
-              <a:srgbClr val="0891B2"/>
-            </a:solidFill>
-            <a:prstDash val="solid"/>
-          </a:ln>
-        </p:spPr>
-      </p:sp>
-      <p:sp>
-        <p:nvSpPr>
-          <p:cNvPr id="48" name="Text 46"/>
-          <p:cNvSpPr/>
-          <p:nvPr/>
-        </p:nvSpPr>
-        <p:spPr>
-          <a:xfrm>
-            <a:off x="7808976" y="4114800"/>
-            <a:ext cx="868680" cy="274320"/>
-          </a:xfrm>
-          <a:prstGeom prst="rect">
-            <a:avLst/>
-          </a:prstGeom>
-          <a:noFill/>
-          <a:ln/>
-        </p:spPr>
-        <p:txBody>
-          <a:bodyPr wrap="square" rtlCol="0" anchor="ctr"/>
-          <a:lstStyle/>
-          <a:p>
-            <a:pPr algn="ctr" indent="0" marL="0">
-              <a:buNone/>
-            </a:pPr>
-            <a:r>
-              <a:rPr lang="en-US" sz="1000" b="1" dirty="0">
-                <a:solidFill>
-                  <a:srgbClr val="FFFFFF"/>
-                </a:solidFill>
-                <a:latin typeface="Trebuchet MS" pitchFamily="34" charset="0"/>
-                <a:ea typeface="Trebuchet MS" pitchFamily="34" charset="-122"/>
-                <a:cs typeface="Trebuchet MS" pitchFamily="34" charset="-120"/>
-              </a:rPr>
-              <a:t>Llama</a:t>
-            </a:r>
-            <a:endParaRPr lang="en-US" sz="1000" dirty="0"/>
-          </a:p>
-        </p:txBody>
-      </p:sp>
-      <p:sp>
-        <p:nvSpPr>
-          <p:cNvPr id="49" name="Text 47"/>
-          <p:cNvSpPr/>
-          <p:nvPr/>
-        </p:nvSpPr>
-        <p:spPr>
-          <a:xfrm>
-            <a:off x="7808976" y="4416552"/>
-            <a:ext cx="868680" cy="228600"/>
-          </a:xfrm>
-          <a:prstGeom prst="rect">
-            <a:avLst/>
-          </a:prstGeom>
-          <a:noFill/>
-          <a:ln/>
-        </p:spPr>
-        <p:txBody>
-          <a:bodyPr wrap="square" rtlCol="0" anchor="ctr"/>
-          <a:lstStyle/>
-          <a:p>
-            <a:pPr algn="ctr" indent="0" marL="0">
-              <a:buNone/>
-            </a:pPr>
-            <a:r>
-              <a:rPr lang="en-US" sz="850" dirty="0">
-                <a:solidFill>
-                  <a:srgbClr val="94A3B8"/>
-                </a:solidFill>
-                <a:latin typeface="Calibri" pitchFamily="34" charset="0"/>
-                <a:ea typeface="Calibri" pitchFamily="34" charset="-122"/>
-                <a:cs typeface="Calibri" pitchFamily="34" charset="-120"/>
-              </a:rPr>
-              <a:t>Local</a:t>
-            </a:r>
-            <a:endParaRPr lang="en-US" sz="850" dirty="0"/>
-          </a:p>
-        </p:txBody>
-      </p:sp>
-    </p:spTree>
-  </p:cSld>
-  <p:clrMapOvr>
-    <a:masterClrMapping/>
-  </p:clrMapOvr>
-</p:sld>
-</file>
-
-<file path=ppt/slides/slide18.xml><?xml version="1.0" encoding="utf-8"?>
-<p:sld xmlns:a="http://schemas.openxmlformats.org/drawingml/2006/main" xmlns:r="http://schemas.openxmlformats.org/officeDocument/2006/relationships" xmlns:p="http://schemas.openxmlformats.org/presentationml/2006/main">
   <p:cSld name="Slide 18">
     <p:bg>
       <p:bgPr>
@@ -12970,7 +11159,7 @@
 </p:sld>
 </file>
 
-<file path=ppt/slides/slide19.xml><?xml version="1.0" encoding="utf-8"?>
+<file path=ppt/slides/slide18.xml><?xml version="1.0" encoding="utf-8"?>
 <p:sld xmlns:a="http://schemas.openxmlformats.org/drawingml/2006/main" xmlns:r="http://schemas.openxmlformats.org/officeDocument/2006/relationships" xmlns:p="http://schemas.openxmlformats.org/presentationml/2006/main">
   <p:cSld name="Slide 19">
     <p:bg>
@@ -14010,6 +12199,934 @@
               <a:t>Add observability + logging</a:t>
             </a:r>
             <a:endParaRPr lang="en-US" sz="1100" dirty="0"/>
+          </a:p>
+        </p:txBody>
+      </p:sp>
+    </p:spTree>
+  </p:cSld>
+  <p:clrMapOvr>
+    <a:masterClrMapping/>
+  </p:clrMapOvr>
+</p:sld>
+</file>
+
+<file path=ppt/slides/slide19.xml><?xml version="1.0" encoding="utf-8"?>
+<p:sld xmlns:a="http://schemas.openxmlformats.org/drawingml/2006/main" xmlns:r="http://schemas.openxmlformats.org/officeDocument/2006/relationships" xmlns:p="http://schemas.openxmlformats.org/presentationml/2006/main">
+  <p:cSld name="Slide 20">
+    <p:bg>
+      <p:bgPr>
+        <a:solidFill>
+          <a:srgbClr val="FFFFFF"/>
+        </a:solidFill>
+      </p:bgPr>
+    </p:bg>
+    <p:spTree>
+      <p:nvGrpSpPr>
+        <p:cNvPr id="1" name=""/>
+        <p:cNvGrpSpPr/>
+        <p:nvPr/>
+      </p:nvGrpSpPr>
+      <p:grpSpPr>
+        <a:xfrm>
+          <a:off x="0" y="0"/>
+          <a:ext cx="0" cy="0"/>
+          <a:chOff x="0" y="0"/>
+          <a:chExt cx="0" cy="0"/>
+        </a:xfrm>
+      </p:grpSpPr>
+      <p:sp>
+        <p:nvSpPr>
+          <p:cNvPr id="2" name="Shape 0"/>
+          <p:cNvSpPr/>
+          <p:nvPr/>
+        </p:nvSpPr>
+        <p:spPr>
+          <a:xfrm>
+            <a:off x="0" y="0"/>
+            <a:ext cx="9144000" cy="64008"/>
+          </a:xfrm>
+          <a:prstGeom prst="rect">
+            <a:avLst/>
+          </a:prstGeom>
+          <a:solidFill>
+            <a:srgbClr val="0891B2"/>
+          </a:solidFill>
+          <a:ln w="12700">
+            <a:solidFill>
+              <a:srgbClr val="0891B2"/>
+            </a:solidFill>
+            <a:prstDash val="solid"/>
+          </a:ln>
+        </p:spPr>
+      </p:sp>
+      <p:sp>
+        <p:nvSpPr>
+          <p:cNvPr id="3" name="Text 1"/>
+          <p:cNvSpPr/>
+          <p:nvPr/>
+        </p:nvSpPr>
+        <p:spPr>
+          <a:xfrm>
+            <a:off x="457200" y="228600"/>
+            <a:ext cx="8229600" cy="502920"/>
+          </a:xfrm>
+          <a:prstGeom prst="rect">
+            <a:avLst/>
+          </a:prstGeom>
+          <a:noFill/>
+          <a:ln/>
+        </p:spPr>
+        <p:txBody>
+          <a:bodyPr wrap="square" rtlCol="0" anchor="ctr"/>
+          <a:lstStyle/>
+          <a:p>
+            <a:pPr indent="0" marL="0">
+              <a:buNone/>
+            </a:pPr>
+            <a:r>
+              <a:rPr lang="en-US" sz="3200" b="1" dirty="0">
+                <a:solidFill>
+                  <a:srgbClr val="0F172A"/>
+                </a:solidFill>
+                <a:latin typeface="Trebuchet MS" pitchFamily="34" charset="0"/>
+                <a:ea typeface="Trebuchet MS" pitchFamily="34" charset="-122"/>
+                <a:cs typeface="Trebuchet MS" pitchFamily="34" charset="-120"/>
+              </a:rPr>
+              <a:t>Resources &amp; Next Steps</a:t>
+            </a:r>
+            <a:endParaRPr lang="en-US" sz="3200" dirty="0"/>
+          </a:p>
+        </p:txBody>
+      </p:sp>
+      <p:sp>
+        <p:nvSpPr>
+          <p:cNvPr id="4" name="Shape 2"/>
+          <p:cNvSpPr/>
+          <p:nvPr/>
+        </p:nvSpPr>
+        <p:spPr>
+          <a:xfrm>
+            <a:off x="320040" y="960120"/>
+            <a:ext cx="1965960" cy="3520440"/>
+          </a:xfrm>
+          <a:prstGeom prst="rect">
+            <a:avLst/>
+          </a:prstGeom>
+          <a:solidFill>
+            <a:srgbClr val="E3F2FD"/>
+          </a:solidFill>
+          <a:ln w="19050">
+            <a:solidFill>
+              <a:srgbClr val="1E88E5"/>
+            </a:solidFill>
+            <a:prstDash val="solid"/>
+          </a:ln>
+          <a:effectLst>
+            <a:outerShdw sx="100000" sy="100000" kx="0" ky="0" algn="bl" rotWithShape="0" blurRad="76200" dist="25400" dir="8100000">
+              <a:srgbClr val="000000">
+                <a:alpha val="10000"/>
+              </a:srgbClr>
+            </a:outerShdw>
+          </a:effectLst>
+        </p:spPr>
+      </p:sp>
+      <p:sp>
+        <p:nvSpPr>
+          <p:cNvPr id="5" name="Text 3"/>
+          <p:cNvSpPr/>
+          <p:nvPr/>
+        </p:nvSpPr>
+        <p:spPr>
+          <a:xfrm>
+            <a:off x="429768" y="1051560"/>
+            <a:ext cx="1737360" cy="384048"/>
+          </a:xfrm>
+          <a:prstGeom prst="rect">
+            <a:avLst/>
+          </a:prstGeom>
+          <a:noFill/>
+          <a:ln/>
+        </p:spPr>
+        <p:txBody>
+          <a:bodyPr wrap="square" rtlCol="0" anchor="ctr"/>
+          <a:lstStyle/>
+          <a:p>
+            <a:pPr indent="0" marL="0">
+              <a:buNone/>
+            </a:pPr>
+            <a:r>
+              <a:rPr lang="en-US" sz="1250" b="1" dirty="0">
+                <a:solidFill>
+                  <a:srgbClr val="0F172A"/>
+                </a:solidFill>
+                <a:latin typeface="Trebuchet MS" pitchFamily="34" charset="0"/>
+                <a:ea typeface="Trebuchet MS" pitchFamily="34" charset="-122"/>
+                <a:cs typeface="Trebuchet MS" pitchFamily="34" charset="-120"/>
+              </a:rPr>
+              <a:t>🔌  SDKs &amp; APIs</a:t>
+            </a:r>
+            <a:endParaRPr lang="en-US" sz="1250" dirty="0"/>
+          </a:p>
+        </p:txBody>
+      </p:sp>
+      <p:sp>
+        <p:nvSpPr>
+          <p:cNvPr id="6" name="Shape 4"/>
+          <p:cNvSpPr/>
+          <p:nvPr/>
+        </p:nvSpPr>
+        <p:spPr>
+          <a:xfrm>
+            <a:off x="429768" y="1463040"/>
+            <a:ext cx="1719072" cy="9144"/>
+          </a:xfrm>
+          <a:prstGeom prst="rect">
+            <a:avLst/>
+          </a:prstGeom>
+          <a:solidFill>
+            <a:srgbClr val="1E88E5"/>
+          </a:solidFill>
+          <a:ln w="12700">
+            <a:solidFill>
+              <a:srgbClr val="1E88E5">
+                <a:alpha val="60000"/>
+              </a:srgbClr>
+            </a:solidFill>
+            <a:prstDash val="solid"/>
+          </a:ln>
+        </p:spPr>
+      </p:sp>
+      <p:sp>
+        <p:nvSpPr>
+          <p:cNvPr id="7" name="Text 5"/>
+          <p:cNvSpPr/>
+          <p:nvPr/>
+        </p:nvSpPr>
+        <p:spPr>
+          <a:xfrm>
+            <a:off x="429768" y="1581912"/>
+            <a:ext cx="1755648" cy="2724912"/>
+          </a:xfrm>
+          <a:prstGeom prst="rect">
+            <a:avLst/>
+          </a:prstGeom>
+          <a:noFill/>
+          <a:ln/>
+        </p:spPr>
+        <p:txBody>
+          <a:bodyPr wrap="square" rtlCol="0" anchor="ctr"/>
+          <a:lstStyle/>
+          <a:p>
+            <a:pPr marL="342900" indent="-342900">
+              <a:buSzPct val="100000"/>
+              <a:buChar char="•"/>
+            </a:pPr>
+            <a:r>
+              <a:rPr lang="en-US" sz="1100" dirty="0">
+                <a:solidFill>
+                  <a:srgbClr val="334155"/>
+                </a:solidFill>
+                <a:latin typeface="Calibri" pitchFamily="34" charset="0"/>
+                <a:ea typeface="Calibri" pitchFamily="34" charset="-122"/>
+                <a:cs typeface="Calibri" pitchFamily="34" charset="-120"/>
+              </a:rPr>
+              <a:t>Anthropic SDK (Python &amp; JS)</a:t>
+            </a:r>
+            <a:endParaRPr lang="en-US" sz="1100" dirty="0"/>
+          </a:p>
+          <a:p>
+            <a:pPr marL="342900" indent="-342900">
+              <a:buSzPct val="100000"/>
+              <a:buChar char="•"/>
+            </a:pPr>
+            <a:r>
+              <a:rPr lang="en-US" sz="1100" dirty="0">
+                <a:solidFill>
+                  <a:srgbClr val="334155"/>
+                </a:solidFill>
+                <a:latin typeface="Calibri" pitchFamily="34" charset="0"/>
+                <a:ea typeface="Calibri" pitchFamily="34" charset="-122"/>
+                <a:cs typeface="Calibri" pitchFamily="34" charset="-120"/>
+              </a:rPr>
+              <a:t>OpenAI SDK</a:t>
+            </a:r>
+            <a:endParaRPr lang="en-US" sz="1100" dirty="0"/>
+          </a:p>
+          <a:p>
+            <a:pPr marL="342900" indent="-342900">
+              <a:buSzPct val="100000"/>
+              <a:buChar char="•"/>
+            </a:pPr>
+            <a:r>
+              <a:rPr lang="en-US" sz="1100" dirty="0">
+                <a:solidFill>
+                  <a:srgbClr val="334155"/>
+                </a:solidFill>
+                <a:latin typeface="Calibri" pitchFamily="34" charset="0"/>
+                <a:ea typeface="Calibri" pitchFamily="34" charset="-122"/>
+                <a:cs typeface="Calibri" pitchFamily="34" charset="-120"/>
+              </a:rPr>
+              <a:t>Ollama (run models locally)</a:t>
+            </a:r>
+            <a:endParaRPr lang="en-US" sz="1100" dirty="0"/>
+          </a:p>
+          <a:p>
+            <a:pPr marL="342900" indent="-342900">
+              <a:buSzPct val="100000"/>
+              <a:buChar char="•"/>
+            </a:pPr>
+            <a:r>
+              <a:rPr lang="en-US" sz="1100" dirty="0">
+                <a:solidFill>
+                  <a:srgbClr val="334155"/>
+                </a:solidFill>
+                <a:latin typeface="Calibri" pitchFamily="34" charset="0"/>
+                <a:ea typeface="Calibri" pitchFamily="34" charset="-122"/>
+                <a:cs typeface="Calibri" pitchFamily="34" charset="-120"/>
+              </a:rPr>
+              <a:t>Google Generative AI SDK</a:t>
+            </a:r>
+            <a:endParaRPr lang="en-US" sz="1100" dirty="0"/>
+          </a:p>
+        </p:txBody>
+      </p:sp>
+      <p:sp>
+        <p:nvSpPr>
+          <p:cNvPr id="8" name="Shape 6"/>
+          <p:cNvSpPr/>
+          <p:nvPr/>
+        </p:nvSpPr>
+        <p:spPr>
+          <a:xfrm>
+            <a:off x="2468880" y="960120"/>
+            <a:ext cx="1965960" cy="3520440"/>
+          </a:xfrm>
+          <a:prstGeom prst="rect">
+            <a:avLst/>
+          </a:prstGeom>
+          <a:solidFill>
+            <a:srgbClr val="EDE7F6"/>
+          </a:solidFill>
+          <a:ln w="19050">
+            <a:solidFill>
+              <a:srgbClr val="7E57C2"/>
+            </a:solidFill>
+            <a:prstDash val="solid"/>
+          </a:ln>
+          <a:effectLst>
+            <a:outerShdw sx="100000" sy="100000" kx="0" ky="0" algn="bl" rotWithShape="0" blurRad="76200" dist="25400" dir="8100000">
+              <a:srgbClr val="000000">
+                <a:alpha val="10000"/>
+              </a:srgbClr>
+            </a:outerShdw>
+          </a:effectLst>
+        </p:spPr>
+      </p:sp>
+      <p:sp>
+        <p:nvSpPr>
+          <p:cNvPr id="9" name="Text 7"/>
+          <p:cNvSpPr/>
+          <p:nvPr/>
+        </p:nvSpPr>
+        <p:spPr>
+          <a:xfrm>
+            <a:off x="2578608" y="1051560"/>
+            <a:ext cx="1737360" cy="384048"/>
+          </a:xfrm>
+          <a:prstGeom prst="rect">
+            <a:avLst/>
+          </a:prstGeom>
+          <a:noFill/>
+          <a:ln/>
+        </p:spPr>
+        <p:txBody>
+          <a:bodyPr wrap="square" rtlCol="0" anchor="ctr"/>
+          <a:lstStyle/>
+          <a:p>
+            <a:pPr indent="0" marL="0">
+              <a:buNone/>
+            </a:pPr>
+            <a:r>
+              <a:rPr lang="en-US" sz="1250" b="1" dirty="0">
+                <a:solidFill>
+                  <a:srgbClr val="0F172A"/>
+                </a:solidFill>
+                <a:latin typeface="Trebuchet MS" pitchFamily="34" charset="0"/>
+                <a:ea typeface="Trebuchet MS" pitchFamily="34" charset="-122"/>
+                <a:cs typeface="Trebuchet MS" pitchFamily="34" charset="-120"/>
+              </a:rPr>
+              <a:t>🤖  Frameworks</a:t>
+            </a:r>
+            <a:endParaRPr lang="en-US" sz="1250" dirty="0"/>
+          </a:p>
+        </p:txBody>
+      </p:sp>
+      <p:sp>
+        <p:nvSpPr>
+          <p:cNvPr id="10" name="Shape 8"/>
+          <p:cNvSpPr/>
+          <p:nvPr/>
+        </p:nvSpPr>
+        <p:spPr>
+          <a:xfrm>
+            <a:off x="2578608" y="1463040"/>
+            <a:ext cx="1719072" cy="9144"/>
+          </a:xfrm>
+          <a:prstGeom prst="rect">
+            <a:avLst/>
+          </a:prstGeom>
+          <a:solidFill>
+            <a:srgbClr val="7E57C2"/>
+          </a:solidFill>
+          <a:ln w="12700">
+            <a:solidFill>
+              <a:srgbClr val="7E57C2">
+                <a:alpha val="60000"/>
+              </a:srgbClr>
+            </a:solidFill>
+            <a:prstDash val="solid"/>
+          </a:ln>
+        </p:spPr>
+      </p:sp>
+      <p:sp>
+        <p:nvSpPr>
+          <p:cNvPr id="11" name="Text 9"/>
+          <p:cNvSpPr/>
+          <p:nvPr/>
+        </p:nvSpPr>
+        <p:spPr>
+          <a:xfrm>
+            <a:off x="2578608" y="1581912"/>
+            <a:ext cx="1755648" cy="2724912"/>
+          </a:xfrm>
+          <a:prstGeom prst="rect">
+            <a:avLst/>
+          </a:prstGeom>
+          <a:noFill/>
+          <a:ln/>
+        </p:spPr>
+        <p:txBody>
+          <a:bodyPr wrap="square" rtlCol="0" anchor="ctr"/>
+          <a:lstStyle/>
+          <a:p>
+            <a:pPr marL="342900" indent="-342900">
+              <a:buSzPct val="100000"/>
+              <a:buChar char="•"/>
+            </a:pPr>
+            <a:r>
+              <a:rPr lang="en-US" sz="1100" dirty="0">
+                <a:solidFill>
+                  <a:srgbClr val="334155"/>
+                </a:solidFill>
+                <a:latin typeface="Calibri" pitchFamily="34" charset="0"/>
+                <a:ea typeface="Calibri" pitchFamily="34" charset="-122"/>
+                <a:cs typeface="Calibri" pitchFamily="34" charset="-120"/>
+              </a:rPr>
+              <a:t>LangChain / LangGraph</a:t>
+            </a:r>
+            <a:endParaRPr lang="en-US" sz="1100" dirty="0"/>
+          </a:p>
+          <a:p>
+            <a:pPr marL="342900" indent="-342900">
+              <a:buSzPct val="100000"/>
+              <a:buChar char="•"/>
+            </a:pPr>
+            <a:r>
+              <a:rPr lang="en-US" sz="1100" dirty="0">
+                <a:solidFill>
+                  <a:srgbClr val="334155"/>
+                </a:solidFill>
+                <a:latin typeface="Calibri" pitchFamily="34" charset="0"/>
+                <a:ea typeface="Calibri" pitchFamily="34" charset="-122"/>
+                <a:cs typeface="Calibri" pitchFamily="34" charset="-120"/>
+              </a:rPr>
+              <a:t>CrewAI (multi-agent)</a:t>
+            </a:r>
+            <a:endParaRPr lang="en-US" sz="1100" dirty="0"/>
+          </a:p>
+          <a:p>
+            <a:pPr marL="342900" indent="-342900">
+              <a:buSzPct val="100000"/>
+              <a:buChar char="•"/>
+            </a:pPr>
+            <a:r>
+              <a:rPr lang="en-US" sz="1100" dirty="0">
+                <a:solidFill>
+                  <a:srgbClr val="334155"/>
+                </a:solidFill>
+                <a:latin typeface="Calibri" pitchFamily="34" charset="0"/>
+                <a:ea typeface="Calibri" pitchFamily="34" charset="-122"/>
+                <a:cs typeface="Calibri" pitchFamily="34" charset="-120"/>
+              </a:rPr>
+              <a:t>AutoGen (Microsoft)</a:t>
+            </a:r>
+            <a:endParaRPr lang="en-US" sz="1100" dirty="0"/>
+          </a:p>
+          <a:p>
+            <a:pPr marL="342900" indent="-342900">
+              <a:buSzPct val="100000"/>
+              <a:buChar char="•"/>
+            </a:pPr>
+            <a:r>
+              <a:rPr lang="en-US" sz="1100" dirty="0">
+                <a:solidFill>
+                  <a:srgbClr val="334155"/>
+                </a:solidFill>
+                <a:latin typeface="Calibri" pitchFamily="34" charset="0"/>
+                <a:ea typeface="Calibri" pitchFamily="34" charset="-122"/>
+                <a:cs typeface="Calibri" pitchFamily="34" charset="-120"/>
+              </a:rPr>
+              <a:t>Semantic Kernel (.NET/Python)</a:t>
+            </a:r>
+            <a:endParaRPr lang="en-US" sz="1100" dirty="0"/>
+          </a:p>
+        </p:txBody>
+      </p:sp>
+      <p:sp>
+        <p:nvSpPr>
+          <p:cNvPr id="12" name="Shape 10"/>
+          <p:cNvSpPr/>
+          <p:nvPr/>
+        </p:nvSpPr>
+        <p:spPr>
+          <a:xfrm>
+            <a:off x="4617720" y="960120"/>
+            <a:ext cx="1965960" cy="3520440"/>
+          </a:xfrm>
+          <a:prstGeom prst="rect">
+            <a:avLst/>
+          </a:prstGeom>
+          <a:solidFill>
+            <a:srgbClr val="E8F5E9"/>
+          </a:solidFill>
+          <a:ln w="19050">
+            <a:solidFill>
+              <a:srgbClr val="43A047"/>
+            </a:solidFill>
+            <a:prstDash val="solid"/>
+          </a:ln>
+          <a:effectLst>
+            <a:outerShdw sx="100000" sy="100000" kx="0" ky="0" algn="bl" rotWithShape="0" blurRad="76200" dist="25400" dir="8100000">
+              <a:srgbClr val="000000">
+                <a:alpha val="10000"/>
+              </a:srgbClr>
+            </a:outerShdw>
+          </a:effectLst>
+        </p:spPr>
+      </p:sp>
+      <p:sp>
+        <p:nvSpPr>
+          <p:cNvPr id="13" name="Text 11"/>
+          <p:cNvSpPr/>
+          <p:nvPr/>
+        </p:nvSpPr>
+        <p:spPr>
+          <a:xfrm>
+            <a:off x="4727448" y="1051560"/>
+            <a:ext cx="1737360" cy="384048"/>
+          </a:xfrm>
+          <a:prstGeom prst="rect">
+            <a:avLst/>
+          </a:prstGeom>
+          <a:noFill/>
+          <a:ln/>
+        </p:spPr>
+        <p:txBody>
+          <a:bodyPr wrap="square" rtlCol="0" anchor="ctr"/>
+          <a:lstStyle/>
+          <a:p>
+            <a:pPr indent="0" marL="0">
+              <a:buNone/>
+            </a:pPr>
+            <a:r>
+              <a:rPr lang="en-US" sz="1250" b="1" dirty="0">
+                <a:solidFill>
+                  <a:srgbClr val="0F172A"/>
+                </a:solidFill>
+                <a:latin typeface="Trebuchet MS" pitchFamily="34" charset="0"/>
+                <a:ea typeface="Trebuchet MS" pitchFamily="34" charset="-122"/>
+                <a:cs typeface="Trebuchet MS" pitchFamily="34" charset="-120"/>
+              </a:rPr>
+              <a:t>📚  Learning</a:t>
+            </a:r>
+            <a:endParaRPr lang="en-US" sz="1250" dirty="0"/>
+          </a:p>
+        </p:txBody>
+      </p:sp>
+      <p:sp>
+        <p:nvSpPr>
+          <p:cNvPr id="14" name="Shape 12"/>
+          <p:cNvSpPr/>
+          <p:nvPr/>
+        </p:nvSpPr>
+        <p:spPr>
+          <a:xfrm>
+            <a:off x="4727448" y="1463040"/>
+            <a:ext cx="1719072" cy="9144"/>
+          </a:xfrm>
+          <a:prstGeom prst="rect">
+            <a:avLst/>
+          </a:prstGeom>
+          <a:solidFill>
+            <a:srgbClr val="43A047"/>
+          </a:solidFill>
+          <a:ln w="12700">
+            <a:solidFill>
+              <a:srgbClr val="43A047">
+                <a:alpha val="60000"/>
+              </a:srgbClr>
+            </a:solidFill>
+            <a:prstDash val="solid"/>
+          </a:ln>
+        </p:spPr>
+      </p:sp>
+      <p:sp>
+        <p:nvSpPr>
+          <p:cNvPr id="15" name="Text 13"/>
+          <p:cNvSpPr/>
+          <p:nvPr/>
+        </p:nvSpPr>
+        <p:spPr>
+          <a:xfrm>
+            <a:off x="4727448" y="1581912"/>
+            <a:ext cx="1755648" cy="2724912"/>
+          </a:xfrm>
+          <a:prstGeom prst="rect">
+            <a:avLst/>
+          </a:prstGeom>
+          <a:noFill/>
+          <a:ln/>
+        </p:spPr>
+        <p:txBody>
+          <a:bodyPr wrap="square" rtlCol="0" anchor="ctr"/>
+          <a:lstStyle/>
+          <a:p>
+            <a:pPr marL="342900" indent="-342900">
+              <a:buSzPct val="100000"/>
+              <a:buChar char="•"/>
+            </a:pPr>
+            <a:r>
+              <a:rPr lang="en-US" sz="1100" dirty="0">
+                <a:solidFill>
+                  <a:srgbClr val="334155"/>
+                </a:solidFill>
+                <a:latin typeface="Calibri" pitchFamily="34" charset="0"/>
+                <a:ea typeface="Calibri" pitchFamily="34" charset="-122"/>
+                <a:cs typeface="Calibri" pitchFamily="34" charset="-120"/>
+              </a:rPr>
+              <a:t>docs.anthropic.com</a:t>
+            </a:r>
+            <a:endParaRPr lang="en-US" sz="1100" dirty="0"/>
+          </a:p>
+          <a:p>
+            <a:pPr marL="342900" indent="-342900">
+              <a:buSzPct val="100000"/>
+              <a:buChar char="•"/>
+            </a:pPr>
+            <a:r>
+              <a:rPr lang="en-US" sz="1100" dirty="0">
+                <a:solidFill>
+                  <a:srgbClr val="334155"/>
+                </a:solidFill>
+                <a:latin typeface="Calibri" pitchFamily="34" charset="0"/>
+                <a:ea typeface="Calibri" pitchFamily="34" charset="-122"/>
+                <a:cs typeface="Calibri" pitchFamily="34" charset="-120"/>
+              </a:rPr>
+              <a:t>DeepLearning.ai short courses</a:t>
+            </a:r>
+            <a:endParaRPr lang="en-US" sz="1100" dirty="0"/>
+          </a:p>
+          <a:p>
+            <a:pPr marL="342900" indent="-342900">
+              <a:buSzPct val="100000"/>
+              <a:buChar char="•"/>
+            </a:pPr>
+            <a:r>
+              <a:rPr lang="en-US" sz="1100" dirty="0">
+                <a:solidFill>
+                  <a:srgbClr val="334155"/>
+                </a:solidFill>
+                <a:latin typeface="Calibri" pitchFamily="34" charset="0"/>
+                <a:ea typeface="Calibri" pitchFamily="34" charset="-122"/>
+                <a:cs typeface="Calibri" pitchFamily="34" charset="-120"/>
+              </a:rPr>
+              <a:t>Prompt Engineering Guide (promptingguide.ai)</a:t>
+            </a:r>
+            <a:endParaRPr lang="en-US" sz="1100" dirty="0"/>
+          </a:p>
+          <a:p>
+            <a:pPr marL="342900" indent="-342900">
+              <a:buSzPct val="100000"/>
+              <a:buChar char="•"/>
+            </a:pPr>
+            <a:r>
+              <a:rPr lang="en-US" sz="1100" dirty="0">
+                <a:solidFill>
+                  <a:srgbClr val="334155"/>
+                </a:solidFill>
+                <a:latin typeface="Calibri" pitchFamily="34" charset="0"/>
+                <a:ea typeface="Calibri" pitchFamily="34" charset="-122"/>
+                <a:cs typeface="Calibri" pitchFamily="34" charset="-120"/>
+              </a:rPr>
+              <a:t>Anthropic cookbook (GitHub)</a:t>
+            </a:r>
+            <a:endParaRPr lang="en-US" sz="1100" dirty="0"/>
+          </a:p>
+        </p:txBody>
+      </p:sp>
+      <p:sp>
+        <p:nvSpPr>
+          <p:cNvPr id="16" name="Shape 14"/>
+          <p:cNvSpPr/>
+          <p:nvPr/>
+        </p:nvSpPr>
+        <p:spPr>
+          <a:xfrm>
+            <a:off x="6766560" y="960120"/>
+            <a:ext cx="1965960" cy="3520440"/>
+          </a:xfrm>
+          <a:prstGeom prst="rect">
+            <a:avLst/>
+          </a:prstGeom>
+          <a:solidFill>
+            <a:srgbClr val="FFF8E1"/>
+          </a:solidFill>
+          <a:ln w="19050">
+            <a:solidFill>
+              <a:srgbClr val="FFB300"/>
+            </a:solidFill>
+            <a:prstDash val="solid"/>
+          </a:ln>
+          <a:effectLst>
+            <a:outerShdw sx="100000" sy="100000" kx="0" ky="0" algn="bl" rotWithShape="0" blurRad="76200" dist="25400" dir="8100000">
+              <a:srgbClr val="000000">
+                <a:alpha val="10000"/>
+              </a:srgbClr>
+            </a:outerShdw>
+          </a:effectLst>
+        </p:spPr>
+      </p:sp>
+      <p:sp>
+        <p:nvSpPr>
+          <p:cNvPr id="17" name="Text 15"/>
+          <p:cNvSpPr/>
+          <p:nvPr/>
+        </p:nvSpPr>
+        <p:spPr>
+          <a:xfrm>
+            <a:off x="6876288" y="1051560"/>
+            <a:ext cx="1737360" cy="384048"/>
+          </a:xfrm>
+          <a:prstGeom prst="rect">
+            <a:avLst/>
+          </a:prstGeom>
+          <a:noFill/>
+          <a:ln/>
+        </p:spPr>
+        <p:txBody>
+          <a:bodyPr wrap="square" rtlCol="0" anchor="ctr"/>
+          <a:lstStyle/>
+          <a:p>
+            <a:pPr indent="0" marL="0">
+              <a:buNone/>
+            </a:pPr>
+            <a:r>
+              <a:rPr lang="en-US" sz="1250" b="1" dirty="0">
+                <a:solidFill>
+                  <a:srgbClr val="0F172A"/>
+                </a:solidFill>
+                <a:latin typeface="Trebuchet MS" pitchFamily="34" charset="0"/>
+                <a:ea typeface="Trebuchet MS" pitchFamily="34" charset="-122"/>
+                <a:cs typeface="Trebuchet MS" pitchFamily="34" charset="-120"/>
+              </a:rPr>
+              <a:t>🔍  Observability</a:t>
+            </a:r>
+            <a:endParaRPr lang="en-US" sz="1250" dirty="0"/>
+          </a:p>
+        </p:txBody>
+      </p:sp>
+      <p:sp>
+        <p:nvSpPr>
+          <p:cNvPr id="18" name="Shape 16"/>
+          <p:cNvSpPr/>
+          <p:nvPr/>
+        </p:nvSpPr>
+        <p:spPr>
+          <a:xfrm>
+            <a:off x="6876288" y="1463040"/>
+            <a:ext cx="1719072" cy="9144"/>
+          </a:xfrm>
+          <a:prstGeom prst="rect">
+            <a:avLst/>
+          </a:prstGeom>
+          <a:solidFill>
+            <a:srgbClr val="FFB300"/>
+          </a:solidFill>
+          <a:ln w="12700">
+            <a:solidFill>
+              <a:srgbClr val="FFB300">
+                <a:alpha val="60000"/>
+              </a:srgbClr>
+            </a:solidFill>
+            <a:prstDash val="solid"/>
+          </a:ln>
+        </p:spPr>
+      </p:sp>
+      <p:sp>
+        <p:nvSpPr>
+          <p:cNvPr id="19" name="Text 17"/>
+          <p:cNvSpPr/>
+          <p:nvPr/>
+        </p:nvSpPr>
+        <p:spPr>
+          <a:xfrm>
+            <a:off x="6876288" y="1581912"/>
+            <a:ext cx="1755648" cy="2724912"/>
+          </a:xfrm>
+          <a:prstGeom prst="rect">
+            <a:avLst/>
+          </a:prstGeom>
+          <a:noFill/>
+          <a:ln/>
+        </p:spPr>
+        <p:txBody>
+          <a:bodyPr wrap="square" rtlCol="0" anchor="ctr"/>
+          <a:lstStyle/>
+          <a:p>
+            <a:pPr marL="342900" indent="-342900">
+              <a:buSzPct val="100000"/>
+              <a:buChar char="•"/>
+            </a:pPr>
+            <a:r>
+              <a:rPr lang="en-US" sz="1100" dirty="0">
+                <a:solidFill>
+                  <a:srgbClr val="334155"/>
+                </a:solidFill>
+                <a:latin typeface="Calibri" pitchFamily="34" charset="0"/>
+                <a:ea typeface="Calibri" pitchFamily="34" charset="-122"/>
+                <a:cs typeface="Calibri" pitchFamily="34" charset="-120"/>
+              </a:rPr>
+              <a:t>LangSmith (LangChain tracing)</a:t>
+            </a:r>
+            <a:endParaRPr lang="en-US" sz="1100" dirty="0"/>
+          </a:p>
+          <a:p>
+            <a:pPr marL="342900" indent="-342900">
+              <a:buSzPct val="100000"/>
+              <a:buChar char="•"/>
+            </a:pPr>
+            <a:r>
+              <a:rPr lang="en-US" sz="1100" dirty="0">
+                <a:solidFill>
+                  <a:srgbClr val="334155"/>
+                </a:solidFill>
+                <a:latin typeface="Calibri" pitchFamily="34" charset="0"/>
+                <a:ea typeface="Calibri" pitchFamily="34" charset="-122"/>
+                <a:cs typeface="Calibri" pitchFamily="34" charset="-120"/>
+              </a:rPr>
+              <a:t>Weights &amp; Biases Traces</a:t>
+            </a:r>
+            <a:endParaRPr lang="en-US" sz="1100" dirty="0"/>
+          </a:p>
+          <a:p>
+            <a:pPr marL="342900" indent="-342900">
+              <a:buSzPct val="100000"/>
+              <a:buChar char="•"/>
+            </a:pPr>
+            <a:r>
+              <a:rPr lang="en-US" sz="1100" dirty="0">
+                <a:solidFill>
+                  <a:srgbClr val="334155"/>
+                </a:solidFill>
+                <a:latin typeface="Calibri" pitchFamily="34" charset="0"/>
+                <a:ea typeface="Calibri" pitchFamily="34" charset="-122"/>
+                <a:cs typeface="Calibri" pitchFamily="34" charset="-120"/>
+              </a:rPr>
+              <a:t>Helicone (proxy + analytics)</a:t>
+            </a:r>
+            <a:endParaRPr lang="en-US" sz="1100" dirty="0"/>
+          </a:p>
+          <a:p>
+            <a:pPr marL="342900" indent="-342900">
+              <a:buSzPct val="100000"/>
+              <a:buChar char="•"/>
+            </a:pPr>
+            <a:r>
+              <a:rPr lang="en-US" sz="1100" dirty="0">
+                <a:solidFill>
+                  <a:srgbClr val="334155"/>
+                </a:solidFill>
+                <a:latin typeface="Calibri" pitchFamily="34" charset="0"/>
+                <a:ea typeface="Calibri" pitchFamily="34" charset="-122"/>
+                <a:cs typeface="Calibri" pitchFamily="34" charset="-120"/>
+              </a:rPr>
+              <a:t>Braintrust (evals)</a:t>
+            </a:r>
+            <a:endParaRPr lang="en-US" sz="1100" dirty="0"/>
+          </a:p>
+        </p:txBody>
+      </p:sp>
+      <p:sp>
+        <p:nvSpPr>
+          <p:cNvPr id="20" name="Shape 18"/>
+          <p:cNvSpPr/>
+          <p:nvPr/>
+        </p:nvSpPr>
+        <p:spPr>
+          <a:xfrm>
+            <a:off x="320040" y="4617720"/>
+            <a:ext cx="8503920" cy="320040"/>
+          </a:xfrm>
+          <a:prstGeom prst="rect">
+            <a:avLst/>
+          </a:prstGeom>
+          <a:solidFill>
+            <a:srgbClr val="E0F7FA"/>
+          </a:solidFill>
+          <a:ln w="12700">
+            <a:solidFill>
+              <a:srgbClr val="0891B2"/>
+            </a:solidFill>
+            <a:prstDash val="solid"/>
+          </a:ln>
+        </p:spPr>
+      </p:sp>
+      <p:sp>
+        <p:nvSpPr>
+          <p:cNvPr id="21" name="Text 19"/>
+          <p:cNvSpPr/>
+          <p:nvPr/>
+        </p:nvSpPr>
+        <p:spPr>
+          <a:xfrm>
+            <a:off x="502920" y="4617720"/>
+            <a:ext cx="8229600" cy="320040"/>
+          </a:xfrm>
+          <a:prstGeom prst="rect">
+            <a:avLst/>
+          </a:prstGeom>
+          <a:noFill/>
+          <a:ln/>
+        </p:spPr>
+        <p:txBody>
+          <a:bodyPr wrap="square" rtlCol="0" anchor="ctr"/>
+          <a:lstStyle/>
+          <a:p>
+            <a:pPr indent="0" marL="0">
+              <a:buNone/>
+            </a:pPr>
+            <a:r>
+              <a:rPr lang="en-US" sz="1150" dirty="0">
+                <a:solidFill>
+                  <a:srgbClr val="334155"/>
+                </a:solidFill>
+                <a:latin typeface="Calibri" pitchFamily="34" charset="0"/>
+                <a:ea typeface="Calibri" pitchFamily="34" charset="-122"/>
+                <a:cs typeface="Calibri" pitchFamily="34" charset="-120"/>
+              </a:rPr>
+              <a:t>💡  Best way to learn: pick ONE real problem and solve it end-to-end. Start simple, measure, then add complexity.</a:t>
+            </a:r>
+            <a:endParaRPr lang="en-US" sz="1150" dirty="0"/>
           </a:p>
         </p:txBody>
       </p:sp>
@@ -15563,934 +14680,6 @@
 </file>
 
 <file path=ppt/slides/slide20.xml><?xml version="1.0" encoding="utf-8"?>
-<p:sld xmlns:a="http://schemas.openxmlformats.org/drawingml/2006/main" xmlns:r="http://schemas.openxmlformats.org/officeDocument/2006/relationships" xmlns:p="http://schemas.openxmlformats.org/presentationml/2006/main">
-  <p:cSld name="Slide 20">
-    <p:bg>
-      <p:bgPr>
-        <a:solidFill>
-          <a:srgbClr val="FFFFFF"/>
-        </a:solidFill>
-      </p:bgPr>
-    </p:bg>
-    <p:spTree>
-      <p:nvGrpSpPr>
-        <p:cNvPr id="1" name=""/>
-        <p:cNvGrpSpPr/>
-        <p:nvPr/>
-      </p:nvGrpSpPr>
-      <p:grpSpPr>
-        <a:xfrm>
-          <a:off x="0" y="0"/>
-          <a:ext cx="0" cy="0"/>
-          <a:chOff x="0" y="0"/>
-          <a:chExt cx="0" cy="0"/>
-        </a:xfrm>
-      </p:grpSpPr>
-      <p:sp>
-        <p:nvSpPr>
-          <p:cNvPr id="2" name="Shape 0"/>
-          <p:cNvSpPr/>
-          <p:nvPr/>
-        </p:nvSpPr>
-        <p:spPr>
-          <a:xfrm>
-            <a:off x="0" y="0"/>
-            <a:ext cx="9144000" cy="64008"/>
-          </a:xfrm>
-          <a:prstGeom prst="rect">
-            <a:avLst/>
-          </a:prstGeom>
-          <a:solidFill>
-            <a:srgbClr val="0891B2"/>
-          </a:solidFill>
-          <a:ln w="12700">
-            <a:solidFill>
-              <a:srgbClr val="0891B2"/>
-            </a:solidFill>
-            <a:prstDash val="solid"/>
-          </a:ln>
-        </p:spPr>
-      </p:sp>
-      <p:sp>
-        <p:nvSpPr>
-          <p:cNvPr id="3" name="Text 1"/>
-          <p:cNvSpPr/>
-          <p:nvPr/>
-        </p:nvSpPr>
-        <p:spPr>
-          <a:xfrm>
-            <a:off x="457200" y="228600"/>
-            <a:ext cx="8229600" cy="502920"/>
-          </a:xfrm>
-          <a:prstGeom prst="rect">
-            <a:avLst/>
-          </a:prstGeom>
-          <a:noFill/>
-          <a:ln/>
-        </p:spPr>
-        <p:txBody>
-          <a:bodyPr wrap="square" rtlCol="0" anchor="ctr"/>
-          <a:lstStyle/>
-          <a:p>
-            <a:pPr indent="0" marL="0">
-              <a:buNone/>
-            </a:pPr>
-            <a:r>
-              <a:rPr lang="en-US" sz="3200" b="1" dirty="0">
-                <a:solidFill>
-                  <a:srgbClr val="0F172A"/>
-                </a:solidFill>
-                <a:latin typeface="Trebuchet MS" pitchFamily="34" charset="0"/>
-                <a:ea typeface="Trebuchet MS" pitchFamily="34" charset="-122"/>
-                <a:cs typeface="Trebuchet MS" pitchFamily="34" charset="-120"/>
-              </a:rPr>
-              <a:t>Resources &amp; Next Steps</a:t>
-            </a:r>
-            <a:endParaRPr lang="en-US" sz="3200" dirty="0"/>
-          </a:p>
-        </p:txBody>
-      </p:sp>
-      <p:sp>
-        <p:nvSpPr>
-          <p:cNvPr id="4" name="Shape 2"/>
-          <p:cNvSpPr/>
-          <p:nvPr/>
-        </p:nvSpPr>
-        <p:spPr>
-          <a:xfrm>
-            <a:off x="320040" y="960120"/>
-            <a:ext cx="1965960" cy="3520440"/>
-          </a:xfrm>
-          <a:prstGeom prst="rect">
-            <a:avLst/>
-          </a:prstGeom>
-          <a:solidFill>
-            <a:srgbClr val="E3F2FD"/>
-          </a:solidFill>
-          <a:ln w="19050">
-            <a:solidFill>
-              <a:srgbClr val="1E88E5"/>
-            </a:solidFill>
-            <a:prstDash val="solid"/>
-          </a:ln>
-          <a:effectLst>
-            <a:outerShdw sx="100000" sy="100000" kx="0" ky="0" algn="bl" rotWithShape="0" blurRad="76200" dist="25400" dir="8100000">
-              <a:srgbClr val="000000">
-                <a:alpha val="10000"/>
-              </a:srgbClr>
-            </a:outerShdw>
-          </a:effectLst>
-        </p:spPr>
-      </p:sp>
-      <p:sp>
-        <p:nvSpPr>
-          <p:cNvPr id="5" name="Text 3"/>
-          <p:cNvSpPr/>
-          <p:nvPr/>
-        </p:nvSpPr>
-        <p:spPr>
-          <a:xfrm>
-            <a:off x="429768" y="1051560"/>
-            <a:ext cx="1737360" cy="384048"/>
-          </a:xfrm>
-          <a:prstGeom prst="rect">
-            <a:avLst/>
-          </a:prstGeom>
-          <a:noFill/>
-          <a:ln/>
-        </p:spPr>
-        <p:txBody>
-          <a:bodyPr wrap="square" rtlCol="0" anchor="ctr"/>
-          <a:lstStyle/>
-          <a:p>
-            <a:pPr indent="0" marL="0">
-              <a:buNone/>
-            </a:pPr>
-            <a:r>
-              <a:rPr lang="en-US" sz="1250" b="1" dirty="0">
-                <a:solidFill>
-                  <a:srgbClr val="0F172A"/>
-                </a:solidFill>
-                <a:latin typeface="Trebuchet MS" pitchFamily="34" charset="0"/>
-                <a:ea typeface="Trebuchet MS" pitchFamily="34" charset="-122"/>
-                <a:cs typeface="Trebuchet MS" pitchFamily="34" charset="-120"/>
-              </a:rPr>
-              <a:t>🔌  SDKs &amp; APIs</a:t>
-            </a:r>
-            <a:endParaRPr lang="en-US" sz="1250" dirty="0"/>
-          </a:p>
-        </p:txBody>
-      </p:sp>
-      <p:sp>
-        <p:nvSpPr>
-          <p:cNvPr id="6" name="Shape 4"/>
-          <p:cNvSpPr/>
-          <p:nvPr/>
-        </p:nvSpPr>
-        <p:spPr>
-          <a:xfrm>
-            <a:off x="429768" y="1463040"/>
-            <a:ext cx="1719072" cy="9144"/>
-          </a:xfrm>
-          <a:prstGeom prst="rect">
-            <a:avLst/>
-          </a:prstGeom>
-          <a:solidFill>
-            <a:srgbClr val="1E88E5"/>
-          </a:solidFill>
-          <a:ln w="12700">
-            <a:solidFill>
-              <a:srgbClr val="1E88E5">
-                <a:alpha val="60000"/>
-              </a:srgbClr>
-            </a:solidFill>
-            <a:prstDash val="solid"/>
-          </a:ln>
-        </p:spPr>
-      </p:sp>
-      <p:sp>
-        <p:nvSpPr>
-          <p:cNvPr id="7" name="Text 5"/>
-          <p:cNvSpPr/>
-          <p:nvPr/>
-        </p:nvSpPr>
-        <p:spPr>
-          <a:xfrm>
-            <a:off x="429768" y="1581912"/>
-            <a:ext cx="1755648" cy="2724912"/>
-          </a:xfrm>
-          <a:prstGeom prst="rect">
-            <a:avLst/>
-          </a:prstGeom>
-          <a:noFill/>
-          <a:ln/>
-        </p:spPr>
-        <p:txBody>
-          <a:bodyPr wrap="square" rtlCol="0" anchor="ctr"/>
-          <a:lstStyle/>
-          <a:p>
-            <a:pPr marL="342900" indent="-342900">
-              <a:buSzPct val="100000"/>
-              <a:buChar char="•"/>
-            </a:pPr>
-            <a:r>
-              <a:rPr lang="en-US" sz="1100" dirty="0">
-                <a:solidFill>
-                  <a:srgbClr val="334155"/>
-                </a:solidFill>
-                <a:latin typeface="Calibri" pitchFamily="34" charset="0"/>
-                <a:ea typeface="Calibri" pitchFamily="34" charset="-122"/>
-                <a:cs typeface="Calibri" pitchFamily="34" charset="-120"/>
-              </a:rPr>
-              <a:t>Anthropic SDK (Python &amp; JS)</a:t>
-            </a:r>
-            <a:endParaRPr lang="en-US" sz="1100" dirty="0"/>
-          </a:p>
-          <a:p>
-            <a:pPr marL="342900" indent="-342900">
-              <a:buSzPct val="100000"/>
-              <a:buChar char="•"/>
-            </a:pPr>
-            <a:r>
-              <a:rPr lang="en-US" sz="1100" dirty="0">
-                <a:solidFill>
-                  <a:srgbClr val="334155"/>
-                </a:solidFill>
-                <a:latin typeface="Calibri" pitchFamily="34" charset="0"/>
-                <a:ea typeface="Calibri" pitchFamily="34" charset="-122"/>
-                <a:cs typeface="Calibri" pitchFamily="34" charset="-120"/>
-              </a:rPr>
-              <a:t>OpenAI SDK</a:t>
-            </a:r>
-            <a:endParaRPr lang="en-US" sz="1100" dirty="0"/>
-          </a:p>
-          <a:p>
-            <a:pPr marL="342900" indent="-342900">
-              <a:buSzPct val="100000"/>
-              <a:buChar char="•"/>
-            </a:pPr>
-            <a:r>
-              <a:rPr lang="en-US" sz="1100" dirty="0">
-                <a:solidFill>
-                  <a:srgbClr val="334155"/>
-                </a:solidFill>
-                <a:latin typeface="Calibri" pitchFamily="34" charset="0"/>
-                <a:ea typeface="Calibri" pitchFamily="34" charset="-122"/>
-                <a:cs typeface="Calibri" pitchFamily="34" charset="-120"/>
-              </a:rPr>
-              <a:t>Ollama (run models locally)</a:t>
-            </a:r>
-            <a:endParaRPr lang="en-US" sz="1100" dirty="0"/>
-          </a:p>
-          <a:p>
-            <a:pPr marL="342900" indent="-342900">
-              <a:buSzPct val="100000"/>
-              <a:buChar char="•"/>
-            </a:pPr>
-            <a:r>
-              <a:rPr lang="en-US" sz="1100" dirty="0">
-                <a:solidFill>
-                  <a:srgbClr val="334155"/>
-                </a:solidFill>
-                <a:latin typeface="Calibri" pitchFamily="34" charset="0"/>
-                <a:ea typeface="Calibri" pitchFamily="34" charset="-122"/>
-                <a:cs typeface="Calibri" pitchFamily="34" charset="-120"/>
-              </a:rPr>
-              <a:t>Google Generative AI SDK</a:t>
-            </a:r>
-            <a:endParaRPr lang="en-US" sz="1100" dirty="0"/>
-          </a:p>
-        </p:txBody>
-      </p:sp>
-      <p:sp>
-        <p:nvSpPr>
-          <p:cNvPr id="8" name="Shape 6"/>
-          <p:cNvSpPr/>
-          <p:nvPr/>
-        </p:nvSpPr>
-        <p:spPr>
-          <a:xfrm>
-            <a:off x="2468880" y="960120"/>
-            <a:ext cx="1965960" cy="3520440"/>
-          </a:xfrm>
-          <a:prstGeom prst="rect">
-            <a:avLst/>
-          </a:prstGeom>
-          <a:solidFill>
-            <a:srgbClr val="EDE7F6"/>
-          </a:solidFill>
-          <a:ln w="19050">
-            <a:solidFill>
-              <a:srgbClr val="7E57C2"/>
-            </a:solidFill>
-            <a:prstDash val="solid"/>
-          </a:ln>
-          <a:effectLst>
-            <a:outerShdw sx="100000" sy="100000" kx="0" ky="0" algn="bl" rotWithShape="0" blurRad="76200" dist="25400" dir="8100000">
-              <a:srgbClr val="000000">
-                <a:alpha val="10000"/>
-              </a:srgbClr>
-            </a:outerShdw>
-          </a:effectLst>
-        </p:spPr>
-      </p:sp>
-      <p:sp>
-        <p:nvSpPr>
-          <p:cNvPr id="9" name="Text 7"/>
-          <p:cNvSpPr/>
-          <p:nvPr/>
-        </p:nvSpPr>
-        <p:spPr>
-          <a:xfrm>
-            <a:off x="2578608" y="1051560"/>
-            <a:ext cx="1737360" cy="384048"/>
-          </a:xfrm>
-          <a:prstGeom prst="rect">
-            <a:avLst/>
-          </a:prstGeom>
-          <a:noFill/>
-          <a:ln/>
-        </p:spPr>
-        <p:txBody>
-          <a:bodyPr wrap="square" rtlCol="0" anchor="ctr"/>
-          <a:lstStyle/>
-          <a:p>
-            <a:pPr indent="0" marL="0">
-              <a:buNone/>
-            </a:pPr>
-            <a:r>
-              <a:rPr lang="en-US" sz="1250" b="1" dirty="0">
-                <a:solidFill>
-                  <a:srgbClr val="0F172A"/>
-                </a:solidFill>
-                <a:latin typeface="Trebuchet MS" pitchFamily="34" charset="0"/>
-                <a:ea typeface="Trebuchet MS" pitchFamily="34" charset="-122"/>
-                <a:cs typeface="Trebuchet MS" pitchFamily="34" charset="-120"/>
-              </a:rPr>
-              <a:t>🤖  Frameworks</a:t>
-            </a:r>
-            <a:endParaRPr lang="en-US" sz="1250" dirty="0"/>
-          </a:p>
-        </p:txBody>
-      </p:sp>
-      <p:sp>
-        <p:nvSpPr>
-          <p:cNvPr id="10" name="Shape 8"/>
-          <p:cNvSpPr/>
-          <p:nvPr/>
-        </p:nvSpPr>
-        <p:spPr>
-          <a:xfrm>
-            <a:off x="2578608" y="1463040"/>
-            <a:ext cx="1719072" cy="9144"/>
-          </a:xfrm>
-          <a:prstGeom prst="rect">
-            <a:avLst/>
-          </a:prstGeom>
-          <a:solidFill>
-            <a:srgbClr val="7E57C2"/>
-          </a:solidFill>
-          <a:ln w="12700">
-            <a:solidFill>
-              <a:srgbClr val="7E57C2">
-                <a:alpha val="60000"/>
-              </a:srgbClr>
-            </a:solidFill>
-            <a:prstDash val="solid"/>
-          </a:ln>
-        </p:spPr>
-      </p:sp>
-      <p:sp>
-        <p:nvSpPr>
-          <p:cNvPr id="11" name="Text 9"/>
-          <p:cNvSpPr/>
-          <p:nvPr/>
-        </p:nvSpPr>
-        <p:spPr>
-          <a:xfrm>
-            <a:off x="2578608" y="1581912"/>
-            <a:ext cx="1755648" cy="2724912"/>
-          </a:xfrm>
-          <a:prstGeom prst="rect">
-            <a:avLst/>
-          </a:prstGeom>
-          <a:noFill/>
-          <a:ln/>
-        </p:spPr>
-        <p:txBody>
-          <a:bodyPr wrap="square" rtlCol="0" anchor="ctr"/>
-          <a:lstStyle/>
-          <a:p>
-            <a:pPr marL="342900" indent="-342900">
-              <a:buSzPct val="100000"/>
-              <a:buChar char="•"/>
-            </a:pPr>
-            <a:r>
-              <a:rPr lang="en-US" sz="1100" dirty="0">
-                <a:solidFill>
-                  <a:srgbClr val="334155"/>
-                </a:solidFill>
-                <a:latin typeface="Calibri" pitchFamily="34" charset="0"/>
-                <a:ea typeface="Calibri" pitchFamily="34" charset="-122"/>
-                <a:cs typeface="Calibri" pitchFamily="34" charset="-120"/>
-              </a:rPr>
-              <a:t>LangChain / LangGraph</a:t>
-            </a:r>
-            <a:endParaRPr lang="en-US" sz="1100" dirty="0"/>
-          </a:p>
-          <a:p>
-            <a:pPr marL="342900" indent="-342900">
-              <a:buSzPct val="100000"/>
-              <a:buChar char="•"/>
-            </a:pPr>
-            <a:r>
-              <a:rPr lang="en-US" sz="1100" dirty="0">
-                <a:solidFill>
-                  <a:srgbClr val="334155"/>
-                </a:solidFill>
-                <a:latin typeface="Calibri" pitchFamily="34" charset="0"/>
-                <a:ea typeface="Calibri" pitchFamily="34" charset="-122"/>
-                <a:cs typeface="Calibri" pitchFamily="34" charset="-120"/>
-              </a:rPr>
-              <a:t>CrewAI (multi-agent)</a:t>
-            </a:r>
-            <a:endParaRPr lang="en-US" sz="1100" dirty="0"/>
-          </a:p>
-          <a:p>
-            <a:pPr marL="342900" indent="-342900">
-              <a:buSzPct val="100000"/>
-              <a:buChar char="•"/>
-            </a:pPr>
-            <a:r>
-              <a:rPr lang="en-US" sz="1100" dirty="0">
-                <a:solidFill>
-                  <a:srgbClr val="334155"/>
-                </a:solidFill>
-                <a:latin typeface="Calibri" pitchFamily="34" charset="0"/>
-                <a:ea typeface="Calibri" pitchFamily="34" charset="-122"/>
-                <a:cs typeface="Calibri" pitchFamily="34" charset="-120"/>
-              </a:rPr>
-              <a:t>AutoGen (Microsoft)</a:t>
-            </a:r>
-            <a:endParaRPr lang="en-US" sz="1100" dirty="0"/>
-          </a:p>
-          <a:p>
-            <a:pPr marL="342900" indent="-342900">
-              <a:buSzPct val="100000"/>
-              <a:buChar char="•"/>
-            </a:pPr>
-            <a:r>
-              <a:rPr lang="en-US" sz="1100" dirty="0">
-                <a:solidFill>
-                  <a:srgbClr val="334155"/>
-                </a:solidFill>
-                <a:latin typeface="Calibri" pitchFamily="34" charset="0"/>
-                <a:ea typeface="Calibri" pitchFamily="34" charset="-122"/>
-                <a:cs typeface="Calibri" pitchFamily="34" charset="-120"/>
-              </a:rPr>
-              <a:t>Semantic Kernel (.NET/Python)</a:t>
-            </a:r>
-            <a:endParaRPr lang="en-US" sz="1100" dirty="0"/>
-          </a:p>
-        </p:txBody>
-      </p:sp>
-      <p:sp>
-        <p:nvSpPr>
-          <p:cNvPr id="12" name="Shape 10"/>
-          <p:cNvSpPr/>
-          <p:nvPr/>
-        </p:nvSpPr>
-        <p:spPr>
-          <a:xfrm>
-            <a:off x="4617720" y="960120"/>
-            <a:ext cx="1965960" cy="3520440"/>
-          </a:xfrm>
-          <a:prstGeom prst="rect">
-            <a:avLst/>
-          </a:prstGeom>
-          <a:solidFill>
-            <a:srgbClr val="E8F5E9"/>
-          </a:solidFill>
-          <a:ln w="19050">
-            <a:solidFill>
-              <a:srgbClr val="43A047"/>
-            </a:solidFill>
-            <a:prstDash val="solid"/>
-          </a:ln>
-          <a:effectLst>
-            <a:outerShdw sx="100000" sy="100000" kx="0" ky="0" algn="bl" rotWithShape="0" blurRad="76200" dist="25400" dir="8100000">
-              <a:srgbClr val="000000">
-                <a:alpha val="10000"/>
-              </a:srgbClr>
-            </a:outerShdw>
-          </a:effectLst>
-        </p:spPr>
-      </p:sp>
-      <p:sp>
-        <p:nvSpPr>
-          <p:cNvPr id="13" name="Text 11"/>
-          <p:cNvSpPr/>
-          <p:nvPr/>
-        </p:nvSpPr>
-        <p:spPr>
-          <a:xfrm>
-            <a:off x="4727448" y="1051560"/>
-            <a:ext cx="1737360" cy="384048"/>
-          </a:xfrm>
-          <a:prstGeom prst="rect">
-            <a:avLst/>
-          </a:prstGeom>
-          <a:noFill/>
-          <a:ln/>
-        </p:spPr>
-        <p:txBody>
-          <a:bodyPr wrap="square" rtlCol="0" anchor="ctr"/>
-          <a:lstStyle/>
-          <a:p>
-            <a:pPr indent="0" marL="0">
-              <a:buNone/>
-            </a:pPr>
-            <a:r>
-              <a:rPr lang="en-US" sz="1250" b="1" dirty="0">
-                <a:solidFill>
-                  <a:srgbClr val="0F172A"/>
-                </a:solidFill>
-                <a:latin typeface="Trebuchet MS" pitchFamily="34" charset="0"/>
-                <a:ea typeface="Trebuchet MS" pitchFamily="34" charset="-122"/>
-                <a:cs typeface="Trebuchet MS" pitchFamily="34" charset="-120"/>
-              </a:rPr>
-              <a:t>📚  Learning</a:t>
-            </a:r>
-            <a:endParaRPr lang="en-US" sz="1250" dirty="0"/>
-          </a:p>
-        </p:txBody>
-      </p:sp>
-      <p:sp>
-        <p:nvSpPr>
-          <p:cNvPr id="14" name="Shape 12"/>
-          <p:cNvSpPr/>
-          <p:nvPr/>
-        </p:nvSpPr>
-        <p:spPr>
-          <a:xfrm>
-            <a:off x="4727448" y="1463040"/>
-            <a:ext cx="1719072" cy="9144"/>
-          </a:xfrm>
-          <a:prstGeom prst="rect">
-            <a:avLst/>
-          </a:prstGeom>
-          <a:solidFill>
-            <a:srgbClr val="43A047"/>
-          </a:solidFill>
-          <a:ln w="12700">
-            <a:solidFill>
-              <a:srgbClr val="43A047">
-                <a:alpha val="60000"/>
-              </a:srgbClr>
-            </a:solidFill>
-            <a:prstDash val="solid"/>
-          </a:ln>
-        </p:spPr>
-      </p:sp>
-      <p:sp>
-        <p:nvSpPr>
-          <p:cNvPr id="15" name="Text 13"/>
-          <p:cNvSpPr/>
-          <p:nvPr/>
-        </p:nvSpPr>
-        <p:spPr>
-          <a:xfrm>
-            <a:off x="4727448" y="1581912"/>
-            <a:ext cx="1755648" cy="2724912"/>
-          </a:xfrm>
-          <a:prstGeom prst="rect">
-            <a:avLst/>
-          </a:prstGeom>
-          <a:noFill/>
-          <a:ln/>
-        </p:spPr>
-        <p:txBody>
-          <a:bodyPr wrap="square" rtlCol="0" anchor="ctr"/>
-          <a:lstStyle/>
-          <a:p>
-            <a:pPr marL="342900" indent="-342900">
-              <a:buSzPct val="100000"/>
-              <a:buChar char="•"/>
-            </a:pPr>
-            <a:r>
-              <a:rPr lang="en-US" sz="1100" dirty="0">
-                <a:solidFill>
-                  <a:srgbClr val="334155"/>
-                </a:solidFill>
-                <a:latin typeface="Calibri" pitchFamily="34" charset="0"/>
-                <a:ea typeface="Calibri" pitchFamily="34" charset="-122"/>
-                <a:cs typeface="Calibri" pitchFamily="34" charset="-120"/>
-              </a:rPr>
-              <a:t>docs.anthropic.com</a:t>
-            </a:r>
-            <a:endParaRPr lang="en-US" sz="1100" dirty="0"/>
-          </a:p>
-          <a:p>
-            <a:pPr marL="342900" indent="-342900">
-              <a:buSzPct val="100000"/>
-              <a:buChar char="•"/>
-            </a:pPr>
-            <a:r>
-              <a:rPr lang="en-US" sz="1100" dirty="0">
-                <a:solidFill>
-                  <a:srgbClr val="334155"/>
-                </a:solidFill>
-                <a:latin typeface="Calibri" pitchFamily="34" charset="0"/>
-                <a:ea typeface="Calibri" pitchFamily="34" charset="-122"/>
-                <a:cs typeface="Calibri" pitchFamily="34" charset="-120"/>
-              </a:rPr>
-              <a:t>DeepLearning.ai short courses</a:t>
-            </a:r>
-            <a:endParaRPr lang="en-US" sz="1100" dirty="0"/>
-          </a:p>
-          <a:p>
-            <a:pPr marL="342900" indent="-342900">
-              <a:buSzPct val="100000"/>
-              <a:buChar char="•"/>
-            </a:pPr>
-            <a:r>
-              <a:rPr lang="en-US" sz="1100" dirty="0">
-                <a:solidFill>
-                  <a:srgbClr val="334155"/>
-                </a:solidFill>
-                <a:latin typeface="Calibri" pitchFamily="34" charset="0"/>
-                <a:ea typeface="Calibri" pitchFamily="34" charset="-122"/>
-                <a:cs typeface="Calibri" pitchFamily="34" charset="-120"/>
-              </a:rPr>
-              <a:t>Prompt Engineering Guide (promptingguide.ai)</a:t>
-            </a:r>
-            <a:endParaRPr lang="en-US" sz="1100" dirty="0"/>
-          </a:p>
-          <a:p>
-            <a:pPr marL="342900" indent="-342900">
-              <a:buSzPct val="100000"/>
-              <a:buChar char="•"/>
-            </a:pPr>
-            <a:r>
-              <a:rPr lang="en-US" sz="1100" dirty="0">
-                <a:solidFill>
-                  <a:srgbClr val="334155"/>
-                </a:solidFill>
-                <a:latin typeface="Calibri" pitchFamily="34" charset="0"/>
-                <a:ea typeface="Calibri" pitchFamily="34" charset="-122"/>
-                <a:cs typeface="Calibri" pitchFamily="34" charset="-120"/>
-              </a:rPr>
-              <a:t>Anthropic cookbook (GitHub)</a:t>
-            </a:r>
-            <a:endParaRPr lang="en-US" sz="1100" dirty="0"/>
-          </a:p>
-        </p:txBody>
-      </p:sp>
-      <p:sp>
-        <p:nvSpPr>
-          <p:cNvPr id="16" name="Shape 14"/>
-          <p:cNvSpPr/>
-          <p:nvPr/>
-        </p:nvSpPr>
-        <p:spPr>
-          <a:xfrm>
-            <a:off x="6766560" y="960120"/>
-            <a:ext cx="1965960" cy="3520440"/>
-          </a:xfrm>
-          <a:prstGeom prst="rect">
-            <a:avLst/>
-          </a:prstGeom>
-          <a:solidFill>
-            <a:srgbClr val="FFF8E1"/>
-          </a:solidFill>
-          <a:ln w="19050">
-            <a:solidFill>
-              <a:srgbClr val="FFB300"/>
-            </a:solidFill>
-            <a:prstDash val="solid"/>
-          </a:ln>
-          <a:effectLst>
-            <a:outerShdw sx="100000" sy="100000" kx="0" ky="0" algn="bl" rotWithShape="0" blurRad="76200" dist="25400" dir="8100000">
-              <a:srgbClr val="000000">
-                <a:alpha val="10000"/>
-              </a:srgbClr>
-            </a:outerShdw>
-          </a:effectLst>
-        </p:spPr>
-      </p:sp>
-      <p:sp>
-        <p:nvSpPr>
-          <p:cNvPr id="17" name="Text 15"/>
-          <p:cNvSpPr/>
-          <p:nvPr/>
-        </p:nvSpPr>
-        <p:spPr>
-          <a:xfrm>
-            <a:off x="6876288" y="1051560"/>
-            <a:ext cx="1737360" cy="384048"/>
-          </a:xfrm>
-          <a:prstGeom prst="rect">
-            <a:avLst/>
-          </a:prstGeom>
-          <a:noFill/>
-          <a:ln/>
-        </p:spPr>
-        <p:txBody>
-          <a:bodyPr wrap="square" rtlCol="0" anchor="ctr"/>
-          <a:lstStyle/>
-          <a:p>
-            <a:pPr indent="0" marL="0">
-              <a:buNone/>
-            </a:pPr>
-            <a:r>
-              <a:rPr lang="en-US" sz="1250" b="1" dirty="0">
-                <a:solidFill>
-                  <a:srgbClr val="0F172A"/>
-                </a:solidFill>
-                <a:latin typeface="Trebuchet MS" pitchFamily="34" charset="0"/>
-                <a:ea typeface="Trebuchet MS" pitchFamily="34" charset="-122"/>
-                <a:cs typeface="Trebuchet MS" pitchFamily="34" charset="-120"/>
-              </a:rPr>
-              <a:t>🔍  Observability</a:t>
-            </a:r>
-            <a:endParaRPr lang="en-US" sz="1250" dirty="0"/>
-          </a:p>
-        </p:txBody>
-      </p:sp>
-      <p:sp>
-        <p:nvSpPr>
-          <p:cNvPr id="18" name="Shape 16"/>
-          <p:cNvSpPr/>
-          <p:nvPr/>
-        </p:nvSpPr>
-        <p:spPr>
-          <a:xfrm>
-            <a:off x="6876288" y="1463040"/>
-            <a:ext cx="1719072" cy="9144"/>
-          </a:xfrm>
-          <a:prstGeom prst="rect">
-            <a:avLst/>
-          </a:prstGeom>
-          <a:solidFill>
-            <a:srgbClr val="FFB300"/>
-          </a:solidFill>
-          <a:ln w="12700">
-            <a:solidFill>
-              <a:srgbClr val="FFB300">
-                <a:alpha val="60000"/>
-              </a:srgbClr>
-            </a:solidFill>
-            <a:prstDash val="solid"/>
-          </a:ln>
-        </p:spPr>
-      </p:sp>
-      <p:sp>
-        <p:nvSpPr>
-          <p:cNvPr id="19" name="Text 17"/>
-          <p:cNvSpPr/>
-          <p:nvPr/>
-        </p:nvSpPr>
-        <p:spPr>
-          <a:xfrm>
-            <a:off x="6876288" y="1581912"/>
-            <a:ext cx="1755648" cy="2724912"/>
-          </a:xfrm>
-          <a:prstGeom prst="rect">
-            <a:avLst/>
-          </a:prstGeom>
-          <a:noFill/>
-          <a:ln/>
-        </p:spPr>
-        <p:txBody>
-          <a:bodyPr wrap="square" rtlCol="0" anchor="ctr"/>
-          <a:lstStyle/>
-          <a:p>
-            <a:pPr marL="342900" indent="-342900">
-              <a:buSzPct val="100000"/>
-              <a:buChar char="•"/>
-            </a:pPr>
-            <a:r>
-              <a:rPr lang="en-US" sz="1100" dirty="0">
-                <a:solidFill>
-                  <a:srgbClr val="334155"/>
-                </a:solidFill>
-                <a:latin typeface="Calibri" pitchFamily="34" charset="0"/>
-                <a:ea typeface="Calibri" pitchFamily="34" charset="-122"/>
-                <a:cs typeface="Calibri" pitchFamily="34" charset="-120"/>
-              </a:rPr>
-              <a:t>LangSmith (LangChain tracing)</a:t>
-            </a:r>
-            <a:endParaRPr lang="en-US" sz="1100" dirty="0"/>
-          </a:p>
-          <a:p>
-            <a:pPr marL="342900" indent="-342900">
-              <a:buSzPct val="100000"/>
-              <a:buChar char="•"/>
-            </a:pPr>
-            <a:r>
-              <a:rPr lang="en-US" sz="1100" dirty="0">
-                <a:solidFill>
-                  <a:srgbClr val="334155"/>
-                </a:solidFill>
-                <a:latin typeface="Calibri" pitchFamily="34" charset="0"/>
-                <a:ea typeface="Calibri" pitchFamily="34" charset="-122"/>
-                <a:cs typeface="Calibri" pitchFamily="34" charset="-120"/>
-              </a:rPr>
-              <a:t>Weights &amp; Biases Traces</a:t>
-            </a:r>
-            <a:endParaRPr lang="en-US" sz="1100" dirty="0"/>
-          </a:p>
-          <a:p>
-            <a:pPr marL="342900" indent="-342900">
-              <a:buSzPct val="100000"/>
-              <a:buChar char="•"/>
-            </a:pPr>
-            <a:r>
-              <a:rPr lang="en-US" sz="1100" dirty="0">
-                <a:solidFill>
-                  <a:srgbClr val="334155"/>
-                </a:solidFill>
-                <a:latin typeface="Calibri" pitchFamily="34" charset="0"/>
-                <a:ea typeface="Calibri" pitchFamily="34" charset="-122"/>
-                <a:cs typeface="Calibri" pitchFamily="34" charset="-120"/>
-              </a:rPr>
-              <a:t>Helicone (proxy + analytics)</a:t>
-            </a:r>
-            <a:endParaRPr lang="en-US" sz="1100" dirty="0"/>
-          </a:p>
-          <a:p>
-            <a:pPr marL="342900" indent="-342900">
-              <a:buSzPct val="100000"/>
-              <a:buChar char="•"/>
-            </a:pPr>
-            <a:r>
-              <a:rPr lang="en-US" sz="1100" dirty="0">
-                <a:solidFill>
-                  <a:srgbClr val="334155"/>
-                </a:solidFill>
-                <a:latin typeface="Calibri" pitchFamily="34" charset="0"/>
-                <a:ea typeface="Calibri" pitchFamily="34" charset="-122"/>
-                <a:cs typeface="Calibri" pitchFamily="34" charset="-120"/>
-              </a:rPr>
-              <a:t>Braintrust (evals)</a:t>
-            </a:r>
-            <a:endParaRPr lang="en-US" sz="1100" dirty="0"/>
-          </a:p>
-        </p:txBody>
-      </p:sp>
-      <p:sp>
-        <p:nvSpPr>
-          <p:cNvPr id="20" name="Shape 18"/>
-          <p:cNvSpPr/>
-          <p:nvPr/>
-        </p:nvSpPr>
-        <p:spPr>
-          <a:xfrm>
-            <a:off x="320040" y="4617720"/>
-            <a:ext cx="8503920" cy="320040"/>
-          </a:xfrm>
-          <a:prstGeom prst="rect">
-            <a:avLst/>
-          </a:prstGeom>
-          <a:solidFill>
-            <a:srgbClr val="E0F7FA"/>
-          </a:solidFill>
-          <a:ln w="12700">
-            <a:solidFill>
-              <a:srgbClr val="0891B2"/>
-            </a:solidFill>
-            <a:prstDash val="solid"/>
-          </a:ln>
-        </p:spPr>
-      </p:sp>
-      <p:sp>
-        <p:nvSpPr>
-          <p:cNvPr id="21" name="Text 19"/>
-          <p:cNvSpPr/>
-          <p:nvPr/>
-        </p:nvSpPr>
-        <p:spPr>
-          <a:xfrm>
-            <a:off x="502920" y="4617720"/>
-            <a:ext cx="8229600" cy="320040"/>
-          </a:xfrm>
-          <a:prstGeom prst="rect">
-            <a:avLst/>
-          </a:prstGeom>
-          <a:noFill/>
-          <a:ln/>
-        </p:spPr>
-        <p:txBody>
-          <a:bodyPr wrap="square" rtlCol="0" anchor="ctr"/>
-          <a:lstStyle/>
-          <a:p>
-            <a:pPr indent="0" marL="0">
-              <a:buNone/>
-            </a:pPr>
-            <a:r>
-              <a:rPr lang="en-US" sz="1150" dirty="0">
-                <a:solidFill>
-                  <a:srgbClr val="334155"/>
-                </a:solidFill>
-                <a:latin typeface="Calibri" pitchFamily="34" charset="0"/>
-                <a:ea typeface="Calibri" pitchFamily="34" charset="-122"/>
-                <a:cs typeface="Calibri" pitchFamily="34" charset="-120"/>
-              </a:rPr>
-              <a:t>💡  Best way to learn: pick ONE real problem and solve it end-to-end. Start simple, measure, then add complexity.</a:t>
-            </a:r>
-            <a:endParaRPr lang="en-US" sz="1150" dirty="0"/>
-          </a:p>
-        </p:txBody>
-      </p:sp>
-    </p:spTree>
-  </p:cSld>
-  <p:clrMapOvr>
-    <a:masterClrMapping/>
-  </p:clrMapOvr>
-</p:sld>
-</file>
-
-<file path=ppt/slides/slide21.xml><?xml version="1.0" encoding="utf-8"?>
 <p:sld xmlns:a="http://schemas.openxmlformats.org/drawingml/2006/main" xmlns:r="http://schemas.openxmlformats.org/officeDocument/2006/relationships" xmlns:p="http://schemas.openxmlformats.org/presentationml/2006/main">
   <p:cSld name="Slide 21">
     <p:bg>
